--- a/competition/goai-agent-infra/初赛方案_NeoTrix研发闭环.pptx
+++ b/competition/goai-agent-infra/初赛方案_NeoTrix研发闭环.pptx
@@ -3373,143 +3373,697 @@
       </p:sp>
       <p:sp>
         <p:nvSpPr>
-          <p:cNvPr id="38" name="文本框 37"/>
-          <p:cNvSpPr txBox="1"/>
-          <p:nvPr/>
-        </p:nvSpPr>
-        <p:spPr>
-          <a:xfrm>
-            <a:off x="525780" y="1204595"/>
-            <a:ext cx="8013065" cy="645160"/>
-          </a:xfrm>
-          <a:prstGeom prst="rect">
-            <a:avLst/>
-          </a:prstGeom>
-          <a:noFill/>
-        </p:spPr>
-        <p:txBody>
-          <a:bodyPr wrap="square" rtlCol="0">
-            <a:spAutoFit/>
-          </a:bodyPr>
-          <a:p>
-            <a:r>
-              <a:rPr lang="zh-CN" altLang="en-US">
-                <a:latin typeface="微软雅黑" pitchFamily="34" charset="0"/>
-                <a:ea typeface="微软雅黑" pitchFamily="34" charset="0"/>
-              </a:rPr>
-              <a:t>官方用云 Skills（必选）：alibabacloud-resourcecenter-search / ecs-diagnose / network-reachability-analysis / sas-overview / data-agent-skill，4 个串联即排障链路。</a:t>
-            </a:r>
-            <a:r>
-              <a:rPr lang="en-US" altLang="zh-CN">
-                <a:latin typeface="微软雅黑" pitchFamily="34" charset="0"/>
-                <a:ea typeface="微软雅黑" pitchFamily="34" charset="0"/>
-              </a:rPr>
-              <a:t/>
-            </a:r>
-            <a:r>
-              <a:rPr lang="zh-CN" altLang="en-US">
-                <a:latin typeface="微软雅黑" pitchFamily="34" charset="0"/>
-                <a:ea typeface="微软雅黑" pitchFamily="34" charset="0"/>
-              </a:rPr>
-              <a:t/>
-            </a:r>
-            <a:r>
-              <a:rPr lang="en-US" altLang="zh-CN">
-                <a:latin typeface="微软雅黑" pitchFamily="34" charset="0"/>
-                <a:ea typeface="微软雅黑" pitchFamily="34" charset="0"/>
-              </a:rPr>
-              <a:t/>
-            </a:r>
-            <a:r>
-              <a:rPr lang="zh-CN" altLang="en-US">
-                <a:latin typeface="微软雅黑" pitchFamily="34" charset="0"/>
-                <a:ea typeface="微软雅黑" pitchFamily="34" charset="0"/>
-              </a:rPr>
-              <a:t/>
-            </a:r>
-            <a:r>
-              <a:rPr lang="en-US" altLang="zh-CN">
-                <a:latin typeface="微软雅黑" pitchFamily="34" charset="0"/>
-                <a:ea typeface="微软雅黑" pitchFamily="34" charset="0"/>
-              </a:rPr>
-              <a:t/>
-            </a:r>
-            <a:r>
-              <a:rPr lang="zh-CN" altLang="en-US">
-                <a:latin typeface="微软雅黑" pitchFamily="34" charset="0"/>
-                <a:ea typeface="微软雅黑" pitchFamily="34" charset="0"/>
-              </a:rPr>
-              <a:t/>
-            </a:r>
-            <a:r>
-              <a:rPr lang="en-US" altLang="zh-CN">
-                <a:latin typeface="微软雅黑" pitchFamily="34" charset="0"/>
-                <a:ea typeface="微软雅黑" pitchFamily="34" charset="0"/>
-              </a:rPr>
-              <a:t/>
-            </a:r>
-            <a:r>
-              <a:rPr lang="zh-CN" altLang="en-US">
-                <a:latin typeface="微软雅黑" pitchFamily="34" charset="0"/>
-                <a:ea typeface="微软雅黑" pitchFamily="34" charset="0"/>
-              </a:rPr>
-              <a:t/>
-            </a:r>
-            <a:r>
-              <a:rPr lang="en-US" altLang="zh-CN">
-                <a:latin typeface="微软雅黑" pitchFamily="34" charset="0"/>
-                <a:ea typeface="微软雅黑" pitchFamily="34" charset="0"/>
-              </a:rPr>
-              <a:t/>
-            </a:r>
-            <a:r>
-              <a:rPr lang="zh-CN" altLang="en-US">
-                <a:latin typeface="微软雅黑" pitchFamily="34" charset="0"/>
-                <a:ea typeface="微软雅黑" pitchFamily="34" charset="0"/>
-              </a:rPr>
-              <a:t/>
-            </a:r>
-            <a:endParaRPr lang="zh-CN" altLang="en-US">
-              <a:latin typeface="微软雅黑" pitchFamily="34" charset="0"/>
-              <a:ea typeface="微软雅黑" pitchFamily="34" charset="0"/>
-            </a:endParaRPr>
-          </a:p>
-          <a:p>
-            <a:r>
-              <a:t>核心 Skill：dev-implementer / rev-officer / repair-healer / experience-tree / mcp-gateway / github-operations（输入输出/依赖/失败处理/安全边界见附录B）。</a:t>
-            </a:r>
-          </a:p>
-          <a:p>
-            <a:r>
-              <a:t>复用性：Skill 为任务能力抽象层，SKILL.md 装载 Worker 工作区，Manager 按需分发；版本/发布/回滚经安全审核→灰度→审计。</a:t>
-            </a:r>
-          </a:p>
-        </p:txBody>
-      </p:sp>
-      <p:pic>
-        <p:nvPicPr>
-          <p:cNvPr id="37" name="图片 36"/>
-          <p:cNvPicPr>
-            <a:picLocks noChangeAspect="1"/>
-          </p:cNvPicPr>
-          <p:nvPr/>
-        </p:nvPicPr>
-        <p:blipFill>
-          <a:blip r:embed="rId1"/>
-          <a:stretch>
-            <a:fillRect/>
-          </a:stretch>
-        </p:blipFill>
-        <p:spPr>
-          <a:xfrm>
-            <a:off x="3225165" y="2377440"/>
-            <a:ext cx="5741670" cy="3235325"/>
-          </a:xfrm>
-          <a:prstGeom prst="rect">
-            <a:avLst/>
-          </a:prstGeom>
-        </p:spPr>
-      </p:pic>
+          <p:cNvPr id="9" name="Rounded Rectangle 8"/>
+          <p:cNvSpPr/>
+          <p:nvPr/>
+        </p:nvSpPr>
+        <p:spPr>
+          <a:xfrm>
+            <a:off x="502920" y="1335024"/>
+            <a:ext cx="5440680" cy="457200"/>
+          </a:xfrm>
+          <a:prstGeom prst="roundRect">
+            <a:avLst>
+              <a:gd name="adj" fmla="val 10000"/>
+            </a:avLst>
+          </a:prstGeom>
+          <a:solidFill>
+            <a:srgbClr val="2E5BFF"/>
+          </a:solidFill>
+          <a:ln>
+            <a:noFill/>
+          </a:ln>
+          <a:effectLst/>
+        </p:spPr>
+        <p:style>
+          <a:lnRef idx="1">
+            <a:schemeClr val="accent1"/>
+          </a:lnRef>
+          <a:fillRef idx="3">
+            <a:schemeClr val="accent1"/>
+          </a:fillRef>
+          <a:effectRef idx="2">
+            <a:schemeClr val="accent1"/>
+          </a:effectRef>
+          <a:fontRef idx="minor">
+            <a:schemeClr val="lt1"/>
+          </a:fontRef>
+        </p:style>
+        <p:txBody>
+          <a:bodyPr rtlCol="0" anchor="ctr" wrap="square" lIns="54864" rIns="54864" tIns="18288" bIns="18288"/>
+          <a:lstStyle/>
+          <a:p>
+            <a:pPr algn="ctr">
+              <a:lnSpc>
+                <a:spcPct val="102000"/>
+              </a:lnSpc>
+            </a:pPr>
+            <a:r>
+              <a:rPr sz="1250" b="1" spc="100">
+                <a:solidFill>
+                  <a:srgbClr val="FFFFFF"/>
+                </a:solidFill>
+                <a:latin typeface="微软雅黑"/>
+                <a:ea typeface="微软雅黑"/>
+              </a:rPr>
+              <a:t>官方用云 Skills（必选）</a:t>
+            </a:r>
+          </a:p>
+        </p:txBody>
+      </p:sp>
+      <p:sp>
+        <p:nvSpPr>
+          <p:cNvPr id="10" name="Rounded Rectangle 9"/>
+          <p:cNvSpPr/>
+          <p:nvPr/>
+        </p:nvSpPr>
+        <p:spPr>
+          <a:xfrm>
+            <a:off x="502920" y="1856231"/>
+            <a:ext cx="5440680" cy="1783080"/>
+          </a:xfrm>
+          <a:prstGeom prst="roundRect">
+            <a:avLst>
+              <a:gd name="adj" fmla="val 10000"/>
+            </a:avLst>
+          </a:prstGeom>
+          <a:solidFill>
+            <a:srgbClr val="F1F5F9"/>
+          </a:solidFill>
+          <a:ln>
+            <a:noFill/>
+          </a:ln>
+          <a:effectLst/>
+        </p:spPr>
+        <p:style>
+          <a:lnRef idx="1">
+            <a:schemeClr val="accent1"/>
+          </a:lnRef>
+          <a:fillRef idx="3">
+            <a:schemeClr val="accent1"/>
+          </a:fillRef>
+          <a:effectRef idx="2">
+            <a:schemeClr val="accent1"/>
+          </a:effectRef>
+          <a:fontRef idx="minor">
+            <a:schemeClr val="lt1"/>
+          </a:fontRef>
+        </p:style>
+        <p:txBody>
+          <a:bodyPr rtlCol="0" anchor="t" wrap="square" lIns="54864" rIns="54864" tIns="18288" bIns="18288"/>
+          <a:lstStyle/>
+          <a:p>
+            <a:pPr algn="l">
+              <a:lnSpc>
+                <a:spcPct val="118000"/>
+              </a:lnSpc>
+            </a:pPr>
+            <a:r>
+              <a:rPr sz="1050" b="0">
+                <a:solidFill>
+                  <a:srgbClr val="0F172A"/>
+                </a:solidFill>
+                <a:latin typeface="微软雅黑"/>
+                <a:ea typeface="微软雅黑"/>
+              </a:rPr>
+              <a:t>alibabacloud-resourcecenter-search 资源搜索</a:t>
+            </a:r>
+          </a:p>
+          <a:p>
+            <a:pPr algn="l">
+              <a:lnSpc>
+                <a:spcPct val="118000"/>
+              </a:lnSpc>
+            </a:pPr>
+            <a:r>
+              <a:rPr sz="1050" b="0">
+                <a:solidFill>
+                  <a:srgbClr val="0F172A"/>
+                </a:solidFill>
+                <a:latin typeface="微软雅黑"/>
+                <a:ea typeface="微软雅黑"/>
+              </a:rPr>
+              <a:t>alibabacloud-ecs-diagnose 实例诊断</a:t>
+            </a:r>
+          </a:p>
+          <a:p>
+            <a:pPr algn="l">
+              <a:lnSpc>
+                <a:spcPct val="118000"/>
+              </a:lnSpc>
+            </a:pPr>
+            <a:r>
+              <a:rPr sz="1050" b="0">
+                <a:solidFill>
+                  <a:srgbClr val="0F172A"/>
+                </a:solidFill>
+                <a:latin typeface="微软雅黑"/>
+                <a:ea typeface="微软雅黑"/>
+              </a:rPr>
+              <a:t>alibabacloud-network-reachability-analysis 网络分析</a:t>
+            </a:r>
+          </a:p>
+          <a:p>
+            <a:pPr algn="l">
+              <a:lnSpc>
+                <a:spcPct val="118000"/>
+              </a:lnSpc>
+            </a:pPr>
+            <a:r>
+              <a:rPr sz="1050" b="0">
+                <a:solidFill>
+                  <a:srgbClr val="0F172A"/>
+                </a:solidFill>
+                <a:latin typeface="微软雅黑"/>
+                <a:ea typeface="微软雅黑"/>
+              </a:rPr>
+              <a:t>alibabacloud-sas-overview 安全态势</a:t>
+            </a:r>
+          </a:p>
+        </p:txBody>
+      </p:sp>
+      <p:sp>
+        <p:nvSpPr>
+          <p:cNvPr id="11" name="Rounded Rectangle 10"/>
+          <p:cNvSpPr/>
+          <p:nvPr/>
+        </p:nvSpPr>
+        <p:spPr>
+          <a:xfrm>
+            <a:off x="6263640" y="1335024"/>
+            <a:ext cx="5440680" cy="457200"/>
+          </a:xfrm>
+          <a:prstGeom prst="roundRect">
+            <a:avLst>
+              <a:gd name="adj" fmla="val 10000"/>
+            </a:avLst>
+          </a:prstGeom>
+          <a:solidFill>
+            <a:srgbClr val="0EA5E9"/>
+          </a:solidFill>
+          <a:ln>
+            <a:noFill/>
+          </a:ln>
+          <a:effectLst/>
+        </p:spPr>
+        <p:style>
+          <a:lnRef idx="1">
+            <a:schemeClr val="accent1"/>
+          </a:lnRef>
+          <a:fillRef idx="3">
+            <a:schemeClr val="accent1"/>
+          </a:fillRef>
+          <a:effectRef idx="2">
+            <a:schemeClr val="accent1"/>
+          </a:effectRef>
+          <a:fontRef idx="minor">
+            <a:schemeClr val="lt1"/>
+          </a:fontRef>
+        </p:style>
+        <p:txBody>
+          <a:bodyPr rtlCol="0" anchor="ctr" wrap="square" lIns="54864" rIns="54864" tIns="18288" bIns="18288"/>
+          <a:lstStyle/>
+          <a:p>
+            <a:pPr algn="ctr">
+              <a:lnSpc>
+                <a:spcPct val="102000"/>
+              </a:lnSpc>
+            </a:pPr>
+            <a:r>
+              <a:rPr sz="1250" b="1" spc="100">
+                <a:solidFill>
+                  <a:srgbClr val="FFFFFF"/>
+                </a:solidFill>
+                <a:latin typeface="微软雅黑"/>
+                <a:ea typeface="微软雅黑"/>
+              </a:rPr>
+              <a:t>编码 / 实施</a:t>
+            </a:r>
+          </a:p>
+        </p:txBody>
+      </p:sp>
+      <p:sp>
+        <p:nvSpPr>
+          <p:cNvPr id="12" name="Rounded Rectangle 11"/>
+          <p:cNvSpPr/>
+          <p:nvPr/>
+        </p:nvSpPr>
+        <p:spPr>
+          <a:xfrm>
+            <a:off x="6263640" y="1856231"/>
+            <a:ext cx="5440680" cy="1783080"/>
+          </a:xfrm>
+          <a:prstGeom prst="roundRect">
+            <a:avLst>
+              <a:gd name="adj" fmla="val 10000"/>
+            </a:avLst>
+          </a:prstGeom>
+          <a:solidFill>
+            <a:srgbClr val="F1F5F9"/>
+          </a:solidFill>
+          <a:ln>
+            <a:noFill/>
+          </a:ln>
+          <a:effectLst/>
+        </p:spPr>
+        <p:style>
+          <a:lnRef idx="1">
+            <a:schemeClr val="accent1"/>
+          </a:lnRef>
+          <a:fillRef idx="3">
+            <a:schemeClr val="accent1"/>
+          </a:fillRef>
+          <a:effectRef idx="2">
+            <a:schemeClr val="accent1"/>
+          </a:effectRef>
+          <a:fontRef idx="minor">
+            <a:schemeClr val="lt1"/>
+          </a:fontRef>
+        </p:style>
+        <p:txBody>
+          <a:bodyPr rtlCol="0" anchor="t" wrap="square" lIns="54864" rIns="54864" tIns="18288" bIns="18288"/>
+          <a:lstStyle/>
+          <a:p>
+            <a:pPr algn="l">
+              <a:lnSpc>
+                <a:spcPct val="118000"/>
+              </a:lnSpc>
+            </a:pPr>
+            <a:r>
+              <a:rPr sz="1050" b="0">
+                <a:solidFill>
+                  <a:srgbClr val="0F172A"/>
+                </a:solidFill>
+                <a:latin typeface="微软雅黑"/>
+                <a:ea typeface="微软雅黑"/>
+              </a:rPr>
+              <a:t>dev-implementer  TDD 红-绿-重构</a:t>
+            </a:r>
+          </a:p>
+          <a:p>
+            <a:pPr algn="l">
+              <a:lnSpc>
+                <a:spcPct val="118000"/>
+              </a:lnSpc>
+            </a:pPr>
+            <a:r>
+              <a:rPr sz="1050" b="0">
+                <a:solidFill>
+                  <a:srgbClr val="0F172A"/>
+                </a:solidFill>
+                <a:latin typeface="微软雅黑"/>
+                <a:ea typeface="微软雅黑"/>
+              </a:rPr>
+              <a:t>github-operations  Issue/分支/PR</a:t>
+            </a:r>
+          </a:p>
+          <a:p>
+            <a:pPr algn="l">
+              <a:lnSpc>
+                <a:spcPct val="118000"/>
+              </a:lnSpc>
+            </a:pPr>
+            <a:r>
+              <a:rPr sz="1050" b="0">
+                <a:solidFill>
+                  <a:srgbClr val="0F172A"/>
+                </a:solidFill>
+                <a:latin typeface="微软雅黑"/>
+                <a:ea typeface="微软雅黑"/>
+              </a:rPr>
+              <a:t>repair-healer  自愈修复与恢复验证</a:t>
+            </a:r>
+          </a:p>
+        </p:txBody>
+      </p:sp>
+      <p:sp>
+        <p:nvSpPr>
+          <p:cNvPr id="13" name="Rounded Rectangle 12"/>
+          <p:cNvSpPr/>
+          <p:nvPr/>
+        </p:nvSpPr>
+        <p:spPr>
+          <a:xfrm>
+            <a:off x="502920" y="3657600"/>
+            <a:ext cx="5440680" cy="457200"/>
+          </a:xfrm>
+          <a:prstGeom prst="roundRect">
+            <a:avLst>
+              <a:gd name="adj" fmla="val 10000"/>
+            </a:avLst>
+          </a:prstGeom>
+          <a:solidFill>
+            <a:srgbClr val="06B6D4"/>
+          </a:solidFill>
+          <a:ln>
+            <a:noFill/>
+          </a:ln>
+          <a:effectLst/>
+        </p:spPr>
+        <p:style>
+          <a:lnRef idx="1">
+            <a:schemeClr val="accent1"/>
+          </a:lnRef>
+          <a:fillRef idx="3">
+            <a:schemeClr val="accent1"/>
+          </a:fillRef>
+          <a:effectRef idx="2">
+            <a:schemeClr val="accent1"/>
+          </a:effectRef>
+          <a:fontRef idx="minor">
+            <a:schemeClr val="lt1"/>
+          </a:fontRef>
+        </p:style>
+        <p:txBody>
+          <a:bodyPr rtlCol="0" anchor="ctr" wrap="square" lIns="54864" rIns="54864" tIns="18288" bIns="18288"/>
+          <a:lstStyle/>
+          <a:p>
+            <a:pPr algn="ctr">
+              <a:lnSpc>
+                <a:spcPct val="102000"/>
+              </a:lnSpc>
+            </a:pPr>
+            <a:r>
+              <a:rPr sz="1250" b="1" spc="100">
+                <a:solidFill>
+                  <a:srgbClr val="FFFFFF"/>
+                </a:solidFill>
+                <a:latin typeface="微软雅黑"/>
+                <a:ea typeface="微软雅黑"/>
+              </a:rPr>
+              <a:t>审查 / 治理</a:t>
+            </a:r>
+          </a:p>
+        </p:txBody>
+      </p:sp>
+      <p:sp>
+        <p:nvSpPr>
+          <p:cNvPr id="14" name="Rounded Rectangle 13"/>
+          <p:cNvSpPr/>
+          <p:nvPr/>
+        </p:nvSpPr>
+        <p:spPr>
+          <a:xfrm>
+            <a:off x="502920" y="4178808"/>
+            <a:ext cx="5440680" cy="1783080"/>
+          </a:xfrm>
+          <a:prstGeom prst="roundRect">
+            <a:avLst>
+              <a:gd name="adj" fmla="val 10000"/>
+            </a:avLst>
+          </a:prstGeom>
+          <a:solidFill>
+            <a:srgbClr val="F1F5F9"/>
+          </a:solidFill>
+          <a:ln>
+            <a:noFill/>
+          </a:ln>
+          <a:effectLst/>
+        </p:spPr>
+        <p:style>
+          <a:lnRef idx="1">
+            <a:schemeClr val="accent1"/>
+          </a:lnRef>
+          <a:fillRef idx="3">
+            <a:schemeClr val="accent1"/>
+          </a:fillRef>
+          <a:effectRef idx="2">
+            <a:schemeClr val="accent1"/>
+          </a:effectRef>
+          <a:fontRef idx="minor">
+            <a:schemeClr val="lt1"/>
+          </a:fontRef>
+        </p:style>
+        <p:txBody>
+          <a:bodyPr rtlCol="0" anchor="t" wrap="square" lIns="54864" rIns="54864" tIns="18288" bIns="18288"/>
+          <a:lstStyle/>
+          <a:p>
+            <a:pPr algn="l">
+              <a:lnSpc>
+                <a:spcPct val="118000"/>
+              </a:lnSpc>
+            </a:pPr>
+            <a:r>
+              <a:rPr sz="1050" b="0">
+                <a:solidFill>
+                  <a:srgbClr val="0F172A"/>
+                </a:solidFill>
+                <a:latin typeface="微软雅黑"/>
+                <a:ea typeface="微软雅黑"/>
+              </a:rPr>
+              <a:t>rev-officer  全量审查 D1-D63+S1-S7</a:t>
+            </a:r>
+          </a:p>
+          <a:p>
+            <a:pPr algn="l">
+              <a:lnSpc>
+                <a:spcPct val="118000"/>
+              </a:lnSpc>
+            </a:pPr>
+            <a:r>
+              <a:rPr sz="1050" b="0">
+                <a:solidFill>
+                  <a:srgbClr val="0F172A"/>
+                </a:solidFill>
+                <a:latin typeface="微软雅黑"/>
+                <a:ea typeface="微软雅黑"/>
+              </a:rPr>
+              <a:t>gov-steward  合规策略</a:t>
+            </a:r>
+          </a:p>
+          <a:p>
+            <a:pPr algn="l">
+              <a:lnSpc>
+                <a:spcPct val="118000"/>
+              </a:lnSpc>
+            </a:pPr>
+            <a:r>
+              <a:rPr sz="1050" b="0">
+                <a:solidFill>
+                  <a:srgbClr val="0F172A"/>
+                </a:solidFill>
+                <a:latin typeface="微软雅黑"/>
+                <a:ea typeface="微软雅黑"/>
+              </a:rPr>
+              <a:t>mcp-gateway  MCP 工具聚合</a:t>
+            </a:r>
+          </a:p>
+        </p:txBody>
+      </p:sp>
+      <p:sp>
+        <p:nvSpPr>
+          <p:cNvPr id="15" name="Rounded Rectangle 14"/>
+          <p:cNvSpPr/>
+          <p:nvPr/>
+        </p:nvSpPr>
+        <p:spPr>
+          <a:xfrm>
+            <a:off x="6263640" y="3657600"/>
+            <a:ext cx="5440680" cy="457200"/>
+          </a:xfrm>
+          <a:prstGeom prst="roundRect">
+            <a:avLst>
+              <a:gd name="adj" fmla="val 10000"/>
+            </a:avLst>
+          </a:prstGeom>
+          <a:solidFill>
+            <a:srgbClr val="F5B301"/>
+          </a:solidFill>
+          <a:ln>
+            <a:noFill/>
+          </a:ln>
+          <a:effectLst/>
+        </p:spPr>
+        <p:style>
+          <a:lnRef idx="1">
+            <a:schemeClr val="accent1"/>
+          </a:lnRef>
+          <a:fillRef idx="3">
+            <a:schemeClr val="accent1"/>
+          </a:fillRef>
+          <a:effectRef idx="2">
+            <a:schemeClr val="accent1"/>
+          </a:effectRef>
+          <a:fontRef idx="minor">
+            <a:schemeClr val="lt1"/>
+          </a:fontRef>
+        </p:style>
+        <p:txBody>
+          <a:bodyPr rtlCol="0" anchor="ctr" wrap="square" lIns="54864" rIns="54864" tIns="18288" bIns="18288"/>
+          <a:lstStyle/>
+          <a:p>
+            <a:pPr algn="ctr">
+              <a:lnSpc>
+                <a:spcPct val="102000"/>
+              </a:lnSpc>
+            </a:pPr>
+            <a:r>
+              <a:rPr sz="1250" b="1" spc="100">
+                <a:solidFill>
+                  <a:srgbClr val="FFFFFF"/>
+                </a:solidFill>
+                <a:latin typeface="微软雅黑"/>
+                <a:ea typeface="微软雅黑"/>
+              </a:rPr>
+              <a:t>知识 / 吸收</a:t>
+            </a:r>
+          </a:p>
+        </p:txBody>
+      </p:sp>
+      <p:sp>
+        <p:nvSpPr>
+          <p:cNvPr id="16" name="Rounded Rectangle 15"/>
+          <p:cNvSpPr/>
+          <p:nvPr/>
+        </p:nvSpPr>
+        <p:spPr>
+          <a:xfrm>
+            <a:off x="6263640" y="4178808"/>
+            <a:ext cx="5440680" cy="1783080"/>
+          </a:xfrm>
+          <a:prstGeom prst="roundRect">
+            <a:avLst>
+              <a:gd name="adj" fmla="val 10000"/>
+            </a:avLst>
+          </a:prstGeom>
+          <a:solidFill>
+            <a:srgbClr val="F1F5F9"/>
+          </a:solidFill>
+          <a:ln>
+            <a:noFill/>
+          </a:ln>
+          <a:effectLst/>
+        </p:spPr>
+        <p:style>
+          <a:lnRef idx="1">
+            <a:schemeClr val="accent1"/>
+          </a:lnRef>
+          <a:fillRef idx="3">
+            <a:schemeClr val="accent1"/>
+          </a:fillRef>
+          <a:effectRef idx="2">
+            <a:schemeClr val="accent1"/>
+          </a:effectRef>
+          <a:fontRef idx="minor">
+            <a:schemeClr val="lt1"/>
+          </a:fontRef>
+        </p:style>
+        <p:txBody>
+          <a:bodyPr rtlCol="0" anchor="t" wrap="square" lIns="54864" rIns="54864" tIns="18288" bIns="18288"/>
+          <a:lstStyle/>
+          <a:p>
+            <a:pPr algn="l">
+              <a:lnSpc>
+                <a:spcPct val="118000"/>
+              </a:lnSpc>
+            </a:pPr>
+            <a:r>
+              <a:rPr sz="1050" b="0">
+                <a:solidFill>
+                  <a:srgbClr val="0F172A"/>
+                </a:solidFill>
+                <a:latin typeface="微软雅黑"/>
+                <a:ea typeface="微软雅黑"/>
+              </a:rPr>
+              <a:t>experience-tree  五阶段吸收协议</a:t>
+            </a:r>
+          </a:p>
+          <a:p>
+            <a:pPr algn="l">
+              <a:lnSpc>
+                <a:spcPct val="118000"/>
+              </a:lnSpc>
+            </a:pPr>
+            <a:r>
+              <a:rPr sz="1050" b="0">
+                <a:solidFill>
+                  <a:srgbClr val="0F172A"/>
+                </a:solidFill>
+                <a:latin typeface="微软雅黑"/>
+                <a:ea typeface="微软雅黑"/>
+              </a:rPr>
+              <a:t>sg-diagnostician  元认知自审计</a:t>
+            </a:r>
+          </a:p>
+          <a:p>
+            <a:pPr algn="l">
+              <a:lnSpc>
+                <a:spcPct val="118000"/>
+              </a:lnSpc>
+            </a:pPr>
+            <a:r>
+              <a:rPr sz="1050" b="0">
+                <a:solidFill>
+                  <a:srgbClr val="0F172A"/>
+                </a:solidFill>
+                <a:latin typeface="微软雅黑"/>
+                <a:ea typeface="微软雅黑"/>
+              </a:rPr>
+              <a:t>KB RAG  向量+BM25 混合检索</a:t>
+            </a:r>
+          </a:p>
+        </p:txBody>
+      </p:sp>
+      <p:sp>
+        <p:nvSpPr>
+          <p:cNvPr id="17" name="Rounded Rectangle 16"/>
+          <p:cNvSpPr/>
+          <p:nvPr/>
+        </p:nvSpPr>
+        <p:spPr>
+          <a:xfrm>
+            <a:off x="502920" y="5989320"/>
+            <a:ext cx="11155680" cy="502920"/>
+          </a:xfrm>
+          <a:prstGeom prst="roundRect">
+            <a:avLst>
+              <a:gd name="adj" fmla="val 10000"/>
+            </a:avLst>
+          </a:prstGeom>
+          <a:solidFill>
+            <a:srgbClr val="E2E8F0"/>
+          </a:solidFill>
+          <a:ln>
+            <a:noFill/>
+          </a:ln>
+          <a:effectLst/>
+        </p:spPr>
+        <p:style>
+          <a:lnRef idx="1">
+            <a:schemeClr val="accent1"/>
+          </a:lnRef>
+          <a:fillRef idx="3">
+            <a:schemeClr val="accent1"/>
+          </a:fillRef>
+          <a:effectRef idx="2">
+            <a:schemeClr val="accent1"/>
+          </a:effectRef>
+          <a:fontRef idx="minor">
+            <a:schemeClr val="lt1"/>
+          </a:fontRef>
+        </p:style>
+        <p:txBody>
+          <a:bodyPr rtlCol="0" anchor="ctr" wrap="square" lIns="54864" rIns="54864" tIns="18288" bIns="18288"/>
+          <a:lstStyle/>
+          <a:p>
+            <a:pPr algn="l">
+              <a:lnSpc>
+                <a:spcPct val="118000"/>
+              </a:lnSpc>
+            </a:pPr>
+            <a:r>
+              <a:rPr sz="1000" b="0">
+                <a:solidFill>
+                  <a:srgbClr val="0F172A"/>
+                </a:solidFill>
+                <a:latin typeface="微软雅黑"/>
+                <a:ea typeface="微软雅黑"/>
+              </a:rPr>
+              <a:t>生命周期：SKILL.md 装载 Worker 工作区 → Manager 按需分发 → 版本/发布/回滚（安全审核→灰度→审计） · 4 个官方 Skill 串联即排障链路</a:t>
+            </a:r>
+          </a:p>
+        </p:txBody>
+      </p:sp>
     </p:spTree>
   </p:cSld>
   <p:clrMapOvr>
@@ -3925,155 +4479,680 @@
       </p:sp>
       <p:sp>
         <p:nvSpPr>
-          <p:cNvPr id="38" name="文本框 37"/>
-          <p:cNvSpPr txBox="1"/>
-          <p:nvPr/>
-        </p:nvSpPr>
-        <p:spPr>
-          <a:xfrm>
-            <a:off x="525780" y="1204595"/>
-            <a:ext cx="8013065" cy="645160"/>
-          </a:xfrm>
-          <a:prstGeom prst="rect">
-            <a:avLst/>
-          </a:prstGeom>
-          <a:noFill/>
-        </p:spPr>
-        <p:txBody>
-          <a:bodyPr wrap="square" rtlCol="0">
-            <a:spAutoFit/>
-          </a:bodyPr>
-          <a:p>
-            <a:r>
-              <a:rPr lang="zh-CN" altLang="en-US">
-                <a:latin typeface="微软雅黑" pitchFamily="34" charset="0"/>
-                <a:ea typeface="微软雅黑" pitchFamily="34" charset="0"/>
-              </a:rPr>
-              <a:t>可运行性：cargo build/check/test 双验证、Docker 部署、CI workflows。</a:t>
-            </a:r>
-            <a:endParaRPr lang="zh-CN" altLang="en-US">
-              <a:latin typeface="微软雅黑" pitchFamily="34" charset="0"/>
-              <a:ea typeface="微软雅黑" pitchFamily="34" charset="0"/>
-            </a:endParaRPr>
-          </a:p>
-          <a:p>
-            <a:r>
-              <a:t>运行证据：4240 测试、SelfTest T1-T3 三层接线、日志/Trace/Metrics 全记录。</a:t>
-            </a:r>
-          </a:p>
-          <a:p>
-            <a:r>
-              <a:t>可观测：Skill/MCP/RAG/LLM 全链路 Trace + Log(TraceId 关联) + Metrics(修复成功率/时延/Token/Tool成功率)。</a:t>
-            </a:r>
-          </a:p>
-          <a:p>
-            <a:r>
-              <a:t>RAG：KB nodes/edges + 向量 + BM25 混合检索，证据强制溯源。</a:t>
-            </a:r>
-          </a:p>
-          <a:p>
-            <a:r>
-              <a:t>安全：权限矩阵、审批、回滚、审计、gitleaks、零 unsafe。</a:t>
-            </a:r>
-          </a:p>
-        </p:txBody>
-      </p:sp>
-      <p:pic>
-        <p:nvPicPr>
-          <p:cNvPr id="37" name="图片 36"/>
-          <p:cNvPicPr>
-            <a:picLocks noChangeAspect="1"/>
-          </p:cNvPicPr>
-          <p:nvPr/>
-        </p:nvPicPr>
-        <p:blipFill>
-          <a:blip r:embed="rId1"/>
-          <a:stretch>
-            <a:fillRect/>
-          </a:stretch>
-        </p:blipFill>
-        <p:spPr>
-          <a:xfrm>
-            <a:off x="2108200" y="1988820"/>
-            <a:ext cx="3830087" cy="2160000"/>
-          </a:xfrm>
-          <a:prstGeom prst="rect">
-            <a:avLst/>
-          </a:prstGeom>
-        </p:spPr>
-      </p:pic>
-      <p:pic>
-        <p:nvPicPr>
-          <p:cNvPr id="40" name="图片 39"/>
-          <p:cNvPicPr>
-            <a:picLocks noChangeAspect="1"/>
-          </p:cNvPicPr>
-          <p:nvPr/>
-        </p:nvPicPr>
-        <p:blipFill>
-          <a:blip r:embed="rId2"/>
-          <a:stretch>
-            <a:fillRect/>
-          </a:stretch>
-        </p:blipFill>
-        <p:spPr>
-          <a:xfrm>
-            <a:off x="6185535" y="1996440"/>
-            <a:ext cx="3837275" cy="2160000"/>
-          </a:xfrm>
-          <a:prstGeom prst="rect">
-            <a:avLst/>
-          </a:prstGeom>
-        </p:spPr>
-      </p:pic>
-      <p:pic>
-        <p:nvPicPr>
-          <p:cNvPr id="41" name="图片 40"/>
-          <p:cNvPicPr>
-            <a:picLocks noChangeAspect="1"/>
-          </p:cNvPicPr>
-          <p:nvPr/>
-        </p:nvPicPr>
-        <p:blipFill>
-          <a:blip r:embed="rId3"/>
-          <a:stretch>
-            <a:fillRect/>
-          </a:stretch>
-        </p:blipFill>
-        <p:spPr>
-          <a:xfrm>
-            <a:off x="2108200" y="4288155"/>
-            <a:ext cx="3838315" cy="2160000"/>
-          </a:xfrm>
-          <a:prstGeom prst="rect">
-            <a:avLst/>
-          </a:prstGeom>
-        </p:spPr>
-      </p:pic>
-      <p:pic>
-        <p:nvPicPr>
-          <p:cNvPr id="42" name="图片 41"/>
-          <p:cNvPicPr>
-            <a:picLocks noChangeAspect="1"/>
-          </p:cNvPicPr>
-          <p:nvPr/>
-        </p:nvPicPr>
-        <p:blipFill>
-          <a:blip r:embed="rId4"/>
-          <a:stretch>
-            <a:fillRect/>
-          </a:stretch>
-        </p:blipFill>
-        <p:spPr>
-          <a:xfrm>
-            <a:off x="6185535" y="4303395"/>
-            <a:ext cx="3831800" cy="2160000"/>
-          </a:xfrm>
-          <a:prstGeom prst="rect">
-            <a:avLst/>
-          </a:prstGeom>
-        </p:spPr>
-      </p:pic>
+          <p:cNvPr id="4" name="Rounded Rectangle 3"/>
+          <p:cNvSpPr/>
+          <p:nvPr/>
+        </p:nvSpPr>
+        <p:spPr>
+          <a:xfrm>
+            <a:off x="502920" y="1335024"/>
+            <a:ext cx="5440680" cy="457200"/>
+          </a:xfrm>
+          <a:prstGeom prst="roundRect">
+            <a:avLst>
+              <a:gd name="adj" fmla="val 10000"/>
+            </a:avLst>
+          </a:prstGeom>
+          <a:solidFill>
+            <a:srgbClr val="2E5BFF"/>
+          </a:solidFill>
+          <a:ln>
+            <a:noFill/>
+          </a:ln>
+          <a:effectLst/>
+        </p:spPr>
+        <p:style>
+          <a:lnRef idx="1">
+            <a:schemeClr val="accent1"/>
+          </a:lnRef>
+          <a:fillRef idx="3">
+            <a:schemeClr val="accent1"/>
+          </a:fillRef>
+          <a:effectRef idx="2">
+            <a:schemeClr val="accent1"/>
+          </a:effectRef>
+          <a:fontRef idx="minor">
+            <a:schemeClr val="lt1"/>
+          </a:fontRef>
+        </p:style>
+        <p:txBody>
+          <a:bodyPr rtlCol="0" anchor="ctr" wrap="square" lIns="54864" rIns="54864" tIns="18288" bIns="18288"/>
+          <a:lstStyle/>
+          <a:p>
+            <a:pPr algn="ctr">
+              <a:lnSpc>
+                <a:spcPct val="102000"/>
+              </a:lnSpc>
+            </a:pPr>
+            <a:r>
+              <a:rPr sz="1250" b="1" spc="100">
+                <a:solidFill>
+                  <a:srgbClr val="FFFFFF"/>
+                </a:solidFill>
+                <a:latin typeface="微软雅黑"/>
+                <a:ea typeface="微软雅黑"/>
+              </a:rPr>
+              <a:t>可运行性</a:t>
+            </a:r>
+          </a:p>
+        </p:txBody>
+      </p:sp>
+      <p:sp>
+        <p:nvSpPr>
+          <p:cNvPr id="5" name="Rounded Rectangle 4"/>
+          <p:cNvSpPr/>
+          <p:nvPr/>
+        </p:nvSpPr>
+        <p:spPr>
+          <a:xfrm>
+            <a:off x="502920" y="1856231"/>
+            <a:ext cx="5440680" cy="1783080"/>
+          </a:xfrm>
+          <a:prstGeom prst="roundRect">
+            <a:avLst>
+              <a:gd name="adj" fmla="val 10000"/>
+            </a:avLst>
+          </a:prstGeom>
+          <a:solidFill>
+            <a:srgbClr val="F1F5F9"/>
+          </a:solidFill>
+          <a:ln>
+            <a:noFill/>
+          </a:ln>
+          <a:effectLst/>
+        </p:spPr>
+        <p:style>
+          <a:lnRef idx="1">
+            <a:schemeClr val="accent1"/>
+          </a:lnRef>
+          <a:fillRef idx="3">
+            <a:schemeClr val="accent1"/>
+          </a:fillRef>
+          <a:effectRef idx="2">
+            <a:schemeClr val="accent1"/>
+          </a:effectRef>
+          <a:fontRef idx="minor">
+            <a:schemeClr val="lt1"/>
+          </a:fontRef>
+        </p:style>
+        <p:txBody>
+          <a:bodyPr rtlCol="0" anchor="t" wrap="square" lIns="54864" rIns="54864" tIns="18288" bIns="18288"/>
+          <a:lstStyle/>
+          <a:p>
+            <a:pPr algn="l">
+              <a:lnSpc>
+                <a:spcPct val="118000"/>
+              </a:lnSpc>
+            </a:pPr>
+            <a:r>
+              <a:rPr sz="1050" b="0">
+                <a:solidFill>
+                  <a:srgbClr val="0F172A"/>
+                </a:solidFill>
+                <a:latin typeface="微软雅黑"/>
+                <a:ea typeface="微软雅黑"/>
+              </a:rPr>
+              <a:t>cargo build/check/test 双验证</a:t>
+            </a:r>
+          </a:p>
+          <a:p>
+            <a:pPr algn="l">
+              <a:lnSpc>
+                <a:spcPct val="118000"/>
+              </a:lnSpc>
+            </a:pPr>
+            <a:r>
+              <a:rPr sz="1050" b="0">
+                <a:solidFill>
+                  <a:srgbClr val="0F172A"/>
+                </a:solidFill>
+                <a:latin typeface="微软雅黑"/>
+                <a:ea typeface="微软雅黑"/>
+              </a:rPr>
+              <a:t>Docker 部署 · install.sh</a:t>
+            </a:r>
+          </a:p>
+          <a:p>
+            <a:pPr algn="l">
+              <a:lnSpc>
+                <a:spcPct val="118000"/>
+              </a:lnSpc>
+            </a:pPr>
+            <a:r>
+              <a:rPr sz="1050" b="0">
+                <a:solidFill>
+                  <a:srgbClr val="0F172A"/>
+                </a:solidFill>
+                <a:latin typeface="微软雅黑"/>
+                <a:ea typeface="微软雅黑"/>
+              </a:rPr>
+              <a:t>CI workflows（.github）</a:t>
+            </a:r>
+          </a:p>
+        </p:txBody>
+      </p:sp>
+      <p:sp>
+        <p:nvSpPr>
+          <p:cNvPr id="6" name="Rounded Rectangle 5"/>
+          <p:cNvSpPr/>
+          <p:nvPr/>
+        </p:nvSpPr>
+        <p:spPr>
+          <a:xfrm>
+            <a:off x="6263640" y="1335024"/>
+            <a:ext cx="5440680" cy="457200"/>
+          </a:xfrm>
+          <a:prstGeom prst="roundRect">
+            <a:avLst>
+              <a:gd name="adj" fmla="val 10000"/>
+            </a:avLst>
+          </a:prstGeom>
+          <a:solidFill>
+            <a:srgbClr val="0EA5E9"/>
+          </a:solidFill>
+          <a:ln>
+            <a:noFill/>
+          </a:ln>
+          <a:effectLst/>
+        </p:spPr>
+        <p:style>
+          <a:lnRef idx="1">
+            <a:schemeClr val="accent1"/>
+          </a:lnRef>
+          <a:fillRef idx="3">
+            <a:schemeClr val="accent1"/>
+          </a:fillRef>
+          <a:effectRef idx="2">
+            <a:schemeClr val="accent1"/>
+          </a:effectRef>
+          <a:fontRef idx="minor">
+            <a:schemeClr val="lt1"/>
+          </a:fontRef>
+        </p:style>
+        <p:txBody>
+          <a:bodyPr rtlCol="0" anchor="ctr" wrap="square" lIns="54864" rIns="54864" tIns="18288" bIns="18288"/>
+          <a:lstStyle/>
+          <a:p>
+            <a:pPr algn="ctr">
+              <a:lnSpc>
+                <a:spcPct val="102000"/>
+              </a:lnSpc>
+            </a:pPr>
+            <a:r>
+              <a:rPr sz="1250" b="1" spc="100">
+                <a:solidFill>
+                  <a:srgbClr val="FFFFFF"/>
+                </a:solidFill>
+                <a:latin typeface="微软雅黑"/>
+                <a:ea typeface="微软雅黑"/>
+              </a:rPr>
+              <a:t>运行证据</a:t>
+            </a:r>
+          </a:p>
+        </p:txBody>
+      </p:sp>
+      <p:sp>
+        <p:nvSpPr>
+          <p:cNvPr id="7" name="Rounded Rectangle 6"/>
+          <p:cNvSpPr/>
+          <p:nvPr/>
+        </p:nvSpPr>
+        <p:spPr>
+          <a:xfrm>
+            <a:off x="6263640" y="1856231"/>
+            <a:ext cx="5440680" cy="1783080"/>
+          </a:xfrm>
+          <a:prstGeom prst="roundRect">
+            <a:avLst>
+              <a:gd name="adj" fmla="val 10000"/>
+            </a:avLst>
+          </a:prstGeom>
+          <a:solidFill>
+            <a:srgbClr val="F1F5F9"/>
+          </a:solidFill>
+          <a:ln>
+            <a:noFill/>
+          </a:ln>
+          <a:effectLst/>
+        </p:spPr>
+        <p:style>
+          <a:lnRef idx="1">
+            <a:schemeClr val="accent1"/>
+          </a:lnRef>
+          <a:fillRef idx="3">
+            <a:schemeClr val="accent1"/>
+          </a:fillRef>
+          <a:effectRef idx="2">
+            <a:schemeClr val="accent1"/>
+          </a:effectRef>
+          <a:fontRef idx="minor">
+            <a:schemeClr val="lt1"/>
+          </a:fontRef>
+        </p:style>
+        <p:txBody>
+          <a:bodyPr rtlCol="0" anchor="t" wrap="square" lIns="54864" rIns="54864" tIns="18288" bIns="18288"/>
+          <a:lstStyle/>
+          <a:p>
+            <a:pPr algn="l">
+              <a:lnSpc>
+                <a:spcPct val="118000"/>
+              </a:lnSpc>
+            </a:pPr>
+            <a:r>
+              <a:rPr sz="1050" b="0">
+                <a:solidFill>
+                  <a:srgbClr val="0F172A"/>
+                </a:solidFill>
+                <a:latin typeface="微软雅黑"/>
+                <a:ea typeface="微软雅黑"/>
+              </a:rPr>
+              <a:t>4240 项测试 · SelfTest T1-T3 三层接线</a:t>
+            </a:r>
+          </a:p>
+          <a:p>
+            <a:pPr algn="l">
+              <a:lnSpc>
+                <a:spcPct val="118000"/>
+              </a:lnSpc>
+            </a:pPr>
+            <a:r>
+              <a:rPr sz="1050" b="0">
+                <a:solidFill>
+                  <a:srgbClr val="0F172A"/>
+                </a:solidFill>
+                <a:latin typeface="微软雅黑"/>
+                <a:ea typeface="微软雅黑"/>
+              </a:rPr>
+              <a:t>日志 / Trace / Metrics 全记录</a:t>
+            </a:r>
+          </a:p>
+          <a:p>
+            <a:pPr algn="l">
+              <a:lnSpc>
+                <a:spcPct val="118000"/>
+              </a:lnSpc>
+            </a:pPr>
+            <a:r>
+              <a:rPr sz="1050" b="0">
+                <a:solidFill>
+                  <a:srgbClr val="0F172A"/>
+                </a:solidFill>
+                <a:latin typeface="微软雅黑"/>
+                <a:ea typeface="微软雅黑"/>
+              </a:rPr>
+              <a:t>trace_data + SHA-256 广播审计链</a:t>
+            </a:r>
+          </a:p>
+        </p:txBody>
+      </p:sp>
+      <p:sp>
+        <p:nvSpPr>
+          <p:cNvPr id="8" name="Rounded Rectangle 7"/>
+          <p:cNvSpPr/>
+          <p:nvPr/>
+        </p:nvSpPr>
+        <p:spPr>
+          <a:xfrm>
+            <a:off x="502920" y="3657600"/>
+            <a:ext cx="5440680" cy="457200"/>
+          </a:xfrm>
+          <a:prstGeom prst="roundRect">
+            <a:avLst>
+              <a:gd name="adj" fmla="val 10000"/>
+            </a:avLst>
+          </a:prstGeom>
+          <a:solidFill>
+            <a:srgbClr val="06B6D4"/>
+          </a:solidFill>
+          <a:ln>
+            <a:noFill/>
+          </a:ln>
+          <a:effectLst/>
+        </p:spPr>
+        <p:style>
+          <a:lnRef idx="1">
+            <a:schemeClr val="accent1"/>
+          </a:lnRef>
+          <a:fillRef idx="3">
+            <a:schemeClr val="accent1"/>
+          </a:fillRef>
+          <a:effectRef idx="2">
+            <a:schemeClr val="accent1"/>
+          </a:effectRef>
+          <a:fontRef idx="minor">
+            <a:schemeClr val="lt1"/>
+          </a:fontRef>
+        </p:style>
+        <p:txBody>
+          <a:bodyPr rtlCol="0" anchor="ctr" wrap="square" lIns="54864" rIns="54864" tIns="18288" bIns="18288"/>
+          <a:lstStyle/>
+          <a:p>
+            <a:pPr algn="ctr">
+              <a:lnSpc>
+                <a:spcPct val="102000"/>
+              </a:lnSpc>
+            </a:pPr>
+            <a:r>
+              <a:rPr sz="1250" b="1" spc="100">
+                <a:solidFill>
+                  <a:srgbClr val="FFFFFF"/>
+                </a:solidFill>
+                <a:latin typeface="微软雅黑"/>
+                <a:ea typeface="微软雅黑"/>
+              </a:rPr>
+              <a:t>可观测</a:t>
+            </a:r>
+          </a:p>
+        </p:txBody>
+      </p:sp>
+      <p:sp>
+        <p:nvSpPr>
+          <p:cNvPr id="9" name="Rounded Rectangle 8"/>
+          <p:cNvSpPr/>
+          <p:nvPr/>
+        </p:nvSpPr>
+        <p:spPr>
+          <a:xfrm>
+            <a:off x="502920" y="4178808"/>
+            <a:ext cx="5440680" cy="1783080"/>
+          </a:xfrm>
+          <a:prstGeom prst="roundRect">
+            <a:avLst>
+              <a:gd name="adj" fmla="val 10000"/>
+            </a:avLst>
+          </a:prstGeom>
+          <a:solidFill>
+            <a:srgbClr val="F1F5F9"/>
+          </a:solidFill>
+          <a:ln>
+            <a:noFill/>
+          </a:ln>
+          <a:effectLst/>
+        </p:spPr>
+        <p:style>
+          <a:lnRef idx="1">
+            <a:schemeClr val="accent1"/>
+          </a:lnRef>
+          <a:fillRef idx="3">
+            <a:schemeClr val="accent1"/>
+          </a:fillRef>
+          <a:effectRef idx="2">
+            <a:schemeClr val="accent1"/>
+          </a:effectRef>
+          <a:fontRef idx="minor">
+            <a:schemeClr val="lt1"/>
+          </a:fontRef>
+        </p:style>
+        <p:txBody>
+          <a:bodyPr rtlCol="0" anchor="t" wrap="square" lIns="54864" rIns="54864" tIns="18288" bIns="18288"/>
+          <a:lstStyle/>
+          <a:p>
+            <a:pPr algn="l">
+              <a:lnSpc>
+                <a:spcPct val="118000"/>
+              </a:lnSpc>
+            </a:pPr>
+            <a:r>
+              <a:rPr sz="1050" b="0">
+                <a:solidFill>
+                  <a:srgbClr val="0F172A"/>
+                </a:solidFill>
+                <a:latin typeface="微软雅黑"/>
+                <a:ea typeface="微软雅黑"/>
+              </a:rPr>
+              <a:t>Skill/MCP/RAG/LLM 全链路 Trace</a:t>
+            </a:r>
+          </a:p>
+          <a:p>
+            <a:pPr algn="l">
+              <a:lnSpc>
+                <a:spcPct val="118000"/>
+              </a:lnSpc>
+            </a:pPr>
+            <a:r>
+              <a:rPr sz="1050" b="0">
+                <a:solidFill>
+                  <a:srgbClr val="0F172A"/>
+                </a:solidFill>
+                <a:latin typeface="微软雅黑"/>
+                <a:ea typeface="微软雅黑"/>
+              </a:rPr>
+              <a:t>Log 结构化关联 TraceId</a:t>
+            </a:r>
+          </a:p>
+          <a:p>
+            <a:pPr algn="l">
+              <a:lnSpc>
+                <a:spcPct val="118000"/>
+              </a:lnSpc>
+            </a:pPr>
+            <a:r>
+              <a:rPr sz="1050" b="0">
+                <a:solidFill>
+                  <a:srgbClr val="0F172A"/>
+                </a:solidFill>
+                <a:latin typeface="微软雅黑"/>
+                <a:ea typeface="微软雅黑"/>
+              </a:rPr>
+              <a:t>Metrics：修复成功率/时延/Token/Tool 成功率</a:t>
+            </a:r>
+          </a:p>
+        </p:txBody>
+      </p:sp>
+      <p:sp>
+        <p:nvSpPr>
+          <p:cNvPr id="10" name="Rounded Rectangle 9"/>
+          <p:cNvSpPr/>
+          <p:nvPr/>
+        </p:nvSpPr>
+        <p:spPr>
+          <a:xfrm>
+            <a:off x="6263640" y="3657600"/>
+            <a:ext cx="5440680" cy="457200"/>
+          </a:xfrm>
+          <a:prstGeom prst="roundRect">
+            <a:avLst>
+              <a:gd name="adj" fmla="val 10000"/>
+            </a:avLst>
+          </a:prstGeom>
+          <a:solidFill>
+            <a:srgbClr val="10B981"/>
+          </a:solidFill>
+          <a:ln>
+            <a:noFill/>
+          </a:ln>
+          <a:effectLst/>
+        </p:spPr>
+        <p:style>
+          <a:lnRef idx="1">
+            <a:schemeClr val="accent1"/>
+          </a:lnRef>
+          <a:fillRef idx="3">
+            <a:schemeClr val="accent1"/>
+          </a:fillRef>
+          <a:effectRef idx="2">
+            <a:schemeClr val="accent1"/>
+          </a:effectRef>
+          <a:fontRef idx="minor">
+            <a:schemeClr val="lt1"/>
+          </a:fontRef>
+        </p:style>
+        <p:txBody>
+          <a:bodyPr rtlCol="0" anchor="ctr" wrap="square" lIns="54864" rIns="54864" tIns="18288" bIns="18288"/>
+          <a:lstStyle/>
+          <a:p>
+            <a:pPr algn="ctr">
+              <a:lnSpc>
+                <a:spcPct val="102000"/>
+              </a:lnSpc>
+            </a:pPr>
+            <a:r>
+              <a:rPr sz="1250" b="1" spc="100">
+                <a:solidFill>
+                  <a:srgbClr val="FFFFFF"/>
+                </a:solidFill>
+                <a:latin typeface="微软雅黑"/>
+                <a:ea typeface="微软雅黑"/>
+              </a:rPr>
+              <a:t>安全治理</a:t>
+            </a:r>
+          </a:p>
+        </p:txBody>
+      </p:sp>
+      <p:sp>
+        <p:nvSpPr>
+          <p:cNvPr id="11" name="Rounded Rectangle 10"/>
+          <p:cNvSpPr/>
+          <p:nvPr/>
+        </p:nvSpPr>
+        <p:spPr>
+          <a:xfrm>
+            <a:off x="6263640" y="4178808"/>
+            <a:ext cx="5440680" cy="1783080"/>
+          </a:xfrm>
+          <a:prstGeom prst="roundRect">
+            <a:avLst>
+              <a:gd name="adj" fmla="val 10000"/>
+            </a:avLst>
+          </a:prstGeom>
+          <a:solidFill>
+            <a:srgbClr val="F1F5F9"/>
+          </a:solidFill>
+          <a:ln>
+            <a:noFill/>
+          </a:ln>
+          <a:effectLst/>
+        </p:spPr>
+        <p:style>
+          <a:lnRef idx="1">
+            <a:schemeClr val="accent1"/>
+          </a:lnRef>
+          <a:fillRef idx="3">
+            <a:schemeClr val="accent1"/>
+          </a:fillRef>
+          <a:effectRef idx="2">
+            <a:schemeClr val="accent1"/>
+          </a:effectRef>
+          <a:fontRef idx="minor">
+            <a:schemeClr val="lt1"/>
+          </a:fontRef>
+        </p:style>
+        <p:txBody>
+          <a:bodyPr rtlCol="0" anchor="t" wrap="square" lIns="54864" rIns="54864" tIns="18288" bIns="18288"/>
+          <a:lstStyle/>
+          <a:p>
+            <a:pPr algn="l">
+              <a:lnSpc>
+                <a:spcPct val="118000"/>
+              </a:lnSpc>
+            </a:pPr>
+            <a:r>
+              <a:rPr sz="1050" b="0">
+                <a:solidFill>
+                  <a:srgbClr val="0F172A"/>
+                </a:solidFill>
+                <a:latin typeface="微软雅黑"/>
+                <a:ea typeface="微软雅黑"/>
+              </a:rPr>
+              <a:t>RAG：KB 向量+BM25，证据强制溯源</a:t>
+            </a:r>
+          </a:p>
+          <a:p>
+            <a:pPr algn="l">
+              <a:lnSpc>
+                <a:spcPct val="118000"/>
+              </a:lnSpc>
+            </a:pPr>
+            <a:r>
+              <a:rPr sz="1050" b="0">
+                <a:solidFill>
+                  <a:srgbClr val="0F172A"/>
+                </a:solidFill>
+                <a:latin typeface="微软雅黑"/>
+                <a:ea typeface="微软雅黑"/>
+              </a:rPr>
+              <a:t>权限矩阵 · 审批 · 回滚 · 审计</a:t>
+            </a:r>
+          </a:p>
+          <a:p>
+            <a:pPr algn="l">
+              <a:lnSpc>
+                <a:spcPct val="118000"/>
+              </a:lnSpc>
+            </a:pPr>
+            <a:r>
+              <a:rPr sz="1050" b="0">
+                <a:solidFill>
+                  <a:srgbClr val="0F172A"/>
+                </a:solidFill>
+                <a:latin typeface="微软雅黑"/>
+                <a:ea typeface="微软雅黑"/>
+              </a:rPr>
+              <a:t>gitleaks 密钥扫描 · 零 unsafe</a:t>
+            </a:r>
+          </a:p>
+        </p:txBody>
+      </p:sp>
+      <p:sp>
+        <p:nvSpPr>
+          <p:cNvPr id="12" name="Rounded Rectangle 11"/>
+          <p:cNvSpPr/>
+          <p:nvPr/>
+        </p:nvSpPr>
+        <p:spPr>
+          <a:xfrm>
+            <a:off x="502920" y="5989320"/>
+            <a:ext cx="11155680" cy="502920"/>
+          </a:xfrm>
+          <a:prstGeom prst="roundRect">
+            <a:avLst>
+              <a:gd name="adj" fmla="val 10000"/>
+            </a:avLst>
+          </a:prstGeom>
+          <a:solidFill>
+            <a:srgbClr val="E2E8F0"/>
+          </a:solidFill>
+          <a:ln>
+            <a:noFill/>
+          </a:ln>
+          <a:effectLst/>
+        </p:spPr>
+        <p:style>
+          <a:lnRef idx="1">
+            <a:schemeClr val="accent1"/>
+          </a:lnRef>
+          <a:fillRef idx="3">
+            <a:schemeClr val="accent1"/>
+          </a:fillRef>
+          <a:effectRef idx="2">
+            <a:schemeClr val="accent1"/>
+          </a:effectRef>
+          <a:fontRef idx="minor">
+            <a:schemeClr val="lt1"/>
+          </a:fontRef>
+        </p:style>
+        <p:txBody>
+          <a:bodyPr rtlCol="0" anchor="ctr" wrap="square" lIns="54864" rIns="54864" tIns="18288" bIns="18288"/>
+          <a:lstStyle/>
+          <a:p>
+            <a:pPr algn="l">
+              <a:lnSpc>
+                <a:spcPct val="118000"/>
+              </a:lnSpc>
+            </a:pPr>
+            <a:r>
+              <a:rPr sz="1000" b="0">
+                <a:solidFill>
+                  <a:srgbClr val="0F172A"/>
+                </a:solidFill>
+                <a:latin typeface="微软雅黑"/>
+                <a:ea typeface="微软雅黑"/>
+              </a:rPr>
+              <a:t>云产品选型：Higress（网关）统一入口+凭证托管，可替换性/迁移成本已论证 · 全链路证据可审计、可回滚</a:t>
+            </a:r>
+          </a:p>
+        </p:txBody>
+      </p:sp>
     </p:spTree>
   </p:cSld>
   <p:clrMapOvr>
@@ -4492,45 +5571,834 @@
       </p:sp>
       <p:sp>
         <p:nvSpPr>
-          <p:cNvPr id="38" name="文本框 37"/>
-          <p:cNvSpPr txBox="1"/>
-          <p:nvPr/>
-        </p:nvSpPr>
-        <p:spPr>
-          <a:xfrm>
-            <a:off x="525780" y="1204595"/>
-            <a:ext cx="8013065" cy="368300"/>
-          </a:xfrm>
-          <a:prstGeom prst="rect">
-            <a:avLst/>
-          </a:prstGeom>
-          <a:noFill/>
-        </p:spPr>
-        <p:txBody>
-          <a:bodyPr wrap="square" rtlCol="0">
-            <a:spAutoFit/>
-          </a:bodyPr>
-          <a:p>
-            <a:r>
-              <a:rPr lang="zh-CN" altLang="en-US">
-                <a:latin typeface="微软雅黑" pitchFamily="34" charset="0"/>
-                <a:ea typeface="微软雅黑" pitchFamily="34" charset="0"/>
-              </a:rPr>
-              <a:t>可复用成果：Skill 体系独立发布、mcp-gateway 网关、KB 检索层、E8 推理内核。</a:t>
-            </a:r>
-            <a:endParaRPr lang="zh-CN" altLang="en-US">
-              <a:latin typeface="微软雅黑" pitchFamily="34" charset="0"/>
-              <a:ea typeface="微软雅黑" pitchFamily="34" charset="0"/>
-            </a:endParaRPr>
-          </a:p>
-          <a:p>
-            <a:r>
-              <a:t>接口契约与文档示例：README、部署说明、开源协议、示例配置、测试方法。</a:t>
-            </a:r>
-          </a:p>
-          <a:p>
-            <a:r>
-              <a:t>协议与依赖：MIT；披露全部第三方依赖、商业 API 调用、闭源模型、数据授权边界。</a:t>
+          <p:cNvPr id="4" name="Rounded Rectangle 3"/>
+          <p:cNvSpPr/>
+          <p:nvPr/>
+        </p:nvSpPr>
+        <p:spPr>
+          <a:xfrm>
+            <a:off x="502920" y="1417320"/>
+            <a:ext cx="2651760" cy="457200"/>
+          </a:xfrm>
+          <a:prstGeom prst="roundRect">
+            <a:avLst>
+              <a:gd name="adj" fmla="val 10000"/>
+            </a:avLst>
+          </a:prstGeom>
+          <a:solidFill>
+            <a:srgbClr val="2E5BFF"/>
+          </a:solidFill>
+          <a:ln>
+            <a:noFill/>
+          </a:ln>
+          <a:effectLst/>
+        </p:spPr>
+        <p:style>
+          <a:lnRef idx="1">
+            <a:schemeClr val="accent1"/>
+          </a:lnRef>
+          <a:fillRef idx="3">
+            <a:schemeClr val="accent1"/>
+          </a:fillRef>
+          <a:effectRef idx="2">
+            <a:schemeClr val="accent1"/>
+          </a:effectRef>
+          <a:fontRef idx="minor">
+            <a:schemeClr val="lt1"/>
+          </a:fontRef>
+        </p:style>
+        <p:txBody>
+          <a:bodyPr rtlCol="0" anchor="ctr" wrap="square" lIns="54864" rIns="54864" tIns="18288" bIns="18288"/>
+          <a:lstStyle/>
+          <a:p>
+            <a:pPr algn="ctr">
+              <a:lnSpc>
+                <a:spcPct val="102000"/>
+              </a:lnSpc>
+            </a:pPr>
+            <a:r>
+              <a:rPr sz="1250" b="1" spc="100">
+                <a:solidFill>
+                  <a:srgbClr val="FFFFFF"/>
+                </a:solidFill>
+                <a:latin typeface="微软雅黑"/>
+                <a:ea typeface="微软雅黑"/>
+              </a:rPr>
+              <a:t>可复用成果</a:t>
+            </a:r>
+          </a:p>
+        </p:txBody>
+      </p:sp>
+      <p:sp>
+        <p:nvSpPr>
+          <p:cNvPr id="5" name="Rounded Rectangle 4"/>
+          <p:cNvSpPr/>
+          <p:nvPr/>
+        </p:nvSpPr>
+        <p:spPr>
+          <a:xfrm>
+            <a:off x="502920" y="1938528"/>
+            <a:ext cx="2651760" cy="1783080"/>
+          </a:xfrm>
+          <a:prstGeom prst="roundRect">
+            <a:avLst>
+              <a:gd name="adj" fmla="val 10000"/>
+            </a:avLst>
+          </a:prstGeom>
+          <a:solidFill>
+            <a:srgbClr val="F1F5F9"/>
+          </a:solidFill>
+          <a:ln>
+            <a:noFill/>
+          </a:ln>
+          <a:effectLst/>
+        </p:spPr>
+        <p:style>
+          <a:lnRef idx="1">
+            <a:schemeClr val="accent1"/>
+          </a:lnRef>
+          <a:fillRef idx="3">
+            <a:schemeClr val="accent1"/>
+          </a:fillRef>
+          <a:effectRef idx="2">
+            <a:schemeClr val="accent1"/>
+          </a:effectRef>
+          <a:fontRef idx="minor">
+            <a:schemeClr val="lt1"/>
+          </a:fontRef>
+        </p:style>
+        <p:txBody>
+          <a:bodyPr rtlCol="0" anchor="t" wrap="square" lIns="54864" rIns="54864" tIns="18288" bIns="18288"/>
+          <a:lstStyle/>
+          <a:p>
+            <a:pPr algn="l">
+              <a:lnSpc>
+                <a:spcPct val="118000"/>
+              </a:lnSpc>
+            </a:pPr>
+            <a:r>
+              <a:rPr sz="1050" b="0">
+                <a:solidFill>
+                  <a:srgbClr val="0F172A"/>
+                </a:solidFill>
+                <a:latin typeface="微软雅黑"/>
+                <a:ea typeface="微软雅黑"/>
+              </a:rPr>
+              <a:t>Skill 体系独立发布</a:t>
+            </a:r>
+          </a:p>
+          <a:p>
+            <a:pPr algn="l">
+              <a:lnSpc>
+                <a:spcPct val="118000"/>
+              </a:lnSpc>
+            </a:pPr>
+            <a:r>
+              <a:rPr sz="1050" b="0">
+                <a:solidFill>
+                  <a:srgbClr val="0F172A"/>
+                </a:solidFill>
+                <a:latin typeface="微软雅黑"/>
+                <a:ea typeface="微软雅黑"/>
+              </a:rPr>
+              <a:t>mcp-gateway 网关</a:t>
+            </a:r>
+          </a:p>
+          <a:p>
+            <a:pPr algn="l">
+              <a:lnSpc>
+                <a:spcPct val="118000"/>
+              </a:lnSpc>
+            </a:pPr>
+            <a:r>
+              <a:rPr sz="1050" b="0">
+                <a:solidFill>
+                  <a:srgbClr val="0F172A"/>
+                </a:solidFill>
+                <a:latin typeface="微软雅黑"/>
+                <a:ea typeface="微软雅黑"/>
+              </a:rPr>
+              <a:t>KB 检索层 · E8 推理内核</a:t>
+            </a:r>
+          </a:p>
+        </p:txBody>
+      </p:sp>
+      <p:sp>
+        <p:nvSpPr>
+          <p:cNvPr id="6" name="Right Arrow 5"/>
+          <p:cNvSpPr/>
+          <p:nvPr/>
+        </p:nvSpPr>
+        <p:spPr>
+          <a:xfrm>
+            <a:off x="3154680" y="2331720"/>
+            <a:ext cx="274320" cy="365760"/>
+          </a:xfrm>
+          <a:prstGeom prst="rightArrow">
+            <a:avLst>
+              <a:gd name="adj1" fmla="val 10000"/>
+              <a:gd name="adj2" fmla="val 50000"/>
+            </a:avLst>
+          </a:prstGeom>
+          <a:solidFill>
+            <a:srgbClr val="2E5BFF"/>
+          </a:solidFill>
+          <a:ln>
+            <a:noFill/>
+          </a:ln>
+          <a:effectLst/>
+        </p:spPr>
+        <p:style>
+          <a:lnRef idx="1">
+            <a:schemeClr val="accent1"/>
+          </a:lnRef>
+          <a:fillRef idx="3">
+            <a:schemeClr val="accent1"/>
+          </a:fillRef>
+          <a:effectRef idx="2">
+            <a:schemeClr val="accent1"/>
+          </a:effectRef>
+          <a:fontRef idx="minor">
+            <a:schemeClr val="lt1"/>
+          </a:fontRef>
+        </p:style>
+        <p:txBody>
+          <a:bodyPr rtlCol="0" anchor="ctr"/>
+          <a:lstStyle/>
+          <a:p>
+            <a:pPr algn="ctr"/>
+          </a:p>
+        </p:txBody>
+      </p:sp>
+      <p:sp>
+        <p:nvSpPr>
+          <p:cNvPr id="7" name="Rounded Rectangle 6"/>
+          <p:cNvSpPr/>
+          <p:nvPr/>
+        </p:nvSpPr>
+        <p:spPr>
+          <a:xfrm>
+            <a:off x="3429000" y="1417320"/>
+            <a:ext cx="2651760" cy="457200"/>
+          </a:xfrm>
+          <a:prstGeom prst="roundRect">
+            <a:avLst>
+              <a:gd name="adj" fmla="val 10000"/>
+            </a:avLst>
+          </a:prstGeom>
+          <a:solidFill>
+            <a:srgbClr val="0EA5E9"/>
+          </a:solidFill>
+          <a:ln>
+            <a:noFill/>
+          </a:ln>
+          <a:effectLst/>
+        </p:spPr>
+        <p:style>
+          <a:lnRef idx="1">
+            <a:schemeClr val="accent1"/>
+          </a:lnRef>
+          <a:fillRef idx="3">
+            <a:schemeClr val="accent1"/>
+          </a:fillRef>
+          <a:effectRef idx="2">
+            <a:schemeClr val="accent1"/>
+          </a:effectRef>
+          <a:fontRef idx="minor">
+            <a:schemeClr val="lt1"/>
+          </a:fontRef>
+        </p:style>
+        <p:txBody>
+          <a:bodyPr rtlCol="0" anchor="ctr" wrap="square" lIns="54864" rIns="54864" tIns="18288" bIns="18288"/>
+          <a:lstStyle/>
+          <a:p>
+            <a:pPr algn="ctr">
+              <a:lnSpc>
+                <a:spcPct val="102000"/>
+              </a:lnSpc>
+            </a:pPr>
+            <a:r>
+              <a:rPr sz="1250" b="1" spc="100">
+                <a:solidFill>
+                  <a:srgbClr val="FFFFFF"/>
+                </a:solidFill>
+                <a:latin typeface="微软雅黑"/>
+                <a:ea typeface="微软雅黑"/>
+              </a:rPr>
+              <a:t>接口契约与文档</a:t>
+            </a:r>
+          </a:p>
+        </p:txBody>
+      </p:sp>
+      <p:sp>
+        <p:nvSpPr>
+          <p:cNvPr id="8" name="Rounded Rectangle 7"/>
+          <p:cNvSpPr/>
+          <p:nvPr/>
+        </p:nvSpPr>
+        <p:spPr>
+          <a:xfrm>
+            <a:off x="3429000" y="1938528"/>
+            <a:ext cx="2651760" cy="1783080"/>
+          </a:xfrm>
+          <a:prstGeom prst="roundRect">
+            <a:avLst>
+              <a:gd name="adj" fmla="val 10000"/>
+            </a:avLst>
+          </a:prstGeom>
+          <a:solidFill>
+            <a:srgbClr val="F1F5F9"/>
+          </a:solidFill>
+          <a:ln>
+            <a:noFill/>
+          </a:ln>
+          <a:effectLst/>
+        </p:spPr>
+        <p:style>
+          <a:lnRef idx="1">
+            <a:schemeClr val="accent1"/>
+          </a:lnRef>
+          <a:fillRef idx="3">
+            <a:schemeClr val="accent1"/>
+          </a:fillRef>
+          <a:effectRef idx="2">
+            <a:schemeClr val="accent1"/>
+          </a:effectRef>
+          <a:fontRef idx="minor">
+            <a:schemeClr val="lt1"/>
+          </a:fontRef>
+        </p:style>
+        <p:txBody>
+          <a:bodyPr rtlCol="0" anchor="t" wrap="square" lIns="54864" rIns="54864" tIns="18288" bIns="18288"/>
+          <a:lstStyle/>
+          <a:p>
+            <a:pPr algn="l">
+              <a:lnSpc>
+                <a:spcPct val="118000"/>
+              </a:lnSpc>
+            </a:pPr>
+            <a:r>
+              <a:rPr sz="1050" b="0">
+                <a:solidFill>
+                  <a:srgbClr val="0F172A"/>
+                </a:solidFill>
+                <a:latin typeface="微软雅黑"/>
+                <a:ea typeface="微软雅黑"/>
+              </a:rPr>
+              <a:t>README · 部署说明</a:t>
+            </a:r>
+          </a:p>
+          <a:p>
+            <a:pPr algn="l">
+              <a:lnSpc>
+                <a:spcPct val="118000"/>
+              </a:lnSpc>
+            </a:pPr>
+            <a:r>
+              <a:rPr sz="1050" b="0">
+                <a:solidFill>
+                  <a:srgbClr val="0F172A"/>
+                </a:solidFill>
+                <a:latin typeface="微软雅黑"/>
+                <a:ea typeface="微软雅黑"/>
+              </a:rPr>
+              <a:t>开源协议 · 示例配置</a:t>
+            </a:r>
+          </a:p>
+          <a:p>
+            <a:pPr algn="l">
+              <a:lnSpc>
+                <a:spcPct val="118000"/>
+              </a:lnSpc>
+            </a:pPr>
+            <a:r>
+              <a:rPr sz="1050" b="0">
+                <a:solidFill>
+                  <a:srgbClr val="0F172A"/>
+                </a:solidFill>
+                <a:latin typeface="微软雅黑"/>
+                <a:ea typeface="微软雅黑"/>
+              </a:rPr>
+              <a:t>测试方法 · 复现步骤</a:t>
+            </a:r>
+          </a:p>
+        </p:txBody>
+      </p:sp>
+      <p:sp>
+        <p:nvSpPr>
+          <p:cNvPr id="9" name="Right Arrow 8"/>
+          <p:cNvSpPr/>
+          <p:nvPr/>
+        </p:nvSpPr>
+        <p:spPr>
+          <a:xfrm>
+            <a:off x="6080760" y="2331720"/>
+            <a:ext cx="274320" cy="365760"/>
+          </a:xfrm>
+          <a:prstGeom prst="rightArrow">
+            <a:avLst>
+              <a:gd name="adj1" fmla="val 10000"/>
+              <a:gd name="adj2" fmla="val 50000"/>
+            </a:avLst>
+          </a:prstGeom>
+          <a:solidFill>
+            <a:srgbClr val="2E5BFF"/>
+          </a:solidFill>
+          <a:ln>
+            <a:noFill/>
+          </a:ln>
+          <a:effectLst/>
+        </p:spPr>
+        <p:style>
+          <a:lnRef idx="1">
+            <a:schemeClr val="accent1"/>
+          </a:lnRef>
+          <a:fillRef idx="3">
+            <a:schemeClr val="accent1"/>
+          </a:fillRef>
+          <a:effectRef idx="2">
+            <a:schemeClr val="accent1"/>
+          </a:effectRef>
+          <a:fontRef idx="minor">
+            <a:schemeClr val="lt1"/>
+          </a:fontRef>
+        </p:style>
+        <p:txBody>
+          <a:bodyPr rtlCol="0" anchor="ctr"/>
+          <a:lstStyle/>
+          <a:p>
+            <a:pPr algn="ctr"/>
+          </a:p>
+        </p:txBody>
+      </p:sp>
+      <p:sp>
+        <p:nvSpPr>
+          <p:cNvPr id="10" name="Rounded Rectangle 9"/>
+          <p:cNvSpPr/>
+          <p:nvPr/>
+        </p:nvSpPr>
+        <p:spPr>
+          <a:xfrm>
+            <a:off x="6355080" y="1417320"/>
+            <a:ext cx="2651760" cy="457200"/>
+          </a:xfrm>
+          <a:prstGeom prst="roundRect">
+            <a:avLst>
+              <a:gd name="adj" fmla="val 10000"/>
+            </a:avLst>
+          </a:prstGeom>
+          <a:solidFill>
+            <a:srgbClr val="06B6D4"/>
+          </a:solidFill>
+          <a:ln>
+            <a:noFill/>
+          </a:ln>
+          <a:effectLst/>
+        </p:spPr>
+        <p:style>
+          <a:lnRef idx="1">
+            <a:schemeClr val="accent1"/>
+          </a:lnRef>
+          <a:fillRef idx="3">
+            <a:schemeClr val="accent1"/>
+          </a:fillRef>
+          <a:effectRef idx="2">
+            <a:schemeClr val="accent1"/>
+          </a:effectRef>
+          <a:fontRef idx="minor">
+            <a:schemeClr val="lt1"/>
+          </a:fontRef>
+        </p:style>
+        <p:txBody>
+          <a:bodyPr rtlCol="0" anchor="ctr" wrap="square" lIns="54864" rIns="54864" tIns="18288" bIns="18288"/>
+          <a:lstStyle/>
+          <a:p>
+            <a:pPr algn="ctr">
+              <a:lnSpc>
+                <a:spcPct val="102000"/>
+              </a:lnSpc>
+            </a:pPr>
+            <a:r>
+              <a:rPr sz="1250" b="1" spc="100">
+                <a:solidFill>
+                  <a:srgbClr val="FFFFFF"/>
+                </a:solidFill>
+                <a:latin typeface="微软雅黑"/>
+                <a:ea typeface="微软雅黑"/>
+              </a:rPr>
+              <a:t>协议与依赖披露</a:t>
+            </a:r>
+          </a:p>
+        </p:txBody>
+      </p:sp>
+      <p:sp>
+        <p:nvSpPr>
+          <p:cNvPr id="11" name="Rounded Rectangle 10"/>
+          <p:cNvSpPr/>
+          <p:nvPr/>
+        </p:nvSpPr>
+        <p:spPr>
+          <a:xfrm>
+            <a:off x="6355080" y="1938528"/>
+            <a:ext cx="2651760" cy="1783080"/>
+          </a:xfrm>
+          <a:prstGeom prst="roundRect">
+            <a:avLst>
+              <a:gd name="adj" fmla="val 10000"/>
+            </a:avLst>
+          </a:prstGeom>
+          <a:solidFill>
+            <a:srgbClr val="F1F5F9"/>
+          </a:solidFill>
+          <a:ln>
+            <a:noFill/>
+          </a:ln>
+          <a:effectLst/>
+        </p:spPr>
+        <p:style>
+          <a:lnRef idx="1">
+            <a:schemeClr val="accent1"/>
+          </a:lnRef>
+          <a:fillRef idx="3">
+            <a:schemeClr val="accent1"/>
+          </a:fillRef>
+          <a:effectRef idx="2">
+            <a:schemeClr val="accent1"/>
+          </a:effectRef>
+          <a:fontRef idx="minor">
+            <a:schemeClr val="lt1"/>
+          </a:fontRef>
+        </p:style>
+        <p:txBody>
+          <a:bodyPr rtlCol="0" anchor="t" wrap="square" lIns="54864" rIns="54864" tIns="18288" bIns="18288"/>
+          <a:lstStyle/>
+          <a:p>
+            <a:pPr algn="l">
+              <a:lnSpc>
+                <a:spcPct val="118000"/>
+              </a:lnSpc>
+            </a:pPr>
+            <a:r>
+              <a:rPr sz="1050" b="0">
+                <a:solidFill>
+                  <a:srgbClr val="0F172A"/>
+                </a:solidFill>
+                <a:latin typeface="微软雅黑"/>
+                <a:ea typeface="微软雅黑"/>
+              </a:rPr>
+              <a:t>MIT</a:t>
+            </a:r>
+          </a:p>
+          <a:p>
+            <a:pPr algn="l">
+              <a:lnSpc>
+                <a:spcPct val="118000"/>
+              </a:lnSpc>
+            </a:pPr>
+            <a:r>
+              <a:rPr sz="1050" b="0">
+                <a:solidFill>
+                  <a:srgbClr val="0F172A"/>
+                </a:solidFill>
+                <a:latin typeface="微软雅黑"/>
+                <a:ea typeface="微软雅黑"/>
+              </a:rPr>
+              <a:t>第三方依赖全披露</a:t>
+            </a:r>
+          </a:p>
+          <a:p>
+            <a:pPr algn="l">
+              <a:lnSpc>
+                <a:spcPct val="118000"/>
+              </a:lnSpc>
+            </a:pPr>
+            <a:r>
+              <a:rPr sz="1050" b="0">
+                <a:solidFill>
+                  <a:srgbClr val="0F172A"/>
+                </a:solidFill>
+                <a:latin typeface="微软雅黑"/>
+                <a:ea typeface="微软雅黑"/>
+              </a:rPr>
+              <a:t>商业 API / 闭源模型边界</a:t>
+            </a:r>
+          </a:p>
+        </p:txBody>
+      </p:sp>
+      <p:sp>
+        <p:nvSpPr>
+          <p:cNvPr id="12" name="Right Arrow 11"/>
+          <p:cNvSpPr/>
+          <p:nvPr/>
+        </p:nvSpPr>
+        <p:spPr>
+          <a:xfrm>
+            <a:off x="9006840" y="2331720"/>
+            <a:ext cx="274320" cy="365760"/>
+          </a:xfrm>
+          <a:prstGeom prst="rightArrow">
+            <a:avLst>
+              <a:gd name="adj1" fmla="val 10000"/>
+              <a:gd name="adj2" fmla="val 50000"/>
+            </a:avLst>
+          </a:prstGeom>
+          <a:solidFill>
+            <a:srgbClr val="2E5BFF"/>
+          </a:solidFill>
+          <a:ln>
+            <a:noFill/>
+          </a:ln>
+          <a:effectLst/>
+        </p:spPr>
+        <p:style>
+          <a:lnRef idx="1">
+            <a:schemeClr val="accent1"/>
+          </a:lnRef>
+          <a:fillRef idx="3">
+            <a:schemeClr val="accent1"/>
+          </a:fillRef>
+          <a:effectRef idx="2">
+            <a:schemeClr val="accent1"/>
+          </a:effectRef>
+          <a:fontRef idx="minor">
+            <a:schemeClr val="lt1"/>
+          </a:fontRef>
+        </p:style>
+        <p:txBody>
+          <a:bodyPr rtlCol="0" anchor="ctr"/>
+          <a:lstStyle/>
+          <a:p>
+            <a:pPr algn="ctr"/>
+          </a:p>
+        </p:txBody>
+      </p:sp>
+      <p:sp>
+        <p:nvSpPr>
+          <p:cNvPr id="13" name="Rounded Rectangle 12"/>
+          <p:cNvSpPr/>
+          <p:nvPr/>
+        </p:nvSpPr>
+        <p:spPr>
+          <a:xfrm>
+            <a:off x="9281160" y="1417320"/>
+            <a:ext cx="2651760" cy="457200"/>
+          </a:xfrm>
+          <a:prstGeom prst="roundRect">
+            <a:avLst>
+              <a:gd name="adj" fmla="val 10000"/>
+            </a:avLst>
+          </a:prstGeom>
+          <a:solidFill>
+            <a:srgbClr val="10B981"/>
+          </a:solidFill>
+          <a:ln>
+            <a:noFill/>
+          </a:ln>
+          <a:effectLst/>
+        </p:spPr>
+        <p:style>
+          <a:lnRef idx="1">
+            <a:schemeClr val="accent1"/>
+          </a:lnRef>
+          <a:fillRef idx="3">
+            <a:schemeClr val="accent1"/>
+          </a:fillRef>
+          <a:effectRef idx="2">
+            <a:schemeClr val="accent1"/>
+          </a:effectRef>
+          <a:fontRef idx="minor">
+            <a:schemeClr val="lt1"/>
+          </a:fontRef>
+        </p:style>
+        <p:txBody>
+          <a:bodyPr rtlCol="0" anchor="ctr" wrap="square" lIns="54864" rIns="54864" tIns="18288" bIns="18288"/>
+          <a:lstStyle/>
+          <a:p>
+            <a:pPr algn="ctr">
+              <a:lnSpc>
+                <a:spcPct val="102000"/>
+              </a:lnSpc>
+            </a:pPr>
+            <a:r>
+              <a:rPr sz="1250" b="1" spc="100">
+                <a:solidFill>
+                  <a:srgbClr val="FFFFFF"/>
+                </a:solidFill>
+                <a:latin typeface="微软雅黑"/>
+                <a:ea typeface="微软雅黑"/>
+              </a:rPr>
+              <a:t>社区共建</a:t>
+            </a:r>
+          </a:p>
+        </p:txBody>
+      </p:sp>
+      <p:sp>
+        <p:nvSpPr>
+          <p:cNvPr id="14" name="Rounded Rectangle 13"/>
+          <p:cNvSpPr/>
+          <p:nvPr/>
+        </p:nvSpPr>
+        <p:spPr>
+          <a:xfrm>
+            <a:off x="9281160" y="1938528"/>
+            <a:ext cx="2651760" cy="1783080"/>
+          </a:xfrm>
+          <a:prstGeom prst="roundRect">
+            <a:avLst>
+              <a:gd name="adj" fmla="val 10000"/>
+            </a:avLst>
+          </a:prstGeom>
+          <a:solidFill>
+            <a:srgbClr val="F1F5F9"/>
+          </a:solidFill>
+          <a:ln>
+            <a:noFill/>
+          </a:ln>
+          <a:effectLst/>
+        </p:spPr>
+        <p:style>
+          <a:lnRef idx="1">
+            <a:schemeClr val="accent1"/>
+          </a:lnRef>
+          <a:fillRef idx="3">
+            <a:schemeClr val="accent1"/>
+          </a:fillRef>
+          <a:effectRef idx="2">
+            <a:schemeClr val="accent1"/>
+          </a:effectRef>
+          <a:fontRef idx="minor">
+            <a:schemeClr val="lt1"/>
+          </a:fontRef>
+        </p:style>
+        <p:txBody>
+          <a:bodyPr rtlCol="0" anchor="t" wrap="square" lIns="54864" rIns="54864" tIns="18288" bIns="18288"/>
+          <a:lstStyle/>
+          <a:p>
+            <a:pPr algn="l">
+              <a:lnSpc>
+                <a:spcPct val="118000"/>
+              </a:lnSpc>
+            </a:pPr>
+            <a:r>
+              <a:rPr sz="1050" b="0">
+                <a:solidFill>
+                  <a:srgbClr val="0F172A"/>
+                </a:solidFill>
+                <a:latin typeface="微软雅黑"/>
+                <a:ea typeface="微软雅黑"/>
+              </a:rPr>
+              <a:t>4240 测试背书</a:t>
+            </a:r>
+          </a:p>
+          <a:p>
+            <a:pPr algn="l">
+              <a:lnSpc>
+                <a:spcPct val="118000"/>
+              </a:lnSpc>
+            </a:pPr>
+            <a:r>
+              <a:rPr sz="1050" b="0">
+                <a:solidFill>
+                  <a:srgbClr val="0F172A"/>
+                </a:solidFill>
+                <a:latin typeface="微软雅黑"/>
+                <a:ea typeface="微软雅黑"/>
+              </a:rPr>
+              <a:t>AI 工程/研发效能社区</a:t>
+            </a:r>
+          </a:p>
+          <a:p>
+            <a:pPr algn="l">
+              <a:lnSpc>
+                <a:spcPct val="118000"/>
+              </a:lnSpc>
+            </a:pPr>
+            <a:r>
+              <a:rPr sz="1050" b="0">
+                <a:solidFill>
+                  <a:srgbClr val="0F172A"/>
+                </a:solidFill>
+                <a:latin typeface="微软雅黑"/>
+                <a:ea typeface="微软雅黑"/>
+              </a:rPr>
+              <a:t>长期维护与迭代</a:t>
+            </a:r>
+          </a:p>
+        </p:txBody>
+      </p:sp>
+      <p:sp>
+        <p:nvSpPr>
+          <p:cNvPr id="15" name="Rounded Rectangle 14"/>
+          <p:cNvSpPr/>
+          <p:nvPr/>
+        </p:nvSpPr>
+        <p:spPr>
+          <a:xfrm>
+            <a:off x="502920" y="4572000"/>
+            <a:ext cx="11155680" cy="914400"/>
+          </a:xfrm>
+          <a:prstGeom prst="roundRect">
+            <a:avLst>
+              <a:gd name="adj" fmla="val 10000"/>
+            </a:avLst>
+          </a:prstGeom>
+          <a:solidFill>
+            <a:srgbClr val="E2E8F0"/>
+          </a:solidFill>
+          <a:ln>
+            <a:noFill/>
+          </a:ln>
+          <a:effectLst/>
+        </p:spPr>
+        <p:style>
+          <a:lnRef idx="1">
+            <a:schemeClr val="accent1"/>
+          </a:lnRef>
+          <a:fillRef idx="3">
+            <a:schemeClr val="accent1"/>
+          </a:fillRef>
+          <a:effectRef idx="2">
+            <a:schemeClr val="accent1"/>
+          </a:effectRef>
+          <a:fontRef idx="minor">
+            <a:schemeClr val="lt1"/>
+          </a:fontRef>
+        </p:style>
+        <p:txBody>
+          <a:bodyPr rtlCol="0" anchor="ctr" wrap="square" lIns="54864" rIns="54864" tIns="18288" bIns="18288"/>
+          <a:lstStyle/>
+          <a:p>
+            <a:pPr algn="l">
+              <a:lnSpc>
+                <a:spcPct val="118000"/>
+              </a:lnSpc>
+            </a:pPr>
+            <a:r>
+              <a:rPr sz="1000" b="0">
+                <a:solidFill>
+                  <a:srgbClr val="0F172A"/>
+                </a:solidFill>
+                <a:latin typeface="微软雅黑"/>
+                <a:ea typeface="微软雅黑"/>
+              </a:rPr>
+              <a:t>开源范围：核心引擎 + Skill + 网关 + 示例与运行报告，均可复用可验证</a:t>
+            </a:r>
+          </a:p>
+          <a:p>
+            <a:pPr algn="l">
+              <a:lnSpc>
+                <a:spcPct val="118000"/>
+              </a:lnSpc>
+            </a:pPr>
+            <a:r>
+              <a:rPr sz="1000" b="0">
+                <a:solidFill>
+                  <a:srgbClr val="0F172A"/>
+                </a:solidFill>
+                <a:latin typeface="微软雅黑"/>
+                <a:ea typeface="微软雅黑"/>
+              </a:rPr>
+              <a:t>合规：数据来源与授权边界、第三方依赖、商业 API、闭源模型使用范围逐一披露</a:t>
             </a:r>
           </a:p>
         </p:txBody>
@@ -4791,139 +6659,963 @@
       </p:sp>
       <p:sp>
         <p:nvSpPr>
-          <p:cNvPr id="33" name="Text 31"/>
-          <p:cNvSpPr/>
-          <p:nvPr/>
-        </p:nvSpPr>
-        <p:spPr>
-          <a:xfrm>
-            <a:off x="11277295" y="6400800"/>
-            <a:ext cx="548640" cy="274320"/>
-          </a:xfrm>
-          <a:prstGeom prst="rect">
-            <a:avLst/>
-          </a:prstGeom>
-          <a:noFill/>
-        </p:spPr>
-        <p:txBody>
-          <a:bodyPr wrap="square" lIns="0" tIns="0" rIns="0" bIns="0" rtlCol="0" anchor="ctr"/>
-          <a:lstStyle/>
-          <a:p>
-            <a:pPr marL="0" indent="0" algn="r">
-              <a:buNone/>
-            </a:pPr>
-            <a:r>
-              <a:rPr lang="en-US" sz="1000" dirty="0">
-                <a:solidFill>
-                  <a:srgbClr val="6B7280"/>
-                </a:solidFill>
-                <a:latin typeface="微软雅黑" pitchFamily="34" charset="0"/>
-                <a:ea typeface="微软雅黑" pitchFamily="34" charset="-122"/>
-                <a:cs typeface="微软雅黑" pitchFamily="34" charset="-120"/>
-              </a:rPr>
-              <a:t>10</a:t>
-            </a:r>
-            <a:endParaRPr lang="en-US" sz="1000" dirty="0"/>
-          </a:p>
-        </p:txBody>
-      </p:sp>
-      <p:sp>
-        <p:nvSpPr>
-          <p:cNvPr id="38" name="文本框 37"/>
-          <p:cNvSpPr txBox="1"/>
-          <p:nvPr/>
-        </p:nvSpPr>
-        <p:spPr>
-          <a:xfrm>
-            <a:off x="594360" y="1298575"/>
-            <a:ext cx="8013065" cy="368300"/>
-          </a:xfrm>
-          <a:prstGeom prst="rect">
-            <a:avLst/>
-          </a:prstGeom>
-          <a:noFill/>
-        </p:spPr>
-        <p:txBody>
-          <a:bodyPr wrap="square" rtlCol="0">
-            <a:spAutoFit/>
-          </a:bodyPr>
-          <a:p>
-            <a:r>
-              <a:rPr lang="zh-CN" altLang="en-US">
-                <a:sym typeface="+mn-ea"/>
-              </a:rPr>
-              <a:t>当前进展：方案设计完成；7 域架构 23.6 万行 + 4240 测试 + MCP/Skill/KB 基础设施。</a:t>
-            </a:r>
-            <a:endParaRPr lang="zh-CN" altLang="en-US">
-              <a:latin typeface="微软雅黑" pitchFamily="34" charset="0"/>
-              <a:ea typeface="微软雅黑" pitchFamily="34" charset="0"/>
-            </a:endParaRPr>
-          </a:p>
-          <a:p>
-            <a:r>
-              <a:t>里程碑：8.16 初赛提交→8.24 复赛名单→9.3 复赛提交→9.10 决赛名单→9.22 决赛答辩。</a:t>
-            </a:r>
-          </a:p>
-          <a:p>
-            <a:r>
-              <a:t>复赛计划：AgentTeams 本地 install.sh→K8s helm；GitHub Issue 端到端 Demo；SWE-bench-style 评测；官方 Skills 接入。</a:t>
-            </a:r>
-          </a:p>
-          <a:p>
-            <a:r>
-              <a:t>风险控制：Demo 环境不确定性→Mock+真实共用同一 Schema；评审口径→严格对齐评分维度。</a:t>
-            </a:r>
-          </a:p>
-        </p:txBody>
-      </p:sp>
-      <p:pic>
-        <p:nvPicPr>
-          <p:cNvPr id="35" name="图片 34"/>
-          <p:cNvPicPr>
-            <a:picLocks noChangeAspect="1"/>
-          </p:cNvPicPr>
-          <p:nvPr/>
-        </p:nvPicPr>
-        <p:blipFill>
-          <a:blip r:embed="rId1"/>
-          <a:stretch>
-            <a:fillRect/>
-          </a:stretch>
-        </p:blipFill>
-        <p:spPr>
-          <a:xfrm>
-            <a:off x="929640" y="2328545"/>
-            <a:ext cx="4911725" cy="2768600"/>
-          </a:xfrm>
-          <a:prstGeom prst="rect">
-            <a:avLst/>
-          </a:prstGeom>
-        </p:spPr>
-      </p:pic>
-      <p:pic>
-        <p:nvPicPr>
-          <p:cNvPr id="36" name="图片 35"/>
-          <p:cNvPicPr>
-            <a:picLocks noChangeAspect="1"/>
-          </p:cNvPicPr>
-          <p:nvPr/>
-        </p:nvPicPr>
-        <p:blipFill>
-          <a:blip r:embed="rId2"/>
-          <a:stretch>
-            <a:fillRect/>
-          </a:stretch>
-        </p:blipFill>
-        <p:spPr>
-          <a:xfrm>
-            <a:off x="6379210" y="2458720"/>
-            <a:ext cx="5327015" cy="2482215"/>
-          </a:xfrm>
-          <a:prstGeom prst="rect">
-            <a:avLst/>
-          </a:prstGeom>
-        </p:spPr>
-      </p:pic>
+          <p:cNvPr id="4" name="Rounded Rectangle 3"/>
+          <p:cNvSpPr/>
+          <p:nvPr/>
+        </p:nvSpPr>
+        <p:spPr>
+          <a:xfrm>
+            <a:off x="502920" y="1417320"/>
+            <a:ext cx="2011680" cy="457200"/>
+          </a:xfrm>
+          <a:prstGeom prst="roundRect">
+            <a:avLst>
+              <a:gd name="adj" fmla="val 10000"/>
+            </a:avLst>
+          </a:prstGeom>
+          <a:solidFill>
+            <a:srgbClr val="2E5BFF"/>
+          </a:solidFill>
+          <a:ln>
+            <a:noFill/>
+          </a:ln>
+          <a:effectLst/>
+        </p:spPr>
+        <p:style>
+          <a:lnRef idx="1">
+            <a:schemeClr val="accent1"/>
+          </a:lnRef>
+          <a:fillRef idx="3">
+            <a:schemeClr val="accent1"/>
+          </a:fillRef>
+          <a:effectRef idx="2">
+            <a:schemeClr val="accent1"/>
+          </a:effectRef>
+          <a:fontRef idx="minor">
+            <a:schemeClr val="lt1"/>
+          </a:fontRef>
+        </p:style>
+        <p:txBody>
+          <a:bodyPr rtlCol="0" anchor="ctr" wrap="square" lIns="54864" rIns="54864" tIns="18288" bIns="18288"/>
+          <a:lstStyle/>
+          <a:p>
+            <a:pPr algn="ctr">
+              <a:lnSpc>
+                <a:spcPct val="102000"/>
+              </a:lnSpc>
+            </a:pPr>
+            <a:r>
+              <a:rPr sz="1250" b="1" spc="100">
+                <a:solidFill>
+                  <a:srgbClr val="FFFFFF"/>
+                </a:solidFill>
+                <a:latin typeface="微软雅黑"/>
+                <a:ea typeface="微软雅黑"/>
+              </a:rPr>
+              <a:t>初赛 8.16</a:t>
+            </a:r>
+          </a:p>
+        </p:txBody>
+      </p:sp>
+      <p:sp>
+        <p:nvSpPr>
+          <p:cNvPr id="5" name="Rounded Rectangle 4"/>
+          <p:cNvSpPr/>
+          <p:nvPr/>
+        </p:nvSpPr>
+        <p:spPr>
+          <a:xfrm>
+            <a:off x="502920" y="1938528"/>
+            <a:ext cx="2011680" cy="1783080"/>
+          </a:xfrm>
+          <a:prstGeom prst="roundRect">
+            <a:avLst>
+              <a:gd name="adj" fmla="val 10000"/>
+            </a:avLst>
+          </a:prstGeom>
+          <a:solidFill>
+            <a:srgbClr val="F1F5F9"/>
+          </a:solidFill>
+          <a:ln>
+            <a:noFill/>
+          </a:ln>
+          <a:effectLst/>
+        </p:spPr>
+        <p:style>
+          <a:lnRef idx="1">
+            <a:schemeClr val="accent1"/>
+          </a:lnRef>
+          <a:fillRef idx="3">
+            <a:schemeClr val="accent1"/>
+          </a:fillRef>
+          <a:effectRef idx="2">
+            <a:schemeClr val="accent1"/>
+          </a:effectRef>
+          <a:fontRef idx="minor">
+            <a:schemeClr val="lt1"/>
+          </a:fontRef>
+        </p:style>
+        <p:txBody>
+          <a:bodyPr rtlCol="0" anchor="t" wrap="square" lIns="54864" rIns="54864" tIns="18288" bIns="18288"/>
+          <a:lstStyle/>
+          <a:p>
+            <a:pPr algn="l">
+              <a:lnSpc>
+                <a:spcPct val="118000"/>
+              </a:lnSpc>
+            </a:pPr>
+            <a:r>
+              <a:rPr sz="1050" b="0">
+                <a:solidFill>
+                  <a:srgbClr val="0F172A"/>
+                </a:solidFill>
+                <a:latin typeface="微软雅黑"/>
+                <a:ea typeface="微软雅黑"/>
+              </a:rPr>
+              <a:t>提交：简介 + 方案 PPT</a:t>
+            </a:r>
+          </a:p>
+        </p:txBody>
+      </p:sp>
+      <p:sp>
+        <p:nvSpPr>
+          <p:cNvPr id="6" name="Right Arrow 5"/>
+          <p:cNvSpPr/>
+          <p:nvPr/>
+        </p:nvSpPr>
+        <p:spPr>
+          <a:xfrm>
+            <a:off x="2514600" y="1572768"/>
+            <a:ext cx="274320" cy="320040"/>
+          </a:xfrm>
+          <a:prstGeom prst="rightArrow">
+            <a:avLst>
+              <a:gd name="adj1" fmla="val 10000"/>
+              <a:gd name="adj2" fmla="val 50000"/>
+            </a:avLst>
+          </a:prstGeom>
+          <a:solidFill>
+            <a:srgbClr val="2E5BFF"/>
+          </a:solidFill>
+          <a:ln>
+            <a:noFill/>
+          </a:ln>
+          <a:effectLst/>
+        </p:spPr>
+        <p:style>
+          <a:lnRef idx="1">
+            <a:schemeClr val="accent1"/>
+          </a:lnRef>
+          <a:fillRef idx="3">
+            <a:schemeClr val="accent1"/>
+          </a:fillRef>
+          <a:effectRef idx="2">
+            <a:schemeClr val="accent1"/>
+          </a:effectRef>
+          <a:fontRef idx="minor">
+            <a:schemeClr val="lt1"/>
+          </a:fontRef>
+        </p:style>
+        <p:txBody>
+          <a:bodyPr rtlCol="0" anchor="ctr"/>
+          <a:lstStyle/>
+          <a:p>
+            <a:pPr algn="ctr"/>
+          </a:p>
+        </p:txBody>
+      </p:sp>
+      <p:sp>
+        <p:nvSpPr>
+          <p:cNvPr id="7" name="Rounded Rectangle 6"/>
+          <p:cNvSpPr/>
+          <p:nvPr/>
+        </p:nvSpPr>
+        <p:spPr>
+          <a:xfrm>
+            <a:off x="2788920" y="1417320"/>
+            <a:ext cx="2011680" cy="457200"/>
+          </a:xfrm>
+          <a:prstGeom prst="roundRect">
+            <a:avLst>
+              <a:gd name="adj" fmla="val 10000"/>
+            </a:avLst>
+          </a:prstGeom>
+          <a:solidFill>
+            <a:srgbClr val="0EA5E9"/>
+          </a:solidFill>
+          <a:ln>
+            <a:noFill/>
+          </a:ln>
+          <a:effectLst/>
+        </p:spPr>
+        <p:style>
+          <a:lnRef idx="1">
+            <a:schemeClr val="accent1"/>
+          </a:lnRef>
+          <a:fillRef idx="3">
+            <a:schemeClr val="accent1"/>
+          </a:fillRef>
+          <a:effectRef idx="2">
+            <a:schemeClr val="accent1"/>
+          </a:effectRef>
+          <a:fontRef idx="minor">
+            <a:schemeClr val="lt1"/>
+          </a:fontRef>
+        </p:style>
+        <p:txBody>
+          <a:bodyPr rtlCol="0" anchor="ctr" wrap="square" lIns="54864" rIns="54864" tIns="18288" bIns="18288"/>
+          <a:lstStyle/>
+          <a:p>
+            <a:pPr algn="ctr">
+              <a:lnSpc>
+                <a:spcPct val="102000"/>
+              </a:lnSpc>
+            </a:pPr>
+            <a:r>
+              <a:rPr sz="1250" b="1" spc="100">
+                <a:solidFill>
+                  <a:srgbClr val="FFFFFF"/>
+                </a:solidFill>
+                <a:latin typeface="微软雅黑"/>
+                <a:ea typeface="微软雅黑"/>
+              </a:rPr>
+              <a:t>复赛名单 8.24</a:t>
+            </a:r>
+          </a:p>
+        </p:txBody>
+      </p:sp>
+      <p:sp>
+        <p:nvSpPr>
+          <p:cNvPr id="8" name="Rounded Rectangle 7"/>
+          <p:cNvSpPr/>
+          <p:nvPr/>
+        </p:nvSpPr>
+        <p:spPr>
+          <a:xfrm>
+            <a:off x="2788920" y="1938528"/>
+            <a:ext cx="2011680" cy="1783080"/>
+          </a:xfrm>
+          <a:prstGeom prst="roundRect">
+            <a:avLst>
+              <a:gd name="adj" fmla="val 10000"/>
+            </a:avLst>
+          </a:prstGeom>
+          <a:solidFill>
+            <a:srgbClr val="F1F5F9"/>
+          </a:solidFill>
+          <a:ln>
+            <a:noFill/>
+          </a:ln>
+          <a:effectLst/>
+        </p:spPr>
+        <p:style>
+          <a:lnRef idx="1">
+            <a:schemeClr val="accent1"/>
+          </a:lnRef>
+          <a:fillRef idx="3">
+            <a:schemeClr val="accent1"/>
+          </a:fillRef>
+          <a:effectRef idx="2">
+            <a:schemeClr val="accent1"/>
+          </a:effectRef>
+          <a:fontRef idx="minor">
+            <a:schemeClr val="lt1"/>
+          </a:fontRef>
+        </p:style>
+        <p:txBody>
+          <a:bodyPr rtlCol="0" anchor="t" wrap="square" lIns="54864" rIns="54864" tIns="18288" bIns="18288"/>
+          <a:lstStyle/>
+          <a:p>
+            <a:pPr algn="l">
+              <a:lnSpc>
+                <a:spcPct val="118000"/>
+              </a:lnSpc>
+            </a:pPr>
+            <a:r>
+              <a:rPr sz="1050" b="0">
+                <a:solidFill>
+                  <a:srgbClr val="0F172A"/>
+                </a:solidFill>
+                <a:latin typeface="微软雅黑"/>
+                <a:ea typeface="微软雅黑"/>
+              </a:rPr>
+              <a:t>Top30 入围</a:t>
+            </a:r>
+          </a:p>
+        </p:txBody>
+      </p:sp>
+      <p:sp>
+        <p:nvSpPr>
+          <p:cNvPr id="9" name="Right Arrow 8"/>
+          <p:cNvSpPr/>
+          <p:nvPr/>
+        </p:nvSpPr>
+        <p:spPr>
+          <a:xfrm>
+            <a:off x="4800600" y="1572768"/>
+            <a:ext cx="274320" cy="320040"/>
+          </a:xfrm>
+          <a:prstGeom prst="rightArrow">
+            <a:avLst>
+              <a:gd name="adj1" fmla="val 10000"/>
+              <a:gd name="adj2" fmla="val 50000"/>
+            </a:avLst>
+          </a:prstGeom>
+          <a:solidFill>
+            <a:srgbClr val="2E5BFF"/>
+          </a:solidFill>
+          <a:ln>
+            <a:noFill/>
+          </a:ln>
+          <a:effectLst/>
+        </p:spPr>
+        <p:style>
+          <a:lnRef idx="1">
+            <a:schemeClr val="accent1"/>
+          </a:lnRef>
+          <a:fillRef idx="3">
+            <a:schemeClr val="accent1"/>
+          </a:fillRef>
+          <a:effectRef idx="2">
+            <a:schemeClr val="accent1"/>
+          </a:effectRef>
+          <a:fontRef idx="minor">
+            <a:schemeClr val="lt1"/>
+          </a:fontRef>
+        </p:style>
+        <p:txBody>
+          <a:bodyPr rtlCol="0" anchor="ctr"/>
+          <a:lstStyle/>
+          <a:p>
+            <a:pPr algn="ctr"/>
+          </a:p>
+        </p:txBody>
+      </p:sp>
+      <p:sp>
+        <p:nvSpPr>
+          <p:cNvPr id="10" name="Rounded Rectangle 9"/>
+          <p:cNvSpPr/>
+          <p:nvPr/>
+        </p:nvSpPr>
+        <p:spPr>
+          <a:xfrm>
+            <a:off x="5074920" y="1417320"/>
+            <a:ext cx="2011680" cy="457200"/>
+          </a:xfrm>
+          <a:prstGeom prst="roundRect">
+            <a:avLst>
+              <a:gd name="adj" fmla="val 10000"/>
+            </a:avLst>
+          </a:prstGeom>
+          <a:solidFill>
+            <a:srgbClr val="06B6D4"/>
+          </a:solidFill>
+          <a:ln>
+            <a:noFill/>
+          </a:ln>
+          <a:effectLst/>
+        </p:spPr>
+        <p:style>
+          <a:lnRef idx="1">
+            <a:schemeClr val="accent1"/>
+          </a:lnRef>
+          <a:fillRef idx="3">
+            <a:schemeClr val="accent1"/>
+          </a:fillRef>
+          <a:effectRef idx="2">
+            <a:schemeClr val="accent1"/>
+          </a:effectRef>
+          <a:fontRef idx="minor">
+            <a:schemeClr val="lt1"/>
+          </a:fontRef>
+        </p:style>
+        <p:txBody>
+          <a:bodyPr rtlCol="0" anchor="ctr" wrap="square" lIns="54864" rIns="54864" tIns="18288" bIns="18288"/>
+          <a:lstStyle/>
+          <a:p>
+            <a:pPr algn="ctr">
+              <a:lnSpc>
+                <a:spcPct val="102000"/>
+              </a:lnSpc>
+            </a:pPr>
+            <a:r>
+              <a:rPr sz="1250" b="1" spc="100">
+                <a:solidFill>
+                  <a:srgbClr val="FFFFFF"/>
+                </a:solidFill>
+                <a:latin typeface="微软雅黑"/>
+                <a:ea typeface="微软雅黑"/>
+              </a:rPr>
+              <a:t>复赛 9.3</a:t>
+            </a:r>
+          </a:p>
+        </p:txBody>
+      </p:sp>
+      <p:sp>
+        <p:nvSpPr>
+          <p:cNvPr id="11" name="Rounded Rectangle 10"/>
+          <p:cNvSpPr/>
+          <p:nvPr/>
+        </p:nvSpPr>
+        <p:spPr>
+          <a:xfrm>
+            <a:off x="5074920" y="1938528"/>
+            <a:ext cx="2011680" cy="1783080"/>
+          </a:xfrm>
+          <a:prstGeom prst="roundRect">
+            <a:avLst>
+              <a:gd name="adj" fmla="val 10000"/>
+            </a:avLst>
+          </a:prstGeom>
+          <a:solidFill>
+            <a:srgbClr val="F1F5F9"/>
+          </a:solidFill>
+          <a:ln>
+            <a:noFill/>
+          </a:ln>
+          <a:effectLst/>
+        </p:spPr>
+        <p:style>
+          <a:lnRef idx="1">
+            <a:schemeClr val="accent1"/>
+          </a:lnRef>
+          <a:fillRef idx="3">
+            <a:schemeClr val="accent1"/>
+          </a:fillRef>
+          <a:effectRef idx="2">
+            <a:schemeClr val="accent1"/>
+          </a:effectRef>
+          <a:fontRef idx="minor">
+            <a:schemeClr val="lt1"/>
+          </a:fontRef>
+        </p:style>
+        <p:txBody>
+          <a:bodyPr rtlCol="0" anchor="t" wrap="square" lIns="54864" rIns="54864" tIns="18288" bIns="18288"/>
+          <a:lstStyle/>
+          <a:p>
+            <a:pPr algn="l">
+              <a:lnSpc>
+                <a:spcPct val="118000"/>
+              </a:lnSpc>
+            </a:pPr>
+            <a:r>
+              <a:rPr sz="1050" b="0">
+                <a:solidFill>
+                  <a:srgbClr val="0F172A"/>
+                </a:solidFill>
+                <a:latin typeface="微软雅黑"/>
+                <a:ea typeface="微软雅黑"/>
+              </a:rPr>
+              <a:t>可执行 AgentTeams 代码包</a:t>
+            </a:r>
+          </a:p>
+          <a:p>
+            <a:pPr algn="l">
+              <a:lnSpc>
+                <a:spcPct val="118000"/>
+              </a:lnSpc>
+            </a:pPr>
+            <a:r>
+              <a:rPr sz="1050" b="0">
+                <a:solidFill>
+                  <a:srgbClr val="0F172A"/>
+                </a:solidFill>
+                <a:latin typeface="微软雅黑"/>
+                <a:ea typeface="微软雅黑"/>
+              </a:rPr>
+              <a:t>端到端 Demo / 视频</a:t>
+            </a:r>
+          </a:p>
+        </p:txBody>
+      </p:sp>
+      <p:sp>
+        <p:nvSpPr>
+          <p:cNvPr id="12" name="Right Arrow 11"/>
+          <p:cNvSpPr/>
+          <p:nvPr/>
+        </p:nvSpPr>
+        <p:spPr>
+          <a:xfrm>
+            <a:off x="7086600" y="1572768"/>
+            <a:ext cx="274320" cy="320040"/>
+          </a:xfrm>
+          <a:prstGeom prst="rightArrow">
+            <a:avLst>
+              <a:gd name="adj1" fmla="val 10000"/>
+              <a:gd name="adj2" fmla="val 50000"/>
+            </a:avLst>
+          </a:prstGeom>
+          <a:solidFill>
+            <a:srgbClr val="2E5BFF"/>
+          </a:solidFill>
+          <a:ln>
+            <a:noFill/>
+          </a:ln>
+          <a:effectLst/>
+        </p:spPr>
+        <p:style>
+          <a:lnRef idx="1">
+            <a:schemeClr val="accent1"/>
+          </a:lnRef>
+          <a:fillRef idx="3">
+            <a:schemeClr val="accent1"/>
+          </a:fillRef>
+          <a:effectRef idx="2">
+            <a:schemeClr val="accent1"/>
+          </a:effectRef>
+          <a:fontRef idx="minor">
+            <a:schemeClr val="lt1"/>
+          </a:fontRef>
+        </p:style>
+        <p:txBody>
+          <a:bodyPr rtlCol="0" anchor="ctr"/>
+          <a:lstStyle/>
+          <a:p>
+            <a:pPr algn="ctr"/>
+          </a:p>
+        </p:txBody>
+      </p:sp>
+      <p:sp>
+        <p:nvSpPr>
+          <p:cNvPr id="13" name="Rounded Rectangle 12"/>
+          <p:cNvSpPr/>
+          <p:nvPr/>
+        </p:nvSpPr>
+        <p:spPr>
+          <a:xfrm>
+            <a:off x="7360920" y="1417320"/>
+            <a:ext cx="2011680" cy="457200"/>
+          </a:xfrm>
+          <a:prstGeom prst="roundRect">
+            <a:avLst>
+              <a:gd name="adj" fmla="val 10000"/>
+            </a:avLst>
+          </a:prstGeom>
+          <a:solidFill>
+            <a:srgbClr val="F5B301"/>
+          </a:solidFill>
+          <a:ln>
+            <a:noFill/>
+          </a:ln>
+          <a:effectLst/>
+        </p:spPr>
+        <p:style>
+          <a:lnRef idx="1">
+            <a:schemeClr val="accent1"/>
+          </a:lnRef>
+          <a:fillRef idx="3">
+            <a:schemeClr val="accent1"/>
+          </a:fillRef>
+          <a:effectRef idx="2">
+            <a:schemeClr val="accent1"/>
+          </a:effectRef>
+          <a:fontRef idx="minor">
+            <a:schemeClr val="lt1"/>
+          </a:fontRef>
+        </p:style>
+        <p:txBody>
+          <a:bodyPr rtlCol="0" anchor="ctr" wrap="square" lIns="54864" rIns="54864" tIns="18288" bIns="18288"/>
+          <a:lstStyle/>
+          <a:p>
+            <a:pPr algn="ctr">
+              <a:lnSpc>
+                <a:spcPct val="102000"/>
+              </a:lnSpc>
+            </a:pPr>
+            <a:r>
+              <a:rPr sz="1250" b="1" spc="100">
+                <a:solidFill>
+                  <a:srgbClr val="FFFFFF"/>
+                </a:solidFill>
+                <a:latin typeface="微软雅黑"/>
+                <a:ea typeface="微软雅黑"/>
+              </a:rPr>
+              <a:t>决赛名单 9.10</a:t>
+            </a:r>
+          </a:p>
+        </p:txBody>
+      </p:sp>
+      <p:sp>
+        <p:nvSpPr>
+          <p:cNvPr id="14" name="Rounded Rectangle 13"/>
+          <p:cNvSpPr/>
+          <p:nvPr/>
+        </p:nvSpPr>
+        <p:spPr>
+          <a:xfrm>
+            <a:off x="7360920" y="1938528"/>
+            <a:ext cx="2011680" cy="1783080"/>
+          </a:xfrm>
+          <a:prstGeom prst="roundRect">
+            <a:avLst>
+              <a:gd name="adj" fmla="val 10000"/>
+            </a:avLst>
+          </a:prstGeom>
+          <a:solidFill>
+            <a:srgbClr val="F1F5F9"/>
+          </a:solidFill>
+          <a:ln>
+            <a:noFill/>
+          </a:ln>
+          <a:effectLst/>
+        </p:spPr>
+        <p:style>
+          <a:lnRef idx="1">
+            <a:schemeClr val="accent1"/>
+          </a:lnRef>
+          <a:fillRef idx="3">
+            <a:schemeClr val="accent1"/>
+          </a:fillRef>
+          <a:effectRef idx="2">
+            <a:schemeClr val="accent1"/>
+          </a:effectRef>
+          <a:fontRef idx="minor">
+            <a:schemeClr val="lt1"/>
+          </a:fontRef>
+        </p:style>
+        <p:txBody>
+          <a:bodyPr rtlCol="0" anchor="t" wrap="square" lIns="54864" rIns="54864" tIns="18288" bIns="18288"/>
+          <a:lstStyle/>
+          <a:p>
+            <a:pPr algn="l">
+              <a:lnSpc>
+                <a:spcPct val="118000"/>
+              </a:lnSpc>
+            </a:pPr>
+            <a:r>
+              <a:rPr sz="1050" b="0">
+                <a:solidFill>
+                  <a:srgbClr val="0F172A"/>
+                </a:solidFill>
+                <a:latin typeface="微软雅黑"/>
+                <a:ea typeface="微软雅黑"/>
+              </a:rPr>
+              <a:t>Top15 入围</a:t>
+            </a:r>
+          </a:p>
+        </p:txBody>
+      </p:sp>
+      <p:sp>
+        <p:nvSpPr>
+          <p:cNvPr id="15" name="Right Arrow 14"/>
+          <p:cNvSpPr/>
+          <p:nvPr/>
+        </p:nvSpPr>
+        <p:spPr>
+          <a:xfrm>
+            <a:off x="9372600" y="1572768"/>
+            <a:ext cx="274320" cy="320040"/>
+          </a:xfrm>
+          <a:prstGeom prst="rightArrow">
+            <a:avLst>
+              <a:gd name="adj1" fmla="val 10000"/>
+              <a:gd name="adj2" fmla="val 50000"/>
+            </a:avLst>
+          </a:prstGeom>
+          <a:solidFill>
+            <a:srgbClr val="2E5BFF"/>
+          </a:solidFill>
+          <a:ln>
+            <a:noFill/>
+          </a:ln>
+          <a:effectLst/>
+        </p:spPr>
+        <p:style>
+          <a:lnRef idx="1">
+            <a:schemeClr val="accent1"/>
+          </a:lnRef>
+          <a:fillRef idx="3">
+            <a:schemeClr val="accent1"/>
+          </a:fillRef>
+          <a:effectRef idx="2">
+            <a:schemeClr val="accent1"/>
+          </a:effectRef>
+          <a:fontRef idx="minor">
+            <a:schemeClr val="lt1"/>
+          </a:fontRef>
+        </p:style>
+        <p:txBody>
+          <a:bodyPr rtlCol="0" anchor="ctr"/>
+          <a:lstStyle/>
+          <a:p>
+            <a:pPr algn="ctr"/>
+          </a:p>
+        </p:txBody>
+      </p:sp>
+      <p:sp>
+        <p:nvSpPr>
+          <p:cNvPr id="16" name="Rounded Rectangle 15"/>
+          <p:cNvSpPr/>
+          <p:nvPr/>
+        </p:nvSpPr>
+        <p:spPr>
+          <a:xfrm>
+            <a:off x="9646920" y="1417320"/>
+            <a:ext cx="2011680" cy="457200"/>
+          </a:xfrm>
+          <a:prstGeom prst="roundRect">
+            <a:avLst>
+              <a:gd name="adj" fmla="val 10000"/>
+            </a:avLst>
+          </a:prstGeom>
+          <a:solidFill>
+            <a:srgbClr val="10B981"/>
+          </a:solidFill>
+          <a:ln>
+            <a:noFill/>
+          </a:ln>
+          <a:effectLst/>
+        </p:spPr>
+        <p:style>
+          <a:lnRef idx="1">
+            <a:schemeClr val="accent1"/>
+          </a:lnRef>
+          <a:fillRef idx="3">
+            <a:schemeClr val="accent1"/>
+          </a:fillRef>
+          <a:effectRef idx="2">
+            <a:schemeClr val="accent1"/>
+          </a:effectRef>
+          <a:fontRef idx="minor">
+            <a:schemeClr val="lt1"/>
+          </a:fontRef>
+        </p:style>
+        <p:txBody>
+          <a:bodyPr rtlCol="0" anchor="ctr" wrap="square" lIns="54864" rIns="54864" tIns="18288" bIns="18288"/>
+          <a:lstStyle/>
+          <a:p>
+            <a:pPr algn="ctr">
+              <a:lnSpc>
+                <a:spcPct val="102000"/>
+              </a:lnSpc>
+            </a:pPr>
+            <a:r>
+              <a:rPr sz="1250" b="1" spc="100">
+                <a:solidFill>
+                  <a:srgbClr val="FFFFFF"/>
+                </a:solidFill>
+                <a:latin typeface="微软雅黑"/>
+                <a:ea typeface="微软雅黑"/>
+              </a:rPr>
+              <a:t>决赛 9.22</a:t>
+            </a:r>
+          </a:p>
+        </p:txBody>
+      </p:sp>
+      <p:sp>
+        <p:nvSpPr>
+          <p:cNvPr id="17" name="Rounded Rectangle 16"/>
+          <p:cNvSpPr/>
+          <p:nvPr/>
+        </p:nvSpPr>
+        <p:spPr>
+          <a:xfrm>
+            <a:off x="9646920" y="1938528"/>
+            <a:ext cx="2011680" cy="1783080"/>
+          </a:xfrm>
+          <a:prstGeom prst="roundRect">
+            <a:avLst>
+              <a:gd name="adj" fmla="val 10000"/>
+            </a:avLst>
+          </a:prstGeom>
+          <a:solidFill>
+            <a:srgbClr val="F1F5F9"/>
+          </a:solidFill>
+          <a:ln>
+            <a:noFill/>
+          </a:ln>
+          <a:effectLst/>
+        </p:spPr>
+        <p:style>
+          <a:lnRef idx="1">
+            <a:schemeClr val="accent1"/>
+          </a:lnRef>
+          <a:fillRef idx="3">
+            <a:schemeClr val="accent1"/>
+          </a:fillRef>
+          <a:effectRef idx="2">
+            <a:schemeClr val="accent1"/>
+          </a:effectRef>
+          <a:fontRef idx="minor">
+            <a:schemeClr val="lt1"/>
+          </a:fontRef>
+        </p:style>
+        <p:txBody>
+          <a:bodyPr rtlCol="0" anchor="t" wrap="square" lIns="54864" rIns="54864" tIns="18288" bIns="18288"/>
+          <a:lstStyle/>
+          <a:p>
+            <a:pPr algn="l">
+              <a:lnSpc>
+                <a:spcPct val="118000"/>
+              </a:lnSpc>
+            </a:pPr>
+            <a:r>
+              <a:rPr sz="1050" b="0">
+                <a:solidFill>
+                  <a:srgbClr val="0F172A"/>
+                </a:solidFill>
+                <a:latin typeface="微软雅黑"/>
+                <a:ea typeface="微软雅黑"/>
+              </a:rPr>
+              <a:t>现场路演 + Demo</a:t>
+            </a:r>
+          </a:p>
+          <a:p>
+            <a:pPr algn="l">
+              <a:lnSpc>
+                <a:spcPct val="118000"/>
+              </a:lnSpc>
+            </a:pPr>
+            <a:r>
+              <a:rPr sz="1050" b="0">
+                <a:solidFill>
+                  <a:srgbClr val="0F172A"/>
+                </a:solidFill>
+                <a:latin typeface="微软雅黑"/>
+                <a:ea typeface="微软雅黑"/>
+              </a:rPr>
+              <a:t>代码仓库最终版</a:t>
+            </a:r>
+          </a:p>
+        </p:txBody>
+      </p:sp>
+      <p:sp>
+        <p:nvSpPr>
+          <p:cNvPr id="18" name="Rounded Rectangle 17"/>
+          <p:cNvSpPr/>
+          <p:nvPr/>
+        </p:nvSpPr>
+        <p:spPr>
+          <a:xfrm>
+            <a:off x="502920" y="4069080"/>
+            <a:ext cx="11155680" cy="822960"/>
+          </a:xfrm>
+          <a:prstGeom prst="roundRect">
+            <a:avLst>
+              <a:gd name="adj" fmla="val 10000"/>
+            </a:avLst>
+          </a:prstGeom>
+          <a:solidFill>
+            <a:srgbClr val="E2E8F0"/>
+          </a:solidFill>
+          <a:ln>
+            <a:noFill/>
+          </a:ln>
+          <a:effectLst/>
+        </p:spPr>
+        <p:style>
+          <a:lnRef idx="1">
+            <a:schemeClr val="accent1"/>
+          </a:lnRef>
+          <a:fillRef idx="3">
+            <a:schemeClr val="accent1"/>
+          </a:fillRef>
+          <a:effectRef idx="2">
+            <a:schemeClr val="accent1"/>
+          </a:effectRef>
+          <a:fontRef idx="minor">
+            <a:schemeClr val="lt1"/>
+          </a:fontRef>
+        </p:style>
+        <p:txBody>
+          <a:bodyPr rtlCol="0" anchor="ctr" wrap="square" lIns="54864" rIns="54864" tIns="18288" bIns="18288"/>
+          <a:lstStyle/>
+          <a:p>
+            <a:pPr algn="l">
+              <a:lnSpc>
+                <a:spcPct val="118000"/>
+              </a:lnSpc>
+            </a:pPr>
+            <a:r>
+              <a:rPr sz="1000" b="0">
+                <a:solidFill>
+                  <a:srgbClr val="0F172A"/>
+                </a:solidFill>
+                <a:latin typeface="微软雅黑"/>
+                <a:ea typeface="微软雅黑"/>
+              </a:rPr>
+              <a:t>复赛工程化：AgentTeams 本地 install.sh → K8s helm · GitHub Issue 端到端 Demo · SWE-bench-style 评测 · 官方 Skills 接入</a:t>
+            </a:r>
+          </a:p>
+        </p:txBody>
+      </p:sp>
+      <p:sp>
+        <p:nvSpPr>
+          <p:cNvPr id="19" name="Rounded Rectangle 18"/>
+          <p:cNvSpPr/>
+          <p:nvPr/>
+        </p:nvSpPr>
+        <p:spPr>
+          <a:xfrm>
+            <a:off x="502920" y="5029200"/>
+            <a:ext cx="11155680" cy="1051560"/>
+          </a:xfrm>
+          <a:prstGeom prst="roundRect">
+            <a:avLst>
+              <a:gd name="adj" fmla="val 10000"/>
+            </a:avLst>
+          </a:prstGeom>
+          <a:solidFill>
+            <a:srgbClr val="F1F5F9"/>
+          </a:solidFill>
+          <a:ln>
+            <a:noFill/>
+          </a:ln>
+          <a:effectLst/>
+        </p:spPr>
+        <p:style>
+          <a:lnRef idx="1">
+            <a:schemeClr val="accent1"/>
+          </a:lnRef>
+          <a:fillRef idx="3">
+            <a:schemeClr val="accent1"/>
+          </a:fillRef>
+          <a:effectRef idx="2">
+            <a:schemeClr val="accent1"/>
+          </a:effectRef>
+          <a:fontRef idx="minor">
+            <a:schemeClr val="lt1"/>
+          </a:fontRef>
+        </p:style>
+        <p:txBody>
+          <a:bodyPr rtlCol="0" anchor="ctr" wrap="square" lIns="54864" rIns="54864" tIns="18288" bIns="18288"/>
+          <a:lstStyle/>
+          <a:p>
+            <a:pPr algn="l">
+              <a:lnSpc>
+                <a:spcPct val="118000"/>
+              </a:lnSpc>
+            </a:pPr>
+            <a:r>
+              <a:rPr sz="1050" b="1">
+                <a:solidFill>
+                  <a:srgbClr val="0F172A"/>
+                </a:solidFill>
+                <a:latin typeface="微软雅黑"/>
+                <a:ea typeface="微软雅黑"/>
+              </a:rPr>
+              <a:t>评估指标：修复成功率 · 端到端时延 · Token 成本 · 门禁通过率 · 经验沉淀速率</a:t>
+            </a:r>
+          </a:p>
+          <a:p>
+            <a:pPr algn="l">
+              <a:lnSpc>
+                <a:spcPct val="118000"/>
+              </a:lnSpc>
+            </a:pPr>
+            <a:r>
+              <a:rPr sz="1050" b="0">
+                <a:solidFill>
+                  <a:srgbClr val="0F172A"/>
+                </a:solidFill>
+                <a:latin typeface="微软雅黑"/>
+                <a:ea typeface="微软雅黑"/>
+              </a:rPr>
+              <a:t>风险控制：Demo 环境不确定性（网络/凭证）→ Mock 与真实接入共用同一 Schema · 评审口径严格对齐评分维度</a:t>
+            </a:r>
+          </a:p>
+        </p:txBody>
+      </p:sp>
     </p:spTree>
   </p:cSld>
   <p:clrMapOvr>
@@ -5265,7 +7957,7 @@
                 <a:ea typeface="微软雅黑" pitchFamily="34" charset="0"/>
                 <a:cs typeface="微软雅黑" pitchFamily="34" charset="0"/>
               </a:rPr>
-              <a:t>成员背景：[姓名]（学校/公司·岗位·技能）。</a:t>
+              <a:t>团队名称：NeoTrix（个人参赛 · 郑州大学）</a:t>
             </a:r>
             <a:r>
               <a:rPr lang="en-US" altLang="zh-CN">
@@ -5282,165 +7974,24 @@
             </a:endParaRPr>
           </a:p>
           <a:p>
-            <a:pPr algn="l">
-              <a:lnSpc>
-                <a:spcPct val="150000"/>
-              </a:lnSpc>
-              <a:buClrTx/>
-              <a:buSzTx/>
-              <a:buFontTx/>
-            </a:pPr>
-            <a:endParaRPr lang="en-US" altLang="zh-CN">
-              <a:latin typeface="微软雅黑" pitchFamily="34" charset="0"/>
-              <a:ea typeface="微软雅黑" pitchFamily="34" charset="0"/>
-              <a:cs typeface="微软雅黑" pitchFamily="34" charset="0"/>
-            </a:endParaRPr>
-          </a:p>
-          <a:p>
-            <a:pPr algn="l">
-              <a:lnSpc>
-                <a:spcPct val="150000"/>
-              </a:lnSpc>
-              <a:buClrTx/>
-              <a:buSzTx/>
-              <a:buFontTx/>
-            </a:pPr>
-            <a:r>
-              <a:rPr lang="en-US" altLang="zh-CN">
-                <a:latin typeface="微软雅黑" pitchFamily="34" charset="0"/>
-                <a:ea typeface="微软雅黑" pitchFamily="34" charset="0"/>
-                <a:cs typeface="微软雅黑" pitchFamily="34" charset="0"/>
-              </a:rPr>
-              <a:t>1. </a:t>
-            </a:r>
-            <a:r>
-              <a:rPr lang="zh-CN" altLang="en-US">
-                <a:latin typeface="微软雅黑" pitchFamily="34" charset="0"/>
-                <a:ea typeface="微软雅黑" pitchFamily="34" charset="0"/>
-                <a:cs typeface="微软雅黑" pitchFamily="34" charset="0"/>
-              </a:rPr>
-              <a:t>成员背景</a:t>
-            </a:r>
-            <a:r>
-              <a:rPr lang="en-US" altLang="zh-CN">
-                <a:latin typeface="微软雅黑" pitchFamily="34" charset="0"/>
-                <a:ea typeface="微软雅黑" pitchFamily="34" charset="0"/>
-                <a:cs typeface="微软雅黑" pitchFamily="34" charset="0"/>
-              </a:rPr>
-              <a:t>：</a:t>
-            </a:r>
-            <a:endParaRPr lang="en-US" altLang="zh-CN">
-              <a:latin typeface="微软雅黑" pitchFamily="34" charset="0"/>
-              <a:ea typeface="微软雅黑" pitchFamily="34" charset="0"/>
-              <a:cs typeface="微软雅黑" pitchFamily="34" charset="0"/>
-            </a:endParaRPr>
-          </a:p>
-          <a:p>
-            <a:pPr marL="285750" indent="-285750" algn="l">
-              <a:lnSpc>
-                <a:spcPct val="150000"/>
-              </a:lnSpc>
-              <a:buClrTx/>
-              <a:buSzTx/>
-              <a:buFont typeface="Arial" panose="020B0604020202090204" pitchFamily="34" charset="0"/>
-              <a:buChar char="•"/>
-            </a:pPr>
-            <a:r>
-              <a:rPr lang="zh-CN" altLang="en-US">
-                <a:latin typeface="微软雅黑" pitchFamily="34" charset="0"/>
-                <a:ea typeface="微软雅黑" pitchFamily="34" charset="0"/>
-                <a:cs typeface="微软雅黑" pitchFamily="34" charset="0"/>
-                <a:sym typeface="+mn-ea"/>
-              </a:rPr>
-              <a:t>基本背景信息</a:t>
-            </a:r>
-            <a:r>
-              <a:rPr lang="en-US" altLang="zh-CN">
-                <a:latin typeface="微软雅黑" pitchFamily="34" charset="0"/>
-                <a:ea typeface="微软雅黑" pitchFamily="34" charset="0"/>
-                <a:cs typeface="微软雅黑" pitchFamily="34" charset="0"/>
-                <a:sym typeface="+mn-ea"/>
-              </a:rPr>
-              <a:t>（</a:t>
-            </a:r>
-            <a:r>
-              <a:rPr lang="zh-CN" altLang="en-US">
-                <a:latin typeface="微软雅黑" pitchFamily="34" charset="0"/>
-                <a:ea typeface="微软雅黑" pitchFamily="34" charset="0"/>
-                <a:cs typeface="微软雅黑" pitchFamily="34" charset="0"/>
-                <a:sym typeface="+mn-ea"/>
-              </a:rPr>
-              <a:t>学校</a:t>
-            </a:r>
-            <a:r>
-              <a:rPr lang="en-US" altLang="zh-CN">
-                <a:latin typeface="微软雅黑" pitchFamily="34" charset="0"/>
-                <a:ea typeface="微软雅黑" pitchFamily="34" charset="0"/>
-                <a:cs typeface="微软雅黑" pitchFamily="34" charset="0"/>
-                <a:sym typeface="+mn-ea"/>
-              </a:rPr>
-              <a:t>/</a:t>
-            </a:r>
-            <a:r>
-              <a:rPr lang="zh-CN" altLang="en-US">
-                <a:latin typeface="微软雅黑" pitchFamily="34" charset="0"/>
-                <a:ea typeface="微软雅黑" pitchFamily="34" charset="0"/>
-                <a:cs typeface="微软雅黑" pitchFamily="34" charset="0"/>
-                <a:sym typeface="+mn-ea"/>
-              </a:rPr>
-              <a:t>公司</a:t>
-            </a:r>
-            <a:r>
-              <a:rPr lang="en-US" altLang="zh-CN">
-                <a:latin typeface="微软雅黑" pitchFamily="34" charset="0"/>
-                <a:ea typeface="微软雅黑" pitchFamily="34" charset="0"/>
-                <a:cs typeface="微软雅黑" pitchFamily="34" charset="0"/>
-                <a:sym typeface="+mn-ea"/>
-              </a:rPr>
-              <a:t>、</a:t>
-            </a:r>
-            <a:r>
-              <a:rPr lang="zh-CN" altLang="en-US">
-                <a:latin typeface="微软雅黑" pitchFamily="34" charset="0"/>
-                <a:ea typeface="微软雅黑" pitchFamily="34" charset="0"/>
-                <a:cs typeface="微软雅黑" pitchFamily="34" charset="0"/>
-                <a:sym typeface="+mn-ea"/>
-              </a:rPr>
-              <a:t>岗位</a:t>
-            </a:r>
-            <a:r>
-              <a:rPr lang="en-US" altLang="zh-CN">
-                <a:latin typeface="微软雅黑" pitchFamily="34" charset="0"/>
-                <a:ea typeface="微软雅黑" pitchFamily="34" charset="0"/>
-                <a:cs typeface="微软雅黑" pitchFamily="34" charset="0"/>
-                <a:sym typeface="+mn-ea"/>
-              </a:rPr>
-              <a:t>/</a:t>
-            </a:r>
-            <a:r>
-              <a:rPr lang="zh-CN" altLang="en-US">
-                <a:latin typeface="微软雅黑" pitchFamily="34" charset="0"/>
-                <a:ea typeface="微软雅黑" pitchFamily="34" charset="0"/>
-                <a:cs typeface="微软雅黑" pitchFamily="34" charset="0"/>
-                <a:sym typeface="+mn-ea"/>
-              </a:rPr>
-              <a:t>专业</a:t>
-            </a:r>
-            <a:r>
-              <a:rPr lang="en-US" altLang="zh-CN">
-                <a:latin typeface="微软雅黑" pitchFamily="34" charset="0"/>
-                <a:ea typeface="微软雅黑" pitchFamily="34" charset="0"/>
-                <a:cs typeface="微软雅黑" pitchFamily="34" charset="0"/>
-                <a:sym typeface="+mn-ea"/>
-              </a:rPr>
-              <a:t>）</a:t>
-            </a:r>
-            <a:endParaRPr lang="zh-CN" altLang="en-US">
-              <a:latin typeface="微软雅黑" pitchFamily="34" charset="0"/>
-              <a:ea typeface="微软雅黑" pitchFamily="34" charset="0"/>
-              <a:cs typeface="微软雅黑" pitchFamily="34" charset="0"/>
-              <a:sym typeface="+mn-ea"/>
-            </a:endParaRPr>
+            <a:r>
+              <a:t>成员：Asher（郑州大学·软件开发/AI Agent 方向）</a:t>
+            </a:r>
+          </a:p>
+          <a:p>
+            <a:r>
+              <a:t>团队分工：Asher — 主控/架构 · Agent/Skill 工程 · Demo/验证（个人参赛，一人承担全流程）</a:t>
+            </a:r>
+          </a:p>
+          <a:p>
+            <a:r>
+              <a:t>团队成果：NeoTrix 开源项目（4240 项测试、RQGM 论文 arXiv:2606.26294）；软件研发全流程多 Agent 协同系统</a:t>
+            </a:r>
+          </a:p>
+          <a:p>
+            <a:r>
+              <a:t>作品链接：github.com/neo-trixs/NeoTrix</a:t>
+            </a:r>
           </a:p>
         </p:txBody>
       </p:sp>
@@ -8083,140 +10634,1315 @@
       </p:sp>
       <p:sp>
         <p:nvSpPr>
-          <p:cNvPr id="5" name="文本框 4"/>
-          <p:cNvSpPr txBox="1"/>
-          <p:nvPr/>
-        </p:nvSpPr>
-        <p:spPr>
-          <a:xfrm>
-            <a:off x="244475" y="1189355"/>
-            <a:ext cx="8013065" cy="645160"/>
+          <p:cNvPr id="5" name="Rounded Rectangle 4"/>
+          <p:cNvSpPr/>
+          <p:nvPr/>
+        </p:nvSpPr>
+        <p:spPr>
+          <a:xfrm>
+            <a:off x="502920" y="1234440"/>
+            <a:ext cx="11155680" cy="384048"/>
+          </a:xfrm>
+          <a:prstGeom prst="roundRect">
+            <a:avLst>
+              <a:gd name="adj" fmla="val 10000"/>
+            </a:avLst>
+          </a:prstGeom>
+          <a:solidFill>
+            <a:srgbClr val="1B1F3B"/>
+          </a:solidFill>
+          <a:ln>
+            <a:noFill/>
+          </a:ln>
+          <a:effectLst/>
+        </p:spPr>
+        <p:style>
+          <a:lnRef idx="1">
+            <a:schemeClr val="accent1"/>
+          </a:lnRef>
+          <a:fillRef idx="3">
+            <a:schemeClr val="accent1"/>
+          </a:fillRef>
+          <a:effectRef idx="2">
+            <a:schemeClr val="accent1"/>
+          </a:effectRef>
+          <a:fontRef idx="minor">
+            <a:schemeClr val="lt1"/>
+          </a:fontRef>
+        </p:style>
+        <p:txBody>
+          <a:bodyPr rtlCol="0" anchor="ctr" wrap="square" lIns="54864" rIns="54864" tIns="18288" bIns="18288"/>
+          <a:lstStyle/>
+          <a:p>
+            <a:pPr algn="ctr">
+              <a:lnSpc>
+                <a:spcPct val="102000"/>
+              </a:lnSpc>
+            </a:pPr>
+            <a:r>
+              <a:rPr sz="1150" b="1" spc="23">
+                <a:solidFill>
+                  <a:srgbClr val="1B1F3B"/>
+                </a:solidFill>
+                <a:latin typeface="微软雅黑"/>
+                <a:ea typeface="微软雅黑"/>
+              </a:rPr>
+              <a:t>目标用户：企业研发团队 / 开源维护者    ·   真实场景：GitHub Issue → 聚合 → 定位 → 修复 → 审查 → 沉淀</a:t>
+            </a:r>
+          </a:p>
+        </p:txBody>
+      </p:sp>
+      <p:sp>
+        <p:nvSpPr>
+          <p:cNvPr id="6" name="Rounded Rectangle 5"/>
+          <p:cNvSpPr/>
+          <p:nvPr/>
+        </p:nvSpPr>
+        <p:spPr>
+          <a:xfrm>
+            <a:off x="502920" y="1755648"/>
+            <a:ext cx="3566160" cy="384048"/>
+          </a:xfrm>
+          <a:prstGeom prst="roundRect">
+            <a:avLst>
+              <a:gd name="adj" fmla="val 10000"/>
+            </a:avLst>
+          </a:prstGeom>
+          <a:solidFill>
+            <a:srgbClr val="EF4444"/>
+          </a:solidFill>
+          <a:ln>
+            <a:noFill/>
+          </a:ln>
+          <a:effectLst/>
+        </p:spPr>
+        <p:style>
+          <a:lnRef idx="1">
+            <a:schemeClr val="accent1"/>
+          </a:lnRef>
+          <a:fillRef idx="3">
+            <a:schemeClr val="accent1"/>
+          </a:fillRef>
+          <a:effectRef idx="2">
+            <a:schemeClr val="accent1"/>
+          </a:effectRef>
+          <a:fontRef idx="minor">
+            <a:schemeClr val="lt1"/>
+          </a:fontRef>
+        </p:style>
+        <p:txBody>
+          <a:bodyPr rtlCol="0" anchor="ctr" wrap="square" lIns="54864" rIns="54864" tIns="18288" bIns="18288"/>
+          <a:lstStyle/>
+          <a:p>
+            <a:pPr algn="ctr">
+              <a:lnSpc>
+                <a:spcPct val="102000"/>
+              </a:lnSpc>
+            </a:pPr>
+            <a:r>
+              <a:rPr sz="1200" b="1" spc="144">
+                <a:solidFill>
+                  <a:srgbClr val="2E5BFF"/>
+                </a:solidFill>
+                <a:latin typeface="微软雅黑"/>
+                <a:ea typeface="微软雅黑"/>
+              </a:rPr>
+              <a:t>现状痛点</a:t>
+            </a:r>
+          </a:p>
+        </p:txBody>
+      </p:sp>
+      <p:sp>
+        <p:nvSpPr>
+          <p:cNvPr id="7" name="Rounded Rectangle 6"/>
+          <p:cNvSpPr/>
+          <p:nvPr/>
+        </p:nvSpPr>
+        <p:spPr>
+          <a:xfrm>
+            <a:off x="502920" y="2231136"/>
+            <a:ext cx="3566160" cy="914400"/>
+          </a:xfrm>
+          <a:prstGeom prst="roundRect">
+            <a:avLst>
+              <a:gd name="adj" fmla="val 10000"/>
+            </a:avLst>
+          </a:prstGeom>
+          <a:solidFill>
+            <a:srgbClr val="F1F5F9"/>
+          </a:solidFill>
+          <a:ln>
+            <a:noFill/>
+          </a:ln>
+          <a:effectLst/>
+        </p:spPr>
+        <p:style>
+          <a:lnRef idx="1">
+            <a:schemeClr val="accent1"/>
+          </a:lnRef>
+          <a:fillRef idx="3">
+            <a:schemeClr val="accent1"/>
+          </a:fillRef>
+          <a:effectRef idx="2">
+            <a:schemeClr val="accent1"/>
+          </a:effectRef>
+          <a:fontRef idx="minor">
+            <a:schemeClr val="lt1"/>
+          </a:fontRef>
+        </p:style>
+        <p:txBody>
+          <a:bodyPr rtlCol="0" anchor="ctr" wrap="square" lIns="54864" rIns="54864" tIns="18288" bIns="18288"/>
+          <a:lstStyle/>
+          <a:p>
+            <a:pPr algn="l">
+              <a:lnSpc>
+                <a:spcPct val="118000"/>
+              </a:lnSpc>
+            </a:pPr>
+            <a:r>
+              <a:rPr sz="1050" b="1">
+                <a:solidFill>
+                  <a:srgbClr val="0F172A"/>
+                </a:solidFill>
+                <a:latin typeface="微软雅黑"/>
+                <a:ea typeface="微软雅黑"/>
+              </a:rPr>
+              <a:t>① 缺陷多源分散</a:t>
+            </a:r>
+          </a:p>
+          <a:p>
+            <a:pPr algn="l">
+              <a:lnSpc>
+                <a:spcPct val="102000"/>
+              </a:lnSpc>
+            </a:pPr>
+            <a:r>
+              <a:rPr sz="900" b="0">
+                <a:solidFill>
+                  <a:srgbClr val="64748B"/>
+                </a:solidFill>
+                <a:latin typeface="微软雅黑"/>
+                <a:ea typeface="微软雅黑"/>
+              </a:rPr>
+              <a:t>Issue/日志/反馈/CI 分散，无统一证据集</a:t>
+            </a:r>
+          </a:p>
+        </p:txBody>
+      </p:sp>
+      <p:sp>
+        <p:nvSpPr>
+          <p:cNvPr id="8" name="Rectangle 7"/>
+          <p:cNvSpPr/>
+          <p:nvPr/>
+        </p:nvSpPr>
+        <p:spPr>
+          <a:xfrm>
+            <a:off x="502920" y="2231136"/>
+            <a:ext cx="64008" cy="914400"/>
           </a:xfrm>
           <a:prstGeom prst="rect">
             <a:avLst/>
           </a:prstGeom>
-          <a:noFill/>
-        </p:spPr>
-        <p:txBody>
-          <a:bodyPr wrap="square" rtlCol="0">
-            <a:spAutoFit/>
-          </a:bodyPr>
-          <a:p>
-            <a:r>
-              <a:rPr lang="zh-CN" altLang="en-US">
-                <a:latin typeface="微软雅黑" pitchFamily="34" charset="0"/>
-                <a:ea typeface="微软雅黑" pitchFamily="34" charset="0"/>
-              </a:rPr>
-              <a:t>目标用户：企业研发团队 / 开源维护者。核心痛点：缺陷定位靠人工经验、修复质量无法量化验证、复盘经验散落。</a:t>
-            </a:r>
-            <a:endParaRPr lang="zh-CN" altLang="en-US">
-              <a:latin typeface="微软雅黑" pitchFamily="34" charset="0"/>
-              <a:ea typeface="微软雅黑" pitchFamily="34" charset="0"/>
-            </a:endParaRPr>
-          </a:p>
-          <a:p>
-            <a:r>
-              <a:t>真实场景：GitHub Issue → 聚合 → E8 根因定位 → TDD 修复 → 独立审查 → 复盘沉淀。</a:t>
-            </a:r>
-          </a:p>
-          <a:p>
-            <a:r>
-              <a:t>价值收益：定位耗时对标人工 30-60min 降至 5-10min、修复成功率、门禁通过率、知识沉淀条数。</a:t>
-            </a:r>
-          </a:p>
-          <a:p>
-            <a:r>
-              <a:t>行业可复制性：任何有 Issue+CI+代码仓库的组织可复制；可迁移 IT 服务/嵌入式/金融科技研发线。</a:t>
-            </a:r>
-          </a:p>
-        </p:txBody>
-      </p:sp>
-      <p:pic>
-        <p:nvPicPr>
-          <p:cNvPr id="6" name="图片 5"/>
-          <p:cNvPicPr>
-            <a:picLocks noChangeAspect="1"/>
-          </p:cNvPicPr>
-          <p:nvPr/>
-        </p:nvPicPr>
-        <p:blipFill>
-          <a:blip r:embed="rId1"/>
-          <a:stretch>
-            <a:fillRect/>
-          </a:stretch>
-        </p:blipFill>
-        <p:spPr>
-          <a:xfrm>
-            <a:off x="340360" y="2390775"/>
-            <a:ext cx="5560060" cy="3127375"/>
+          <a:solidFill>
+            <a:srgbClr val="EF4444"/>
+          </a:solidFill>
+          <a:ln>
+            <a:noFill/>
+          </a:ln>
+          <a:effectLst/>
+        </p:spPr>
+        <p:style>
+          <a:lnRef idx="1">
+            <a:schemeClr val="accent1"/>
+          </a:lnRef>
+          <a:fillRef idx="3">
+            <a:schemeClr val="accent1"/>
+          </a:fillRef>
+          <a:effectRef idx="2">
+            <a:schemeClr val="accent1"/>
+          </a:effectRef>
+          <a:fontRef idx="minor">
+            <a:schemeClr val="lt1"/>
+          </a:fontRef>
+        </p:style>
+        <p:txBody>
+          <a:bodyPr rtlCol="0" anchor="ctr"/>
+          <a:lstStyle/>
+          <a:p>
+            <a:pPr algn="ctr"/>
+          </a:p>
+        </p:txBody>
+      </p:sp>
+      <p:sp>
+        <p:nvSpPr>
+          <p:cNvPr id="9" name="Rounded Rectangle 8"/>
+          <p:cNvSpPr/>
+          <p:nvPr/>
+        </p:nvSpPr>
+        <p:spPr>
+          <a:xfrm>
+            <a:off x="502920" y="3264408"/>
+            <a:ext cx="3566160" cy="914400"/>
+          </a:xfrm>
+          <a:prstGeom prst="roundRect">
+            <a:avLst>
+              <a:gd name="adj" fmla="val 10000"/>
+            </a:avLst>
+          </a:prstGeom>
+          <a:solidFill>
+            <a:srgbClr val="F1F5F9"/>
+          </a:solidFill>
+          <a:ln>
+            <a:noFill/>
+          </a:ln>
+          <a:effectLst/>
+        </p:spPr>
+        <p:style>
+          <a:lnRef idx="1">
+            <a:schemeClr val="accent1"/>
+          </a:lnRef>
+          <a:fillRef idx="3">
+            <a:schemeClr val="accent1"/>
+          </a:fillRef>
+          <a:effectRef idx="2">
+            <a:schemeClr val="accent1"/>
+          </a:effectRef>
+          <a:fontRef idx="minor">
+            <a:schemeClr val="lt1"/>
+          </a:fontRef>
+        </p:style>
+        <p:txBody>
+          <a:bodyPr rtlCol="0" anchor="ctr" wrap="square" lIns="54864" rIns="54864" tIns="18288" bIns="18288"/>
+          <a:lstStyle/>
+          <a:p>
+            <a:pPr algn="l">
+              <a:lnSpc>
+                <a:spcPct val="118000"/>
+              </a:lnSpc>
+            </a:pPr>
+            <a:r>
+              <a:rPr sz="1050" b="1">
+                <a:solidFill>
+                  <a:srgbClr val="0F172A"/>
+                </a:solidFill>
+                <a:latin typeface="微软雅黑"/>
+                <a:ea typeface="微软雅黑"/>
+              </a:rPr>
+              <a:t>② 根因依赖人工</a:t>
+            </a:r>
+          </a:p>
+          <a:p>
+            <a:pPr algn="l">
+              <a:lnSpc>
+                <a:spcPct val="102000"/>
+              </a:lnSpc>
+            </a:pPr>
+            <a:r>
+              <a:rPr sz="900" b="0">
+                <a:solidFill>
+                  <a:srgbClr val="64748B"/>
+                </a:solidFill>
+                <a:latin typeface="微软雅黑"/>
+                <a:ea typeface="微软雅黑"/>
+              </a:rPr>
+              <a:t>资深工程师经验，不可复现</a:t>
+            </a:r>
+          </a:p>
+        </p:txBody>
+      </p:sp>
+      <p:sp>
+        <p:nvSpPr>
+          <p:cNvPr id="10" name="Rectangle 9"/>
+          <p:cNvSpPr/>
+          <p:nvPr/>
+        </p:nvSpPr>
+        <p:spPr>
+          <a:xfrm>
+            <a:off x="502920" y="3264408"/>
+            <a:ext cx="64008" cy="914400"/>
           </a:xfrm>
           <a:prstGeom prst="rect">
             <a:avLst/>
           </a:prstGeom>
-        </p:spPr>
-      </p:pic>
-      <p:sp>
-        <p:nvSpPr>
-          <p:cNvPr id="7" name="文本框 6"/>
-          <p:cNvSpPr txBox="1"/>
-          <p:nvPr/>
-        </p:nvSpPr>
-        <p:spPr>
-          <a:xfrm>
-            <a:off x="3968115" y="5574030"/>
-            <a:ext cx="4064000" cy="368300"/>
+          <a:solidFill>
+            <a:srgbClr val="EF4444"/>
+          </a:solidFill>
+          <a:ln>
+            <a:noFill/>
+          </a:ln>
+          <a:effectLst/>
+        </p:spPr>
+        <p:style>
+          <a:lnRef idx="1">
+            <a:schemeClr val="accent1"/>
+          </a:lnRef>
+          <a:fillRef idx="3">
+            <a:schemeClr val="accent1"/>
+          </a:fillRef>
+          <a:effectRef idx="2">
+            <a:schemeClr val="accent1"/>
+          </a:effectRef>
+          <a:fontRef idx="minor">
+            <a:schemeClr val="lt1"/>
+          </a:fontRef>
+        </p:style>
+        <p:txBody>
+          <a:bodyPr rtlCol="0" anchor="ctr"/>
+          <a:lstStyle/>
+          <a:p>
+            <a:pPr algn="ctr"/>
+          </a:p>
+        </p:txBody>
+      </p:sp>
+      <p:sp>
+        <p:nvSpPr>
+          <p:cNvPr id="11" name="Rounded Rectangle 10"/>
+          <p:cNvSpPr/>
+          <p:nvPr/>
+        </p:nvSpPr>
+        <p:spPr>
+          <a:xfrm>
+            <a:off x="502920" y="4297679"/>
+            <a:ext cx="3566160" cy="914400"/>
+          </a:xfrm>
+          <a:prstGeom prst="roundRect">
+            <a:avLst>
+              <a:gd name="adj" fmla="val 10000"/>
+            </a:avLst>
+          </a:prstGeom>
+          <a:solidFill>
+            <a:srgbClr val="F1F5F9"/>
+          </a:solidFill>
+          <a:ln>
+            <a:noFill/>
+          </a:ln>
+          <a:effectLst/>
+        </p:spPr>
+        <p:style>
+          <a:lnRef idx="1">
+            <a:schemeClr val="accent1"/>
+          </a:lnRef>
+          <a:fillRef idx="3">
+            <a:schemeClr val="accent1"/>
+          </a:fillRef>
+          <a:effectRef idx="2">
+            <a:schemeClr val="accent1"/>
+          </a:effectRef>
+          <a:fontRef idx="minor">
+            <a:schemeClr val="lt1"/>
+          </a:fontRef>
+        </p:style>
+        <p:txBody>
+          <a:bodyPr rtlCol="0" anchor="ctr" wrap="square" lIns="54864" rIns="54864" tIns="18288" bIns="18288"/>
+          <a:lstStyle/>
+          <a:p>
+            <a:pPr algn="l">
+              <a:lnSpc>
+                <a:spcPct val="118000"/>
+              </a:lnSpc>
+            </a:pPr>
+            <a:r>
+              <a:rPr sz="1050" b="1">
+                <a:solidFill>
+                  <a:srgbClr val="0F172A"/>
+                </a:solidFill>
+                <a:latin typeface="微软雅黑"/>
+                <a:ea typeface="微软雅黑"/>
+              </a:rPr>
+              <a:t>③ 质量无法量化</a:t>
+            </a:r>
+          </a:p>
+          <a:p>
+            <a:pPr algn="l">
+              <a:lnSpc>
+                <a:spcPct val="102000"/>
+              </a:lnSpc>
+            </a:pPr>
+            <a:r>
+              <a:rPr sz="900" b="0">
+                <a:solidFill>
+                  <a:srgbClr val="64748B"/>
+                </a:solidFill>
+                <a:latin typeface="微软雅黑"/>
+                <a:ea typeface="微软雅黑"/>
+              </a:rPr>
+              <a:t>修复无门禁，复盘不沉淀</a:t>
+            </a:r>
+          </a:p>
+        </p:txBody>
+      </p:sp>
+      <p:sp>
+        <p:nvSpPr>
+          <p:cNvPr id="12" name="Rectangle 11"/>
+          <p:cNvSpPr/>
+          <p:nvPr/>
+        </p:nvSpPr>
+        <p:spPr>
+          <a:xfrm>
+            <a:off x="502920" y="4297679"/>
+            <a:ext cx="64008" cy="914400"/>
           </a:xfrm>
           <a:prstGeom prst="rect">
             <a:avLst/>
           </a:prstGeom>
-          <a:noFill/>
-        </p:spPr>
-        <p:txBody>
-          <a:bodyPr wrap="square" rtlCol="0">
-            <a:spAutoFit/>
-          </a:bodyPr>
+          <a:solidFill>
+            <a:srgbClr val="EF4444"/>
+          </a:solidFill>
+          <a:ln>
+            <a:noFill/>
+          </a:ln>
+          <a:effectLst/>
+        </p:spPr>
+        <p:style>
+          <a:lnRef idx="1">
+            <a:schemeClr val="accent1"/>
+          </a:lnRef>
+          <a:fillRef idx="3">
+            <a:schemeClr val="accent1"/>
+          </a:fillRef>
+          <a:effectRef idx="2">
+            <a:schemeClr val="accent1"/>
+          </a:effectRef>
+          <a:fontRef idx="minor">
+            <a:schemeClr val="lt1"/>
+          </a:fontRef>
+        </p:style>
+        <p:txBody>
+          <a:bodyPr rtlCol="0" anchor="ctr"/>
+          <a:lstStyle/>
           <a:p>
             <a:pPr algn="ctr"/>
-            <a:r>
-              <a:rPr lang="en-US" altLang="zh-CN"/>
-              <a:t>差异化对照 OpenHands/SWE-agent：确定性推理可复现 + T1-T3 生产门禁 + experience-tree 自进化沉淀。</a:t>
-            </a:r>
-            <a:r>
-              <a:rPr lang="zh-CN" altLang="en-US"/>
-              <a:t/>
-            </a:r>
-            <a:r>
-              <a:rPr lang="en-US" altLang="zh-CN"/>
-              <a:t/>
-            </a:r>
-            <a:endParaRPr lang="en-US" altLang="zh-CN"/>
-          </a:p>
-        </p:txBody>
-      </p:sp>
-      <p:pic>
-        <p:nvPicPr>
-          <p:cNvPr id="8" name="图片 7"/>
-          <p:cNvPicPr>
-            <a:picLocks noChangeAspect="1"/>
-          </p:cNvPicPr>
-          <p:nvPr/>
-        </p:nvPicPr>
-        <p:blipFill>
-          <a:blip r:embed="rId2"/>
-          <a:stretch>
-            <a:fillRect/>
-          </a:stretch>
-        </p:blipFill>
-        <p:spPr>
-          <a:xfrm>
-            <a:off x="6072505" y="2390775"/>
-            <a:ext cx="5485765" cy="3101340"/>
+          </a:p>
+        </p:txBody>
+      </p:sp>
+      <p:sp>
+        <p:nvSpPr>
+          <p:cNvPr id="13" name="Right Arrow 12"/>
+          <p:cNvSpPr/>
+          <p:nvPr/>
+        </p:nvSpPr>
+        <p:spPr>
+          <a:xfrm>
+            <a:off x="4206240" y="2651760"/>
+            <a:ext cx="640080" cy="457200"/>
+          </a:xfrm>
+          <a:prstGeom prst="rightArrow">
+            <a:avLst>
+              <a:gd name="adj1" fmla="val 10000"/>
+              <a:gd name="adj2" fmla="val 50000"/>
+            </a:avLst>
+          </a:prstGeom>
+          <a:solidFill>
+            <a:srgbClr val="2E5BFF"/>
+          </a:solidFill>
+          <a:ln>
+            <a:noFill/>
+          </a:ln>
+          <a:effectLst/>
+        </p:spPr>
+        <p:style>
+          <a:lnRef idx="1">
+            <a:schemeClr val="accent1"/>
+          </a:lnRef>
+          <a:fillRef idx="3">
+            <a:schemeClr val="accent1"/>
+          </a:fillRef>
+          <a:effectRef idx="2">
+            <a:schemeClr val="accent1"/>
+          </a:effectRef>
+          <a:fontRef idx="minor">
+            <a:schemeClr val="lt1"/>
+          </a:fontRef>
+        </p:style>
+        <p:txBody>
+          <a:bodyPr rtlCol="0" anchor="ctr"/>
+          <a:lstStyle/>
+          <a:p>
+            <a:pPr algn="ctr"/>
+          </a:p>
+        </p:txBody>
+      </p:sp>
+      <p:sp>
+        <p:nvSpPr>
+          <p:cNvPr id="14" name="Rounded Rectangle 13"/>
+          <p:cNvSpPr/>
+          <p:nvPr/>
+        </p:nvSpPr>
+        <p:spPr>
+          <a:xfrm>
+            <a:off x="4937760" y="1755648"/>
+            <a:ext cx="2377440" cy="384048"/>
+          </a:xfrm>
+          <a:prstGeom prst="roundRect">
+            <a:avLst>
+              <a:gd name="adj" fmla="val 10000"/>
+            </a:avLst>
+          </a:prstGeom>
+          <a:solidFill>
+            <a:srgbClr val="2E5BFF"/>
+          </a:solidFill>
+          <a:ln>
+            <a:noFill/>
+          </a:ln>
+          <a:effectLst/>
+        </p:spPr>
+        <p:style>
+          <a:lnRef idx="1">
+            <a:schemeClr val="accent1"/>
+          </a:lnRef>
+          <a:fillRef idx="3">
+            <a:schemeClr val="accent1"/>
+          </a:fillRef>
+          <a:effectRef idx="2">
+            <a:schemeClr val="accent1"/>
+          </a:effectRef>
+          <a:fontRef idx="minor">
+            <a:schemeClr val="lt1"/>
+          </a:fontRef>
+        </p:style>
+        <p:txBody>
+          <a:bodyPr rtlCol="0" anchor="ctr" wrap="square" lIns="54864" rIns="54864" tIns="18288" bIns="18288"/>
+          <a:lstStyle/>
+          <a:p>
+            <a:pPr algn="ctr">
+              <a:lnSpc>
+                <a:spcPct val="102000"/>
+              </a:lnSpc>
+            </a:pPr>
+            <a:r>
+              <a:rPr sz="1200" b="1" spc="144">
+                <a:solidFill>
+                  <a:srgbClr val="2E5BFF"/>
+                </a:solidFill>
+                <a:latin typeface="微软雅黑"/>
+                <a:ea typeface="微软雅黑"/>
+              </a:rPr>
+              <a:t>NeoTrix 方案</a:t>
+            </a:r>
+          </a:p>
+        </p:txBody>
+      </p:sp>
+      <p:sp>
+        <p:nvSpPr>
+          <p:cNvPr id="15" name="Rounded Rectangle 14"/>
+          <p:cNvSpPr/>
+          <p:nvPr/>
+        </p:nvSpPr>
+        <p:spPr>
+          <a:xfrm>
+            <a:off x="4937760" y="2231136"/>
+            <a:ext cx="2377440" cy="2185416"/>
+          </a:xfrm>
+          <a:prstGeom prst="roundRect">
+            <a:avLst>
+              <a:gd name="adj" fmla="val 10000"/>
+            </a:avLst>
+          </a:prstGeom>
+          <a:solidFill>
+            <a:srgbClr val="1B1F3B"/>
+          </a:solidFill>
+          <a:ln w="12700">
+            <a:solidFill>
+              <a:srgbClr val="2E5BFF"/>
+            </a:solidFill>
+          </a:ln>
+          <a:effectLst/>
+        </p:spPr>
+        <p:style>
+          <a:lnRef idx="1">
+            <a:schemeClr val="accent1"/>
+          </a:lnRef>
+          <a:fillRef idx="3">
+            <a:schemeClr val="accent1"/>
+          </a:fillRef>
+          <a:effectRef idx="2">
+            <a:schemeClr val="accent1"/>
+          </a:effectRef>
+          <a:fontRef idx="minor">
+            <a:schemeClr val="lt1"/>
+          </a:fontRef>
+        </p:style>
+        <p:txBody>
+          <a:bodyPr rtlCol="0" anchor="ctr" wrap="square" lIns="54864" rIns="54864" tIns="18288" bIns="18288"/>
+          <a:lstStyle/>
+          <a:p>
+            <a:pPr algn="ctr">
+              <a:lnSpc>
+                <a:spcPct val="102000"/>
+              </a:lnSpc>
+            </a:pPr>
+            <a:r>
+              <a:rPr sz="1150" b="1">
+                <a:solidFill>
+                  <a:srgbClr val="FFFFFF"/>
+                </a:solidFill>
+                <a:latin typeface="微软雅黑"/>
+                <a:ea typeface="微软雅黑"/>
+              </a:rPr>
+              <a:t>AgentTeams</a:t>
+            </a:r>
+          </a:p>
+          <a:p>
+            <a:pPr algn="ctr">
+              <a:lnSpc>
+                <a:spcPct val="118000"/>
+              </a:lnSpc>
+            </a:pPr>
+            <a:r>
+              <a:rPr sz="1050" b="0">
+                <a:solidFill>
+                  <a:srgbClr val="FFFFFF"/>
+                </a:solidFill>
+                <a:latin typeface="微软雅黑"/>
+                <a:ea typeface="微软雅黑"/>
+              </a:rPr>
+              <a:t>Manager + A1-A5</a:t>
+            </a:r>
+          </a:p>
+          <a:p>
+            <a:pPr algn="ctr">
+              <a:lnSpc>
+                <a:spcPct val="118000"/>
+              </a:lnSpc>
+            </a:pPr>
+            <a:r>
+              <a:rPr sz="1050" b="0">
+                <a:solidFill>
+                  <a:srgbClr val="FFFFFF"/>
+                </a:solidFill>
+                <a:latin typeface="微软雅黑"/>
+                <a:ea typeface="微软雅黑"/>
+              </a:rPr>
+              <a:t>5 职能 Agent</a:t>
+            </a:r>
+          </a:p>
+          <a:p>
+            <a:pPr algn="ctr">
+              <a:lnSpc>
+                <a:spcPct val="118000"/>
+              </a:lnSpc>
+            </a:pPr>
+            <a:r>
+              <a:rPr sz="1050" b="0">
+                <a:solidFill>
+                  <a:srgbClr val="FFFFFF"/>
+                </a:solidFill>
+                <a:latin typeface="微软雅黑"/>
+                <a:ea typeface="微软雅黑"/>
+              </a:rPr>
+              <a:t>确定性推理</a:t>
+            </a:r>
+          </a:p>
+          <a:p>
+            <a:pPr algn="ctr">
+              <a:lnSpc>
+                <a:spcPct val="118000"/>
+              </a:lnSpc>
+            </a:pPr>
+            <a:r>
+              <a:rPr sz="1050" b="1">
+                <a:solidFill>
+                  <a:srgbClr val="F5B301"/>
+                </a:solidFill>
+                <a:latin typeface="微软雅黑"/>
+                <a:ea typeface="微软雅黑"/>
+              </a:rPr>
+              <a:t>自进化沉淀</a:t>
+            </a:r>
+          </a:p>
+        </p:txBody>
+      </p:sp>
+      <p:sp>
+        <p:nvSpPr>
+          <p:cNvPr id="16" name="Rectangle 15"/>
+          <p:cNvSpPr/>
+          <p:nvPr/>
+        </p:nvSpPr>
+        <p:spPr>
+          <a:xfrm>
+            <a:off x="4937760" y="2231136"/>
+            <a:ext cx="2377440" cy="64008"/>
           </a:xfrm>
           <a:prstGeom prst="rect">
             <a:avLst/>
           </a:prstGeom>
-        </p:spPr>
-      </p:pic>
+          <a:solidFill>
+            <a:srgbClr val="F5B301"/>
+          </a:solidFill>
+          <a:ln>
+            <a:noFill/>
+          </a:ln>
+          <a:effectLst/>
+        </p:spPr>
+        <p:style>
+          <a:lnRef idx="1">
+            <a:schemeClr val="accent1"/>
+          </a:lnRef>
+          <a:fillRef idx="3">
+            <a:schemeClr val="accent1"/>
+          </a:fillRef>
+          <a:effectRef idx="2">
+            <a:schemeClr val="accent1"/>
+          </a:effectRef>
+          <a:fontRef idx="minor">
+            <a:schemeClr val="lt1"/>
+          </a:fontRef>
+        </p:style>
+        <p:txBody>
+          <a:bodyPr rtlCol="0" anchor="ctr"/>
+          <a:lstStyle/>
+          <a:p>
+            <a:pPr algn="ctr"/>
+          </a:p>
+        </p:txBody>
+      </p:sp>
+      <p:sp>
+        <p:nvSpPr>
+          <p:cNvPr id="17" name="Right Arrow 16"/>
+          <p:cNvSpPr/>
+          <p:nvPr/>
+        </p:nvSpPr>
+        <p:spPr>
+          <a:xfrm>
+            <a:off x="7452360" y="2651760"/>
+            <a:ext cx="640080" cy="457200"/>
+          </a:xfrm>
+          <a:prstGeom prst="rightArrow">
+            <a:avLst>
+              <a:gd name="adj1" fmla="val 10000"/>
+              <a:gd name="adj2" fmla="val 50000"/>
+            </a:avLst>
+          </a:prstGeom>
+          <a:solidFill>
+            <a:srgbClr val="10B981"/>
+          </a:solidFill>
+          <a:ln>
+            <a:noFill/>
+          </a:ln>
+          <a:effectLst/>
+        </p:spPr>
+        <p:style>
+          <a:lnRef idx="1">
+            <a:schemeClr val="accent1"/>
+          </a:lnRef>
+          <a:fillRef idx="3">
+            <a:schemeClr val="accent1"/>
+          </a:fillRef>
+          <a:effectRef idx="2">
+            <a:schemeClr val="accent1"/>
+          </a:effectRef>
+          <a:fontRef idx="minor">
+            <a:schemeClr val="lt1"/>
+          </a:fontRef>
+        </p:style>
+        <p:txBody>
+          <a:bodyPr rtlCol="0" anchor="ctr"/>
+          <a:lstStyle/>
+          <a:p>
+            <a:pPr algn="ctr"/>
+          </a:p>
+        </p:txBody>
+      </p:sp>
+      <p:sp>
+        <p:nvSpPr>
+          <p:cNvPr id="18" name="Rounded Rectangle 17"/>
+          <p:cNvSpPr/>
+          <p:nvPr/>
+        </p:nvSpPr>
+        <p:spPr>
+          <a:xfrm>
+            <a:off x="8183879" y="1755648"/>
+            <a:ext cx="3474720" cy="384048"/>
+          </a:xfrm>
+          <a:prstGeom prst="roundRect">
+            <a:avLst>
+              <a:gd name="adj" fmla="val 10000"/>
+            </a:avLst>
+          </a:prstGeom>
+          <a:solidFill>
+            <a:srgbClr val="10B981"/>
+          </a:solidFill>
+          <a:ln>
+            <a:noFill/>
+          </a:ln>
+          <a:effectLst/>
+        </p:spPr>
+        <p:style>
+          <a:lnRef idx="1">
+            <a:schemeClr val="accent1"/>
+          </a:lnRef>
+          <a:fillRef idx="3">
+            <a:schemeClr val="accent1"/>
+          </a:fillRef>
+          <a:effectRef idx="2">
+            <a:schemeClr val="accent1"/>
+          </a:effectRef>
+          <a:fontRef idx="minor">
+            <a:schemeClr val="lt1"/>
+          </a:fontRef>
+        </p:style>
+        <p:txBody>
+          <a:bodyPr rtlCol="0" anchor="ctr" wrap="square" lIns="54864" rIns="54864" tIns="18288" bIns="18288"/>
+          <a:lstStyle/>
+          <a:p>
+            <a:pPr algn="ctr">
+              <a:lnSpc>
+                <a:spcPct val="102000"/>
+              </a:lnSpc>
+            </a:pPr>
+            <a:r>
+              <a:rPr sz="1200" b="1" spc="144">
+                <a:solidFill>
+                  <a:srgbClr val="2E5BFF"/>
+                </a:solidFill>
+                <a:latin typeface="微软雅黑"/>
+                <a:ea typeface="微软雅黑"/>
+              </a:rPr>
+              <a:t>可量化价值</a:t>
+            </a:r>
+          </a:p>
+        </p:txBody>
+      </p:sp>
+      <p:sp>
+        <p:nvSpPr>
+          <p:cNvPr id="19" name="Rounded Rectangle 18"/>
+          <p:cNvSpPr/>
+          <p:nvPr/>
+        </p:nvSpPr>
+        <p:spPr>
+          <a:xfrm>
+            <a:off x="8183879" y="2231136"/>
+            <a:ext cx="3474720" cy="914400"/>
+          </a:xfrm>
+          <a:prstGeom prst="roundRect">
+            <a:avLst>
+              <a:gd name="adj" fmla="val 10000"/>
+            </a:avLst>
+          </a:prstGeom>
+          <a:solidFill>
+            <a:srgbClr val="F1F5F9"/>
+          </a:solidFill>
+          <a:ln>
+            <a:noFill/>
+          </a:ln>
+          <a:effectLst/>
+        </p:spPr>
+        <p:style>
+          <a:lnRef idx="1">
+            <a:schemeClr val="accent1"/>
+          </a:lnRef>
+          <a:fillRef idx="3">
+            <a:schemeClr val="accent1"/>
+          </a:fillRef>
+          <a:effectRef idx="2">
+            <a:schemeClr val="accent1"/>
+          </a:effectRef>
+          <a:fontRef idx="minor">
+            <a:schemeClr val="lt1"/>
+          </a:fontRef>
+        </p:style>
+        <p:txBody>
+          <a:bodyPr rtlCol="0" anchor="ctr" wrap="square" lIns="54864" rIns="54864" tIns="18288" bIns="18288"/>
+          <a:lstStyle/>
+          <a:p>
+            <a:pPr algn="l">
+              <a:lnSpc>
+                <a:spcPct val="118000"/>
+              </a:lnSpc>
+            </a:pPr>
+            <a:r>
+              <a:rPr sz="1050" b="1">
+                <a:solidFill>
+                  <a:srgbClr val="0F172A"/>
+                </a:solidFill>
+                <a:latin typeface="微软雅黑"/>
+                <a:ea typeface="微软雅黑"/>
+              </a:rPr>
+              <a:t>定位 30-60min → 5-10min</a:t>
+            </a:r>
+          </a:p>
+          <a:p>
+            <a:pPr algn="l">
+              <a:lnSpc>
+                <a:spcPct val="102000"/>
+              </a:lnSpc>
+            </a:pPr>
+            <a:r>
+              <a:rPr sz="900" b="0">
+                <a:solidFill>
+                  <a:srgbClr val="64748B"/>
+                </a:solidFill>
+                <a:latin typeface="微软雅黑"/>
+                <a:ea typeface="微软雅黑"/>
+              </a:rPr>
+              <a:t>效率提升指标</a:t>
+            </a:r>
+          </a:p>
+        </p:txBody>
+      </p:sp>
+      <p:sp>
+        <p:nvSpPr>
+          <p:cNvPr id="20" name="Rectangle 19"/>
+          <p:cNvSpPr/>
+          <p:nvPr/>
+        </p:nvSpPr>
+        <p:spPr>
+          <a:xfrm>
+            <a:off x="8183879" y="2231136"/>
+            <a:ext cx="64008" cy="914400"/>
+          </a:xfrm>
+          <a:prstGeom prst="rect">
+            <a:avLst/>
+          </a:prstGeom>
+          <a:solidFill>
+            <a:srgbClr val="10B981"/>
+          </a:solidFill>
+          <a:ln>
+            <a:noFill/>
+          </a:ln>
+          <a:effectLst/>
+        </p:spPr>
+        <p:style>
+          <a:lnRef idx="1">
+            <a:schemeClr val="accent1"/>
+          </a:lnRef>
+          <a:fillRef idx="3">
+            <a:schemeClr val="accent1"/>
+          </a:fillRef>
+          <a:effectRef idx="2">
+            <a:schemeClr val="accent1"/>
+          </a:effectRef>
+          <a:fontRef idx="minor">
+            <a:schemeClr val="lt1"/>
+          </a:fontRef>
+        </p:style>
+        <p:txBody>
+          <a:bodyPr rtlCol="0" anchor="ctr"/>
+          <a:lstStyle/>
+          <a:p>
+            <a:pPr algn="ctr"/>
+          </a:p>
+        </p:txBody>
+      </p:sp>
+      <p:sp>
+        <p:nvSpPr>
+          <p:cNvPr id="21" name="Rounded Rectangle 20"/>
+          <p:cNvSpPr/>
+          <p:nvPr/>
+        </p:nvSpPr>
+        <p:spPr>
+          <a:xfrm>
+            <a:off x="8183879" y="3264408"/>
+            <a:ext cx="3474720" cy="914400"/>
+          </a:xfrm>
+          <a:prstGeom prst="roundRect">
+            <a:avLst>
+              <a:gd name="adj" fmla="val 10000"/>
+            </a:avLst>
+          </a:prstGeom>
+          <a:solidFill>
+            <a:srgbClr val="F1F5F9"/>
+          </a:solidFill>
+          <a:ln>
+            <a:noFill/>
+          </a:ln>
+          <a:effectLst/>
+        </p:spPr>
+        <p:style>
+          <a:lnRef idx="1">
+            <a:schemeClr val="accent1"/>
+          </a:lnRef>
+          <a:fillRef idx="3">
+            <a:schemeClr val="accent1"/>
+          </a:fillRef>
+          <a:effectRef idx="2">
+            <a:schemeClr val="accent1"/>
+          </a:effectRef>
+          <a:fontRef idx="minor">
+            <a:schemeClr val="lt1"/>
+          </a:fontRef>
+        </p:style>
+        <p:txBody>
+          <a:bodyPr rtlCol="0" anchor="ctr" wrap="square" lIns="54864" rIns="54864" tIns="18288" bIns="18288"/>
+          <a:lstStyle/>
+          <a:p>
+            <a:pPr algn="l">
+              <a:lnSpc>
+                <a:spcPct val="118000"/>
+              </a:lnSpc>
+            </a:pPr>
+            <a:r>
+              <a:rPr sz="1050" b="1">
+                <a:solidFill>
+                  <a:srgbClr val="0F172A"/>
+                </a:solidFill>
+                <a:latin typeface="微软雅黑"/>
+                <a:ea typeface="微软雅黑"/>
+              </a:rPr>
+              <a:t>SelfTest T1-T3 门禁</a:t>
+            </a:r>
+          </a:p>
+          <a:p>
+            <a:pPr algn="l">
+              <a:lnSpc>
+                <a:spcPct val="102000"/>
+              </a:lnSpc>
+            </a:pPr>
+            <a:r>
+              <a:rPr sz="900" b="0">
+                <a:solidFill>
+                  <a:srgbClr val="64748B"/>
+                </a:solidFill>
+                <a:latin typeface="微软雅黑"/>
+                <a:ea typeface="微软雅黑"/>
+              </a:rPr>
+              <a:t>修复成功率 / 门禁通过率</a:t>
+            </a:r>
+          </a:p>
+        </p:txBody>
+      </p:sp>
+      <p:sp>
+        <p:nvSpPr>
+          <p:cNvPr id="22" name="Rectangle 21"/>
+          <p:cNvSpPr/>
+          <p:nvPr/>
+        </p:nvSpPr>
+        <p:spPr>
+          <a:xfrm>
+            <a:off x="8183879" y="3264408"/>
+            <a:ext cx="64008" cy="914400"/>
+          </a:xfrm>
+          <a:prstGeom prst="rect">
+            <a:avLst/>
+          </a:prstGeom>
+          <a:solidFill>
+            <a:srgbClr val="10B981"/>
+          </a:solidFill>
+          <a:ln>
+            <a:noFill/>
+          </a:ln>
+          <a:effectLst/>
+        </p:spPr>
+        <p:style>
+          <a:lnRef idx="1">
+            <a:schemeClr val="accent1"/>
+          </a:lnRef>
+          <a:fillRef idx="3">
+            <a:schemeClr val="accent1"/>
+          </a:fillRef>
+          <a:effectRef idx="2">
+            <a:schemeClr val="accent1"/>
+          </a:effectRef>
+          <a:fontRef idx="minor">
+            <a:schemeClr val="lt1"/>
+          </a:fontRef>
+        </p:style>
+        <p:txBody>
+          <a:bodyPr rtlCol="0" anchor="ctr"/>
+          <a:lstStyle/>
+          <a:p>
+            <a:pPr algn="ctr"/>
+          </a:p>
+        </p:txBody>
+      </p:sp>
+      <p:sp>
+        <p:nvSpPr>
+          <p:cNvPr id="23" name="Rounded Rectangle 22"/>
+          <p:cNvSpPr/>
+          <p:nvPr/>
+        </p:nvSpPr>
+        <p:spPr>
+          <a:xfrm>
+            <a:off x="8183879" y="4297679"/>
+            <a:ext cx="3474720" cy="914400"/>
+          </a:xfrm>
+          <a:prstGeom prst="roundRect">
+            <a:avLst>
+              <a:gd name="adj" fmla="val 10000"/>
+            </a:avLst>
+          </a:prstGeom>
+          <a:solidFill>
+            <a:srgbClr val="F1F5F9"/>
+          </a:solidFill>
+          <a:ln>
+            <a:noFill/>
+          </a:ln>
+          <a:effectLst/>
+        </p:spPr>
+        <p:style>
+          <a:lnRef idx="1">
+            <a:schemeClr val="accent1"/>
+          </a:lnRef>
+          <a:fillRef idx="3">
+            <a:schemeClr val="accent1"/>
+          </a:fillRef>
+          <a:effectRef idx="2">
+            <a:schemeClr val="accent1"/>
+          </a:effectRef>
+          <a:fontRef idx="minor">
+            <a:schemeClr val="lt1"/>
+          </a:fontRef>
+        </p:style>
+        <p:txBody>
+          <a:bodyPr rtlCol="0" anchor="ctr" wrap="square" lIns="54864" rIns="54864" tIns="18288" bIns="18288"/>
+          <a:lstStyle/>
+          <a:p>
+            <a:pPr algn="l">
+              <a:lnSpc>
+                <a:spcPct val="118000"/>
+              </a:lnSpc>
+            </a:pPr>
+            <a:r>
+              <a:rPr sz="1050" b="1">
+                <a:solidFill>
+                  <a:srgbClr val="0F172A"/>
+                </a:solidFill>
+                <a:latin typeface="微软雅黑"/>
+                <a:ea typeface="微软雅黑"/>
+              </a:rPr>
+              <a:t>复盘自动结晶 Skill</a:t>
+            </a:r>
+          </a:p>
+          <a:p>
+            <a:pPr algn="l">
+              <a:lnSpc>
+                <a:spcPct val="102000"/>
+              </a:lnSpc>
+            </a:pPr>
+            <a:r>
+              <a:rPr sz="900" b="0">
+                <a:solidFill>
+                  <a:srgbClr val="64748B"/>
+                </a:solidFill>
+                <a:latin typeface="微软雅黑"/>
+                <a:ea typeface="微软雅黑"/>
+              </a:rPr>
+              <a:t>知识沉淀速率</a:t>
+            </a:r>
+          </a:p>
+        </p:txBody>
+      </p:sp>
+      <p:sp>
+        <p:nvSpPr>
+          <p:cNvPr id="24" name="Rectangle 23"/>
+          <p:cNvSpPr/>
+          <p:nvPr/>
+        </p:nvSpPr>
+        <p:spPr>
+          <a:xfrm>
+            <a:off x="8183879" y="4297679"/>
+            <a:ext cx="64008" cy="914400"/>
+          </a:xfrm>
+          <a:prstGeom prst="rect">
+            <a:avLst/>
+          </a:prstGeom>
+          <a:solidFill>
+            <a:srgbClr val="10B981"/>
+          </a:solidFill>
+          <a:ln>
+            <a:noFill/>
+          </a:ln>
+          <a:effectLst/>
+        </p:spPr>
+        <p:style>
+          <a:lnRef idx="1">
+            <a:schemeClr val="accent1"/>
+          </a:lnRef>
+          <a:fillRef idx="3">
+            <a:schemeClr val="accent1"/>
+          </a:fillRef>
+          <a:effectRef idx="2">
+            <a:schemeClr val="accent1"/>
+          </a:effectRef>
+          <a:fontRef idx="minor">
+            <a:schemeClr val="lt1"/>
+          </a:fontRef>
+        </p:style>
+        <p:txBody>
+          <a:bodyPr rtlCol="0" anchor="ctr"/>
+          <a:lstStyle/>
+          <a:p>
+            <a:pPr algn="ctr"/>
+          </a:p>
+        </p:txBody>
+      </p:sp>
+      <p:sp>
+        <p:nvSpPr>
+          <p:cNvPr id="25" name="Rounded Rectangle 24"/>
+          <p:cNvSpPr/>
+          <p:nvPr/>
+        </p:nvSpPr>
+        <p:spPr>
+          <a:xfrm>
+            <a:off x="502920" y="5440680"/>
+            <a:ext cx="11155680" cy="896112"/>
+          </a:xfrm>
+          <a:prstGeom prst="roundRect">
+            <a:avLst>
+              <a:gd name="adj" fmla="val 10000"/>
+            </a:avLst>
+          </a:prstGeom>
+          <a:solidFill>
+            <a:srgbClr val="E2E8F0"/>
+          </a:solidFill>
+          <a:ln>
+            <a:noFill/>
+          </a:ln>
+          <a:effectLst/>
+        </p:spPr>
+        <p:style>
+          <a:lnRef idx="1">
+            <a:schemeClr val="accent1"/>
+          </a:lnRef>
+          <a:fillRef idx="3">
+            <a:schemeClr val="accent1"/>
+          </a:fillRef>
+          <a:effectRef idx="2">
+            <a:schemeClr val="accent1"/>
+          </a:effectRef>
+          <a:fontRef idx="minor">
+            <a:schemeClr val="lt1"/>
+          </a:fontRef>
+        </p:style>
+        <p:txBody>
+          <a:bodyPr rtlCol="0" anchor="ctr" wrap="square" lIns="54864" rIns="54864" tIns="18288" bIns="18288"/>
+          <a:lstStyle/>
+          <a:p>
+            <a:pPr algn="l">
+              <a:lnSpc>
+                <a:spcPct val="118000"/>
+              </a:lnSpc>
+            </a:pPr>
+            <a:r>
+              <a:rPr sz="1000" b="0">
+                <a:solidFill>
+                  <a:srgbClr val="0F172A"/>
+                </a:solidFill>
+                <a:latin typeface="微软雅黑"/>
+                <a:ea typeface="微软雅黑"/>
+              </a:rPr>
+              <a:t>行业可复制性：任何有 Issue+CI+代码仓库的组织可复制，可迁移 IT 服务/嵌入式/金融科技研发线</a:t>
+            </a:r>
+          </a:p>
+          <a:p>
+            <a:pPr algn="l">
+              <a:lnSpc>
+                <a:spcPct val="118000"/>
+              </a:lnSpc>
+            </a:pPr>
+            <a:r>
+              <a:rPr sz="1000" b="0">
+                <a:solidFill>
+                  <a:srgbClr val="0F172A"/>
+                </a:solidFill>
+                <a:latin typeface="微软雅黑"/>
+                <a:ea typeface="微软雅黑"/>
+              </a:rPr>
+              <a:t>差异化（对照 OpenHands/SWE-agent）：确定性推理可复现 + T1-T3 生产门禁 + experience-tree 自进化沉淀</a:t>
+            </a:r>
+          </a:p>
+        </p:txBody>
+      </p:sp>
     </p:spTree>
   </p:cSld>
   <p:clrMapOvr>
@@ -8515,106 +12241,852 @@
       </p:sp>
       <p:sp>
         <p:nvSpPr>
-          <p:cNvPr id="32" name="Text 30"/>
-          <p:cNvSpPr/>
-          <p:nvPr/>
-        </p:nvSpPr>
-        <p:spPr>
-          <a:xfrm>
-            <a:off x="11277295" y="6400800"/>
-            <a:ext cx="548640" cy="274320"/>
-          </a:xfrm>
-          <a:prstGeom prst="rect">
-            <a:avLst/>
-          </a:prstGeom>
-          <a:noFill/>
-        </p:spPr>
-        <p:txBody>
-          <a:bodyPr wrap="square" lIns="0" tIns="0" rIns="0" bIns="0" rtlCol="0" anchor="ctr"/>
-          <a:lstStyle/>
-          <a:p>
-            <a:pPr marL="0" indent="0" algn="r">
-              <a:buNone/>
-            </a:pPr>
-            <a:r>
-              <a:rPr lang="en-US" sz="1000" dirty="0">
-                <a:solidFill>
-                  <a:srgbClr val="6B7280"/>
-                </a:solidFill>
-                <a:latin typeface="微软雅黑" pitchFamily="34" charset="0"/>
-                <a:ea typeface="微软雅黑" pitchFamily="34" charset="-122"/>
-                <a:cs typeface="微软雅黑" pitchFamily="34" charset="-120"/>
-              </a:rPr>
-              <a:t>5</a:t>
-            </a:r>
-            <a:endParaRPr lang="en-US" sz="1000" dirty="0"/>
-          </a:p>
-        </p:txBody>
-      </p:sp>
-      <p:sp>
-        <p:nvSpPr>
-          <p:cNvPr id="38" name="文本框 37"/>
-          <p:cNvSpPr txBox="1"/>
-          <p:nvPr/>
-        </p:nvSpPr>
-        <p:spPr>
-          <a:xfrm>
-            <a:off x="525780" y="1204595"/>
-            <a:ext cx="8013065" cy="368300"/>
-          </a:xfrm>
-          <a:prstGeom prst="rect">
-            <a:avLst/>
-          </a:prstGeom>
-          <a:noFill/>
-        </p:spPr>
-        <p:txBody>
-          <a:bodyPr wrap="square" rtlCol="0">
-            <a:spAutoFit/>
-          </a:bodyPr>
-          <a:p>
-            <a:r>
-              <a:rPr lang="zh-CN" altLang="en-US">
-                <a:latin typeface="微软雅黑" pitchFamily="34" charset="0"/>
-                <a:ea typeface="微软雅黑" pitchFamily="34" charset="0"/>
-              </a:rPr>
-              <a:t>架构：AgentTeams 编排层（Manager+A1-A5）→ Skill 能力层（官方用云 Skills + dev-implementer/rev-officer/experience-tree）→ MCP 工具层（GitHub/CI/监控，Higress 托管凭证）→ 证据治理层（MinIO 共享状态 + trace + SHA-256 审计链 + KB）。</a:t>
-            </a:r>
-            <a:endParaRPr lang="zh-CN" altLang="en-US">
-              <a:latin typeface="微软雅黑" pitchFamily="34" charset="0"/>
-              <a:ea typeface="微软雅黑" pitchFamily="34" charset="0"/>
-            </a:endParaRPr>
-          </a:p>
-          <a:p>
-            <a:r>
-              <a:t>选型必要性：AgentTeams=必选协同基点；Higress=统一网关+凭证；MinIO=共享上下文降 Token。</a:t>
-            </a:r>
-          </a:p>
-        </p:txBody>
-      </p:sp>
-      <p:pic>
-        <p:nvPicPr>
-          <p:cNvPr id="39" name="图片 38"/>
-          <p:cNvPicPr>
-            <a:picLocks noChangeAspect="1"/>
-          </p:cNvPicPr>
-          <p:nvPr/>
-        </p:nvPicPr>
-        <p:blipFill>
-          <a:blip r:embed="rId1"/>
-          <a:stretch>
-            <a:fillRect/>
-          </a:stretch>
-        </p:blipFill>
-        <p:spPr>
-          <a:xfrm>
-            <a:off x="2177415" y="1801495"/>
-            <a:ext cx="7837805" cy="4418330"/>
-          </a:xfrm>
-          <a:prstGeom prst="rect">
-            <a:avLst/>
-          </a:prstGeom>
-        </p:spPr>
-      </p:pic>
+          <p:cNvPr id="4" name="Rounded Rectangle 3"/>
+          <p:cNvSpPr/>
+          <p:nvPr/>
+        </p:nvSpPr>
+        <p:spPr>
+          <a:xfrm>
+            <a:off x="502920" y="1335024"/>
+            <a:ext cx="2743200" cy="841248"/>
+          </a:xfrm>
+          <a:prstGeom prst="roundRect">
+            <a:avLst>
+              <a:gd name="adj" fmla="val 10000"/>
+            </a:avLst>
+          </a:prstGeom>
+          <a:solidFill>
+            <a:srgbClr val="1B1F3B"/>
+          </a:solidFill>
+          <a:ln>
+            <a:noFill/>
+          </a:ln>
+          <a:effectLst/>
+        </p:spPr>
+        <p:style>
+          <a:lnRef idx="1">
+            <a:schemeClr val="accent1"/>
+          </a:lnRef>
+          <a:fillRef idx="3">
+            <a:schemeClr val="accent1"/>
+          </a:fillRef>
+          <a:effectRef idx="2">
+            <a:schemeClr val="accent1"/>
+          </a:effectRef>
+          <a:fontRef idx="minor">
+            <a:schemeClr val="lt1"/>
+          </a:fontRef>
+        </p:style>
+        <p:txBody>
+          <a:bodyPr rtlCol="0" anchor="ctr" wrap="square" lIns="54864" rIns="54864" tIns="18288" bIns="18288"/>
+          <a:lstStyle/>
+          <a:p>
+            <a:pPr algn="ctr">
+              <a:lnSpc>
+                <a:spcPct val="102000"/>
+              </a:lnSpc>
+            </a:pPr>
+            <a:r>
+              <a:rPr sz="1150" b="1" spc="115">
+                <a:solidFill>
+                  <a:srgbClr val="FFFFFF"/>
+                </a:solidFill>
+                <a:latin typeface="微软雅黑"/>
+                <a:ea typeface="微软雅黑"/>
+              </a:rPr>
+              <a:t>任务输入层</a:t>
+            </a:r>
+          </a:p>
+        </p:txBody>
+      </p:sp>
+      <p:sp>
+        <p:nvSpPr>
+          <p:cNvPr id="5" name="Rounded Rectangle 4"/>
+          <p:cNvSpPr/>
+          <p:nvPr/>
+        </p:nvSpPr>
+        <p:spPr>
+          <a:xfrm>
+            <a:off x="3383280" y="1335024"/>
+            <a:ext cx="8275320" cy="841248"/>
+          </a:xfrm>
+          <a:prstGeom prst="roundRect">
+            <a:avLst>
+              <a:gd name="adj" fmla="val 10000"/>
+            </a:avLst>
+          </a:prstGeom>
+          <a:solidFill>
+            <a:srgbClr val="E2E8F0"/>
+          </a:solidFill>
+          <a:ln>
+            <a:noFill/>
+          </a:ln>
+          <a:effectLst/>
+        </p:spPr>
+        <p:style>
+          <a:lnRef idx="1">
+            <a:schemeClr val="accent1"/>
+          </a:lnRef>
+          <a:fillRef idx="3">
+            <a:schemeClr val="accent1"/>
+          </a:fillRef>
+          <a:effectRef idx="2">
+            <a:schemeClr val="accent1"/>
+          </a:effectRef>
+          <a:fontRef idx="minor">
+            <a:schemeClr val="lt1"/>
+          </a:fontRef>
+        </p:style>
+        <p:txBody>
+          <a:bodyPr rtlCol="0" anchor="ctr" wrap="square" lIns="54864" rIns="54864" tIns="18288" bIns="18288"/>
+          <a:lstStyle/>
+          <a:p>
+            <a:pPr algn="l">
+              <a:lnSpc>
+                <a:spcPct val="118000"/>
+              </a:lnSpc>
+            </a:pPr>
+            <a:r>
+              <a:rPr sz="1050" b="0">
+                <a:solidFill>
+                  <a:srgbClr val="0F172A"/>
+                </a:solidFill>
+                <a:latin typeface="微软雅黑"/>
+                <a:ea typeface="微软雅黑"/>
+              </a:rPr>
+              <a:t>GitHub Issue / 日志 / 用户反馈 / CI 告警</a:t>
+            </a:r>
+          </a:p>
+        </p:txBody>
+      </p:sp>
+      <p:sp>
+        <p:nvSpPr>
+          <p:cNvPr id="6" name="Down Arrow 5"/>
+          <p:cNvSpPr/>
+          <p:nvPr/>
+        </p:nvSpPr>
+        <p:spPr>
+          <a:xfrm>
+            <a:off x="11539728" y="2221991"/>
+            <a:ext cx="274320" cy="128016"/>
+          </a:xfrm>
+          <a:prstGeom prst="downArrow">
+            <a:avLst>
+              <a:gd name="adj1" fmla="val 10000"/>
+              <a:gd name="adj2" fmla="val 50000"/>
+            </a:avLst>
+          </a:prstGeom>
+          <a:solidFill>
+            <a:srgbClr val="2E5BFF"/>
+          </a:solidFill>
+          <a:ln>
+            <a:noFill/>
+          </a:ln>
+          <a:effectLst/>
+        </p:spPr>
+        <p:style>
+          <a:lnRef idx="1">
+            <a:schemeClr val="accent1"/>
+          </a:lnRef>
+          <a:fillRef idx="3">
+            <a:schemeClr val="accent1"/>
+          </a:fillRef>
+          <a:effectRef idx="2">
+            <a:schemeClr val="accent1"/>
+          </a:effectRef>
+          <a:fontRef idx="minor">
+            <a:schemeClr val="lt1"/>
+          </a:fontRef>
+        </p:style>
+        <p:txBody>
+          <a:bodyPr rtlCol="0" anchor="ctr"/>
+          <a:lstStyle/>
+          <a:p>
+            <a:pPr algn="ctr"/>
+          </a:p>
+        </p:txBody>
+      </p:sp>
+      <p:sp>
+        <p:nvSpPr>
+          <p:cNvPr id="7" name="Rounded Rectangle 6"/>
+          <p:cNvSpPr/>
+          <p:nvPr/>
+        </p:nvSpPr>
+        <p:spPr>
+          <a:xfrm>
+            <a:off x="502920" y="2295144"/>
+            <a:ext cx="2743200" cy="841248"/>
+          </a:xfrm>
+          <a:prstGeom prst="roundRect">
+            <a:avLst>
+              <a:gd name="adj" fmla="val 10000"/>
+            </a:avLst>
+          </a:prstGeom>
+          <a:solidFill>
+            <a:srgbClr val="2E5BFF"/>
+          </a:solidFill>
+          <a:ln>
+            <a:noFill/>
+          </a:ln>
+          <a:effectLst/>
+        </p:spPr>
+        <p:style>
+          <a:lnRef idx="1">
+            <a:schemeClr val="accent1"/>
+          </a:lnRef>
+          <a:fillRef idx="3">
+            <a:schemeClr val="accent1"/>
+          </a:fillRef>
+          <a:effectRef idx="2">
+            <a:schemeClr val="accent1"/>
+          </a:effectRef>
+          <a:fontRef idx="minor">
+            <a:schemeClr val="lt1"/>
+          </a:fontRef>
+        </p:style>
+        <p:txBody>
+          <a:bodyPr rtlCol="0" anchor="ctr" wrap="square" lIns="54864" rIns="54864" tIns="18288" bIns="18288"/>
+          <a:lstStyle/>
+          <a:p>
+            <a:pPr algn="ctr">
+              <a:lnSpc>
+                <a:spcPct val="102000"/>
+              </a:lnSpc>
+            </a:pPr>
+            <a:r>
+              <a:rPr sz="1150" b="1" spc="115">
+                <a:solidFill>
+                  <a:srgbClr val="FFFFFF"/>
+                </a:solidFill>
+                <a:latin typeface="微软雅黑"/>
+                <a:ea typeface="微软雅黑"/>
+              </a:rPr>
+              <a:t>AgentTeams 编排层</a:t>
+            </a:r>
+          </a:p>
+        </p:txBody>
+      </p:sp>
+      <p:sp>
+        <p:nvSpPr>
+          <p:cNvPr id="8" name="Rounded Rectangle 7"/>
+          <p:cNvSpPr/>
+          <p:nvPr/>
+        </p:nvSpPr>
+        <p:spPr>
+          <a:xfrm>
+            <a:off x="3383280" y="2295144"/>
+            <a:ext cx="8275320" cy="841248"/>
+          </a:xfrm>
+          <a:prstGeom prst="roundRect">
+            <a:avLst>
+              <a:gd name="adj" fmla="val 10000"/>
+            </a:avLst>
+          </a:prstGeom>
+          <a:solidFill>
+            <a:srgbClr val="F1F5F9"/>
+          </a:solidFill>
+          <a:ln>
+            <a:noFill/>
+          </a:ln>
+          <a:effectLst/>
+        </p:spPr>
+        <p:style>
+          <a:lnRef idx="1">
+            <a:schemeClr val="accent1"/>
+          </a:lnRef>
+          <a:fillRef idx="3">
+            <a:schemeClr val="accent1"/>
+          </a:fillRef>
+          <a:effectRef idx="2">
+            <a:schemeClr val="accent1"/>
+          </a:effectRef>
+          <a:fontRef idx="minor">
+            <a:schemeClr val="lt1"/>
+          </a:fontRef>
+        </p:style>
+        <p:txBody>
+          <a:bodyPr rtlCol="0" anchor="ctr" wrap="square" lIns="54864" rIns="54864" tIns="18288" bIns="18288"/>
+          <a:lstStyle/>
+          <a:p>
+            <a:pPr algn="l">
+              <a:lnSpc>
+                <a:spcPct val="118000"/>
+              </a:lnSpc>
+            </a:pPr>
+            <a:r>
+              <a:rPr sz="1050" b="0">
+                <a:solidFill>
+                  <a:srgbClr val="0F172A"/>
+                </a:solidFill>
+                <a:latin typeface="微软雅黑"/>
+                <a:ea typeface="微软雅黑"/>
+              </a:rPr>
+              <a:t>Manager（拆解/委派/追踪） · A1-A5 Worker · Matrix 房间全程可见 · MinIO 共享上下文</a:t>
+            </a:r>
+          </a:p>
+        </p:txBody>
+      </p:sp>
+      <p:sp>
+        <p:nvSpPr>
+          <p:cNvPr id="9" name="Down Arrow 8"/>
+          <p:cNvSpPr/>
+          <p:nvPr/>
+        </p:nvSpPr>
+        <p:spPr>
+          <a:xfrm>
+            <a:off x="11539728" y="3182111"/>
+            <a:ext cx="274320" cy="128016"/>
+          </a:xfrm>
+          <a:prstGeom prst="downArrow">
+            <a:avLst>
+              <a:gd name="adj1" fmla="val 10000"/>
+              <a:gd name="adj2" fmla="val 50000"/>
+            </a:avLst>
+          </a:prstGeom>
+          <a:solidFill>
+            <a:srgbClr val="2E5BFF"/>
+          </a:solidFill>
+          <a:ln>
+            <a:noFill/>
+          </a:ln>
+          <a:effectLst/>
+        </p:spPr>
+        <p:style>
+          <a:lnRef idx="1">
+            <a:schemeClr val="accent1"/>
+          </a:lnRef>
+          <a:fillRef idx="3">
+            <a:schemeClr val="accent1"/>
+          </a:fillRef>
+          <a:effectRef idx="2">
+            <a:schemeClr val="accent1"/>
+          </a:effectRef>
+          <a:fontRef idx="minor">
+            <a:schemeClr val="lt1"/>
+          </a:fontRef>
+        </p:style>
+        <p:txBody>
+          <a:bodyPr rtlCol="0" anchor="ctr"/>
+          <a:lstStyle/>
+          <a:p>
+            <a:pPr algn="ctr"/>
+          </a:p>
+        </p:txBody>
+      </p:sp>
+      <p:sp>
+        <p:nvSpPr>
+          <p:cNvPr id="10" name="Rounded Rectangle 9"/>
+          <p:cNvSpPr/>
+          <p:nvPr/>
+        </p:nvSpPr>
+        <p:spPr>
+          <a:xfrm>
+            <a:off x="502920" y="3255263"/>
+            <a:ext cx="2743200" cy="841248"/>
+          </a:xfrm>
+          <a:prstGeom prst="roundRect">
+            <a:avLst>
+              <a:gd name="adj" fmla="val 10000"/>
+            </a:avLst>
+          </a:prstGeom>
+          <a:solidFill>
+            <a:srgbClr val="0EA5E9"/>
+          </a:solidFill>
+          <a:ln>
+            <a:noFill/>
+          </a:ln>
+          <a:effectLst/>
+        </p:spPr>
+        <p:style>
+          <a:lnRef idx="1">
+            <a:schemeClr val="accent1"/>
+          </a:lnRef>
+          <a:fillRef idx="3">
+            <a:schemeClr val="accent1"/>
+          </a:fillRef>
+          <a:effectRef idx="2">
+            <a:schemeClr val="accent1"/>
+          </a:effectRef>
+          <a:fontRef idx="minor">
+            <a:schemeClr val="lt1"/>
+          </a:fontRef>
+        </p:style>
+        <p:txBody>
+          <a:bodyPr rtlCol="0" anchor="ctr" wrap="square" lIns="54864" rIns="54864" tIns="18288" bIns="18288"/>
+          <a:lstStyle/>
+          <a:p>
+            <a:pPr algn="ctr">
+              <a:lnSpc>
+                <a:spcPct val="102000"/>
+              </a:lnSpc>
+            </a:pPr>
+            <a:r>
+              <a:rPr sz="1150" b="1" spc="115">
+                <a:solidFill>
+                  <a:srgbClr val="FFFFFF"/>
+                </a:solidFill>
+                <a:latin typeface="微软雅黑"/>
+                <a:ea typeface="微软雅黑"/>
+              </a:rPr>
+              <a:t>Skill 能力层</a:t>
+            </a:r>
+          </a:p>
+        </p:txBody>
+      </p:sp>
+      <p:sp>
+        <p:nvSpPr>
+          <p:cNvPr id="11" name="Rounded Rectangle 10"/>
+          <p:cNvSpPr/>
+          <p:nvPr/>
+        </p:nvSpPr>
+        <p:spPr>
+          <a:xfrm>
+            <a:off x="3383280" y="3255263"/>
+            <a:ext cx="8275320" cy="841248"/>
+          </a:xfrm>
+          <a:prstGeom prst="roundRect">
+            <a:avLst>
+              <a:gd name="adj" fmla="val 10000"/>
+            </a:avLst>
+          </a:prstGeom>
+          <a:solidFill>
+            <a:srgbClr val="E2E8F0"/>
+          </a:solidFill>
+          <a:ln>
+            <a:noFill/>
+          </a:ln>
+          <a:effectLst/>
+        </p:spPr>
+        <p:style>
+          <a:lnRef idx="1">
+            <a:schemeClr val="accent1"/>
+          </a:lnRef>
+          <a:fillRef idx="3">
+            <a:schemeClr val="accent1"/>
+          </a:fillRef>
+          <a:effectRef idx="2">
+            <a:schemeClr val="accent1"/>
+          </a:effectRef>
+          <a:fontRef idx="minor">
+            <a:schemeClr val="lt1"/>
+          </a:fontRef>
+        </p:style>
+        <p:txBody>
+          <a:bodyPr rtlCol="0" anchor="ctr" wrap="square" lIns="54864" rIns="54864" tIns="18288" bIns="18288"/>
+          <a:lstStyle/>
+          <a:p>
+            <a:pPr algn="l">
+              <a:lnSpc>
+                <a:spcPct val="118000"/>
+              </a:lnSpc>
+            </a:pPr>
+            <a:r>
+              <a:rPr sz="1050" b="0">
+                <a:solidFill>
+                  <a:srgbClr val="0F172A"/>
+                </a:solidFill>
+                <a:latin typeface="微软雅黑"/>
+                <a:ea typeface="微软雅黑"/>
+              </a:rPr>
+              <a:t>官方用云 Skills（resourcecenter-search / ecs-diagnose / network-reachability / sas-overview）+ dev-implementer / rev-officer / experience-tree / mcp-gateway</a:t>
+            </a:r>
+          </a:p>
+        </p:txBody>
+      </p:sp>
+      <p:sp>
+        <p:nvSpPr>
+          <p:cNvPr id="12" name="Down Arrow 11"/>
+          <p:cNvSpPr/>
+          <p:nvPr/>
+        </p:nvSpPr>
+        <p:spPr>
+          <a:xfrm>
+            <a:off x="11539728" y="4142231"/>
+            <a:ext cx="274320" cy="128016"/>
+          </a:xfrm>
+          <a:prstGeom prst="downArrow">
+            <a:avLst>
+              <a:gd name="adj1" fmla="val 10000"/>
+              <a:gd name="adj2" fmla="val 50000"/>
+            </a:avLst>
+          </a:prstGeom>
+          <a:solidFill>
+            <a:srgbClr val="2E5BFF"/>
+          </a:solidFill>
+          <a:ln>
+            <a:noFill/>
+          </a:ln>
+          <a:effectLst/>
+        </p:spPr>
+        <p:style>
+          <a:lnRef idx="1">
+            <a:schemeClr val="accent1"/>
+          </a:lnRef>
+          <a:fillRef idx="3">
+            <a:schemeClr val="accent1"/>
+          </a:fillRef>
+          <a:effectRef idx="2">
+            <a:schemeClr val="accent1"/>
+          </a:effectRef>
+          <a:fontRef idx="minor">
+            <a:schemeClr val="lt1"/>
+          </a:fontRef>
+        </p:style>
+        <p:txBody>
+          <a:bodyPr rtlCol="0" anchor="ctr"/>
+          <a:lstStyle/>
+          <a:p>
+            <a:pPr algn="ctr"/>
+          </a:p>
+        </p:txBody>
+      </p:sp>
+      <p:sp>
+        <p:nvSpPr>
+          <p:cNvPr id="13" name="Rounded Rectangle 12"/>
+          <p:cNvSpPr/>
+          <p:nvPr/>
+        </p:nvSpPr>
+        <p:spPr>
+          <a:xfrm>
+            <a:off x="502920" y="4215383"/>
+            <a:ext cx="2743200" cy="841248"/>
+          </a:xfrm>
+          <a:prstGeom prst="roundRect">
+            <a:avLst>
+              <a:gd name="adj" fmla="val 10000"/>
+            </a:avLst>
+          </a:prstGeom>
+          <a:solidFill>
+            <a:srgbClr val="06B6D4"/>
+          </a:solidFill>
+          <a:ln>
+            <a:noFill/>
+          </a:ln>
+          <a:effectLst/>
+        </p:spPr>
+        <p:style>
+          <a:lnRef idx="1">
+            <a:schemeClr val="accent1"/>
+          </a:lnRef>
+          <a:fillRef idx="3">
+            <a:schemeClr val="accent1"/>
+          </a:fillRef>
+          <a:effectRef idx="2">
+            <a:schemeClr val="accent1"/>
+          </a:effectRef>
+          <a:fontRef idx="minor">
+            <a:schemeClr val="lt1"/>
+          </a:fontRef>
+        </p:style>
+        <p:txBody>
+          <a:bodyPr rtlCol="0" anchor="ctr" wrap="square" lIns="54864" rIns="54864" tIns="18288" bIns="18288"/>
+          <a:lstStyle/>
+          <a:p>
+            <a:pPr algn="ctr">
+              <a:lnSpc>
+                <a:spcPct val="102000"/>
+              </a:lnSpc>
+            </a:pPr>
+            <a:r>
+              <a:rPr sz="1150" b="1" spc="115">
+                <a:solidFill>
+                  <a:srgbClr val="FFFFFF"/>
+                </a:solidFill>
+                <a:latin typeface="微软雅黑"/>
+                <a:ea typeface="微软雅黑"/>
+              </a:rPr>
+              <a:t>MCP / 工具层</a:t>
+            </a:r>
+          </a:p>
+        </p:txBody>
+      </p:sp>
+      <p:sp>
+        <p:nvSpPr>
+          <p:cNvPr id="14" name="Rounded Rectangle 13"/>
+          <p:cNvSpPr/>
+          <p:nvPr/>
+        </p:nvSpPr>
+        <p:spPr>
+          <a:xfrm>
+            <a:off x="3383280" y="4215383"/>
+            <a:ext cx="8275320" cy="841248"/>
+          </a:xfrm>
+          <a:prstGeom prst="roundRect">
+            <a:avLst>
+              <a:gd name="adj" fmla="val 10000"/>
+            </a:avLst>
+          </a:prstGeom>
+          <a:solidFill>
+            <a:srgbClr val="F1F5F9"/>
+          </a:solidFill>
+          <a:ln>
+            <a:noFill/>
+          </a:ln>
+          <a:effectLst/>
+        </p:spPr>
+        <p:style>
+          <a:lnRef idx="1">
+            <a:schemeClr val="accent1"/>
+          </a:lnRef>
+          <a:fillRef idx="3">
+            <a:schemeClr val="accent1"/>
+          </a:fillRef>
+          <a:effectRef idx="2">
+            <a:schemeClr val="accent1"/>
+          </a:effectRef>
+          <a:fontRef idx="minor">
+            <a:schemeClr val="lt1"/>
+          </a:fontRef>
+        </p:style>
+        <p:txBody>
+          <a:bodyPr rtlCol="0" anchor="ctr" wrap="square" lIns="54864" rIns="54864" tIns="18288" bIns="18288"/>
+          <a:lstStyle/>
+          <a:p>
+            <a:pPr algn="l">
+              <a:lnSpc>
+                <a:spcPct val="118000"/>
+              </a:lnSpc>
+            </a:pPr>
+            <a:r>
+              <a:rPr sz="1050" b="0">
+                <a:solidFill>
+                  <a:srgbClr val="0F172A"/>
+                </a:solidFill>
+                <a:latin typeface="微软雅黑"/>
+                <a:ea typeface="微软雅黑"/>
+              </a:rPr>
+              <a:t>GitHub · CI · 监控 · 云产品   （Higress 统一网关托管凭证，Worker 不持真实 key）</a:t>
+            </a:r>
+          </a:p>
+        </p:txBody>
+      </p:sp>
+      <p:sp>
+        <p:nvSpPr>
+          <p:cNvPr id="15" name="Down Arrow 14"/>
+          <p:cNvSpPr/>
+          <p:nvPr/>
+        </p:nvSpPr>
+        <p:spPr>
+          <a:xfrm>
+            <a:off x="11539728" y="5102351"/>
+            <a:ext cx="274320" cy="128016"/>
+          </a:xfrm>
+          <a:prstGeom prst="downArrow">
+            <a:avLst>
+              <a:gd name="adj1" fmla="val 10000"/>
+              <a:gd name="adj2" fmla="val 50000"/>
+            </a:avLst>
+          </a:prstGeom>
+          <a:solidFill>
+            <a:srgbClr val="2E5BFF"/>
+          </a:solidFill>
+          <a:ln>
+            <a:noFill/>
+          </a:ln>
+          <a:effectLst/>
+        </p:spPr>
+        <p:style>
+          <a:lnRef idx="1">
+            <a:schemeClr val="accent1"/>
+          </a:lnRef>
+          <a:fillRef idx="3">
+            <a:schemeClr val="accent1"/>
+          </a:fillRef>
+          <a:effectRef idx="2">
+            <a:schemeClr val="accent1"/>
+          </a:effectRef>
+          <a:fontRef idx="minor">
+            <a:schemeClr val="lt1"/>
+          </a:fontRef>
+        </p:style>
+        <p:txBody>
+          <a:bodyPr rtlCol="0" anchor="ctr"/>
+          <a:lstStyle/>
+          <a:p>
+            <a:pPr algn="ctr"/>
+          </a:p>
+        </p:txBody>
+      </p:sp>
+      <p:sp>
+        <p:nvSpPr>
+          <p:cNvPr id="16" name="Rounded Rectangle 15"/>
+          <p:cNvSpPr/>
+          <p:nvPr/>
+        </p:nvSpPr>
+        <p:spPr>
+          <a:xfrm>
+            <a:off x="502920" y="5175503"/>
+            <a:ext cx="2743200" cy="841248"/>
+          </a:xfrm>
+          <a:prstGeom prst="roundRect">
+            <a:avLst>
+              <a:gd name="adj" fmla="val 10000"/>
+            </a:avLst>
+          </a:prstGeom>
+          <a:solidFill>
+            <a:srgbClr val="F5B301"/>
+          </a:solidFill>
+          <a:ln>
+            <a:noFill/>
+          </a:ln>
+          <a:effectLst/>
+        </p:spPr>
+        <p:style>
+          <a:lnRef idx="1">
+            <a:schemeClr val="accent1"/>
+          </a:lnRef>
+          <a:fillRef idx="3">
+            <a:schemeClr val="accent1"/>
+          </a:fillRef>
+          <a:effectRef idx="2">
+            <a:schemeClr val="accent1"/>
+          </a:effectRef>
+          <a:fontRef idx="minor">
+            <a:schemeClr val="lt1"/>
+          </a:fontRef>
+        </p:style>
+        <p:txBody>
+          <a:bodyPr rtlCol="0" anchor="ctr" wrap="square" lIns="54864" rIns="54864" tIns="18288" bIns="18288"/>
+          <a:lstStyle/>
+          <a:p>
+            <a:pPr algn="ctr">
+              <a:lnSpc>
+                <a:spcPct val="102000"/>
+              </a:lnSpc>
+            </a:pPr>
+            <a:r>
+              <a:rPr sz="1150" b="1" spc="115">
+                <a:solidFill>
+                  <a:srgbClr val="FFFFFF"/>
+                </a:solidFill>
+                <a:latin typeface="微软雅黑"/>
+                <a:ea typeface="微软雅黑"/>
+              </a:rPr>
+              <a:t>证据与治理层</a:t>
+            </a:r>
+          </a:p>
+        </p:txBody>
+      </p:sp>
+      <p:sp>
+        <p:nvSpPr>
+          <p:cNvPr id="17" name="Rounded Rectangle 16"/>
+          <p:cNvSpPr/>
+          <p:nvPr/>
+        </p:nvSpPr>
+        <p:spPr>
+          <a:xfrm>
+            <a:off x="3383280" y="5175503"/>
+            <a:ext cx="8275320" cy="841248"/>
+          </a:xfrm>
+          <a:prstGeom prst="roundRect">
+            <a:avLst>
+              <a:gd name="adj" fmla="val 10000"/>
+            </a:avLst>
+          </a:prstGeom>
+          <a:solidFill>
+            <a:srgbClr val="E2E8F0"/>
+          </a:solidFill>
+          <a:ln>
+            <a:noFill/>
+          </a:ln>
+          <a:effectLst/>
+        </p:spPr>
+        <p:style>
+          <a:lnRef idx="1">
+            <a:schemeClr val="accent1"/>
+          </a:lnRef>
+          <a:fillRef idx="3">
+            <a:schemeClr val="accent1"/>
+          </a:fillRef>
+          <a:effectRef idx="2">
+            <a:schemeClr val="accent1"/>
+          </a:effectRef>
+          <a:fontRef idx="minor">
+            <a:schemeClr val="lt1"/>
+          </a:fontRef>
+        </p:style>
+        <p:txBody>
+          <a:bodyPr rtlCol="0" anchor="ctr" wrap="square" lIns="54864" rIns="54864" tIns="18288" bIns="18288"/>
+          <a:lstStyle/>
+          <a:p>
+            <a:pPr algn="l">
+              <a:lnSpc>
+                <a:spcPct val="118000"/>
+              </a:lnSpc>
+            </a:pPr>
+            <a:r>
+              <a:rPr sz="1050" b="0">
+                <a:solidFill>
+                  <a:srgbClr val="0F172A"/>
+                </a:solidFill>
+                <a:latin typeface="微软雅黑"/>
+                <a:ea typeface="微软雅黑"/>
+              </a:rPr>
+              <a:t>MinIO 共享状态 · trace_data · SHA-256 审计链 · KB 向量+BM25 检索</a:t>
+            </a:r>
+          </a:p>
+        </p:txBody>
+      </p:sp>
+      <p:sp>
+        <p:nvSpPr>
+          <p:cNvPr id="18" name="Rounded Rectangle 17"/>
+          <p:cNvSpPr/>
+          <p:nvPr/>
+        </p:nvSpPr>
+        <p:spPr>
+          <a:xfrm>
+            <a:off x="502920" y="6080760"/>
+            <a:ext cx="11155680" cy="411480"/>
+          </a:xfrm>
+          <a:prstGeom prst="roundRect">
+            <a:avLst>
+              <a:gd name="adj" fmla="val 10000"/>
+            </a:avLst>
+          </a:prstGeom>
+          <a:solidFill>
+            <a:srgbClr val="E2E8F0"/>
+          </a:solidFill>
+          <a:ln>
+            <a:noFill/>
+          </a:ln>
+          <a:effectLst/>
+        </p:spPr>
+        <p:style>
+          <a:lnRef idx="1">
+            <a:schemeClr val="accent1"/>
+          </a:lnRef>
+          <a:fillRef idx="3">
+            <a:schemeClr val="accent1"/>
+          </a:fillRef>
+          <a:effectRef idx="2">
+            <a:schemeClr val="accent1"/>
+          </a:effectRef>
+          <a:fontRef idx="minor">
+            <a:schemeClr val="lt1"/>
+          </a:fontRef>
+        </p:style>
+        <p:txBody>
+          <a:bodyPr rtlCol="0" anchor="ctr" wrap="square" lIns="54864" rIns="54864" tIns="18288" bIns="18288"/>
+          <a:lstStyle/>
+          <a:p>
+            <a:pPr algn="l">
+              <a:lnSpc>
+                <a:spcPct val="118000"/>
+              </a:lnSpc>
+            </a:pPr>
+            <a:r>
+              <a:rPr sz="1000" b="0">
+                <a:solidFill>
+                  <a:srgbClr val="0F172A"/>
+                </a:solidFill>
+                <a:latin typeface="微软雅黑"/>
+                <a:ea typeface="微软雅黑"/>
+              </a:rPr>
+              <a:t>选型必要性：AgentTeams=必选协同基点 · Higress=统一网关+凭证隔离 · MinIO=共享上下文降 Token 消耗</a:t>
+            </a:r>
+          </a:p>
+        </p:txBody>
+      </p:sp>
     </p:spTree>
   </p:cSld>
   <p:clrMapOvr>
@@ -9030,121 +13502,1207 @@
       </p:sp>
       <p:sp>
         <p:nvSpPr>
-          <p:cNvPr id="38" name="文本框 37"/>
-          <p:cNvSpPr txBox="1"/>
-          <p:nvPr/>
-        </p:nvSpPr>
-        <p:spPr>
-          <a:xfrm>
-            <a:off x="525780" y="1204595"/>
-            <a:ext cx="8013065" cy="645160"/>
-          </a:xfrm>
-          <a:prstGeom prst="rect">
-            <a:avLst/>
-          </a:prstGeom>
-          <a:noFill/>
-        </p:spPr>
-        <p:txBody>
-          <a:bodyPr wrap="square" rtlCol="0">
-            <a:spAutoFit/>
-          </a:bodyPr>
-          <a:p>
-            <a:r>
-              <a:rPr lang="zh-CN" altLang="en-US">
-                <a:latin typeface="微软雅黑" pitchFamily="34" charset="0"/>
-                <a:ea typeface="微软雅黑" pitchFamily="34" charset="0"/>
-              </a:rPr>
-              <a:t>Agent 分工：Manager(拆解/委派/追踪) + A1 采集 + A2 诊断 + A3 实施 + A4 审查 + A5 沉淀（见附录A）。</a:t>
-            </a:r>
-            <a:r>
-              <a:rPr lang="en-US" altLang="zh-CN">
-                <a:latin typeface="微软雅黑" pitchFamily="34" charset="0"/>
-                <a:ea typeface="微软雅黑" pitchFamily="34" charset="0"/>
-              </a:rPr>
-              <a:t/>
-            </a:r>
-            <a:r>
-              <a:rPr lang="zh-CN" altLang="en-US">
-                <a:latin typeface="微软雅黑" pitchFamily="34" charset="0"/>
-                <a:ea typeface="微软雅黑" pitchFamily="34" charset="0"/>
-              </a:rPr>
-              <a:t/>
-            </a:r>
-            <a:endParaRPr lang="zh-CN" altLang="en-US">
-              <a:latin typeface="微软雅黑" pitchFamily="34" charset="0"/>
-              <a:ea typeface="微软雅黑" pitchFamily="34" charset="0"/>
-            </a:endParaRPr>
-          </a:p>
-          <a:p>
-            <a:r>
-              <a:t>任务拆解：collect→diagnose→implement→audit→distill 映射 AgentTeams task-management Skill。</a:t>
-            </a:r>
-          </a:p>
-          <a:p>
-            <a:r>
-              <a:t>上下文传递：MinIO shared/tasks 共享工作区 + Matrix 房间时间线 + KB 结构化中间结论；Worker 无状态可替换。</a:t>
-            </a:r>
-          </a:p>
-          <a:p>
-            <a:r>
-              <a:t>状态流转：Task 状态机 + 审查不通过打回 A3（重试封顶升级人工）。</a:t>
-            </a:r>
-          </a:p>
-          <a:p>
-            <a:r>
-              <a:t>高风险动作：改生产/大重构/删数据→人工审批；Worker 不持真实凭证。</a:t>
-            </a:r>
-          </a:p>
-        </p:txBody>
-      </p:sp>
-      <p:pic>
-        <p:nvPicPr>
-          <p:cNvPr id="37" name="图片 36"/>
-          <p:cNvPicPr>
-            <a:picLocks noChangeAspect="1"/>
-          </p:cNvPicPr>
-          <p:nvPr/>
-        </p:nvPicPr>
-        <p:blipFill>
-          <a:blip r:embed="rId1"/>
-          <a:stretch>
-            <a:fillRect/>
-          </a:stretch>
-        </p:blipFill>
-        <p:spPr>
-          <a:xfrm>
-            <a:off x="525780" y="2304415"/>
-            <a:ext cx="5283200" cy="2964180"/>
-          </a:xfrm>
-          <a:prstGeom prst="rect">
-            <a:avLst/>
-          </a:prstGeom>
-        </p:spPr>
-      </p:pic>
-      <p:pic>
-        <p:nvPicPr>
-          <p:cNvPr id="39" name="图片 38"/>
-          <p:cNvPicPr>
-            <a:picLocks noChangeAspect="1"/>
-          </p:cNvPicPr>
-          <p:nvPr/>
-        </p:nvPicPr>
-        <p:blipFill>
-          <a:blip r:embed="rId2"/>
-          <a:stretch>
-            <a:fillRect/>
-          </a:stretch>
-        </p:blipFill>
-        <p:spPr>
-          <a:xfrm>
-            <a:off x="6389370" y="2304415"/>
-            <a:ext cx="5285740" cy="2964180"/>
-          </a:xfrm>
-          <a:prstGeom prst="rect">
-            <a:avLst/>
-          </a:prstGeom>
-        </p:spPr>
-      </p:pic>
+          <p:cNvPr id="4" name="Rounded Rectangle 3"/>
+          <p:cNvSpPr/>
+          <p:nvPr/>
+        </p:nvSpPr>
+        <p:spPr>
+          <a:xfrm>
+            <a:off x="502920" y="1335024"/>
+            <a:ext cx="2103120" cy="731520"/>
+          </a:xfrm>
+          <a:prstGeom prst="roundRect">
+            <a:avLst>
+              <a:gd name="adj" fmla="val 10000"/>
+            </a:avLst>
+          </a:prstGeom>
+          <a:solidFill>
+            <a:srgbClr val="EF4444"/>
+          </a:solidFill>
+          <a:ln>
+            <a:noFill/>
+          </a:ln>
+          <a:effectLst/>
+        </p:spPr>
+        <p:style>
+          <a:lnRef idx="1">
+            <a:schemeClr val="accent1"/>
+          </a:lnRef>
+          <a:fillRef idx="3">
+            <a:schemeClr val="accent1"/>
+          </a:fillRef>
+          <a:effectRef idx="2">
+            <a:schemeClr val="accent1"/>
+          </a:effectRef>
+          <a:fontRef idx="minor">
+            <a:schemeClr val="lt1"/>
+          </a:fontRef>
+        </p:style>
+        <p:txBody>
+          <a:bodyPr rtlCol="0" anchor="ctr" wrap="square" lIns="54864" rIns="54864" tIns="18288" bIns="18288"/>
+          <a:lstStyle/>
+          <a:p>
+            <a:pPr algn="ctr">
+              <a:lnSpc>
+                <a:spcPct val="102000"/>
+              </a:lnSpc>
+            </a:pPr>
+            <a:r>
+              <a:rPr sz="1150" b="1">
+                <a:solidFill>
+                  <a:srgbClr val="FFFFFF"/>
+                </a:solidFill>
+                <a:latin typeface="微软雅黑"/>
+                <a:ea typeface="微软雅黑"/>
+              </a:rPr>
+              <a:t>Human</a:t>
+            </a:r>
+          </a:p>
+          <a:p>
+            <a:pPr algn="ctr">
+              <a:lnSpc>
+                <a:spcPct val="118000"/>
+              </a:lnSpc>
+            </a:pPr>
+            <a:r>
+              <a:rPr sz="1050" b="0">
+                <a:solidFill>
+                  <a:srgbClr val="FFFFFF"/>
+                </a:solidFill>
+                <a:latin typeface="微软雅黑"/>
+                <a:ea typeface="微软雅黑"/>
+              </a:rPr>
+              <a:t>Matrix 房间全程可见可干预</a:t>
+            </a:r>
+          </a:p>
+        </p:txBody>
+      </p:sp>
+      <p:sp>
+        <p:nvSpPr>
+          <p:cNvPr id="5" name="Right Arrow 4"/>
+          <p:cNvSpPr/>
+          <p:nvPr/>
+        </p:nvSpPr>
+        <p:spPr>
+          <a:xfrm>
+            <a:off x="2697480" y="1563624"/>
+            <a:ext cx="457200" cy="365760"/>
+          </a:xfrm>
+          <a:prstGeom prst="rightArrow">
+            <a:avLst>
+              <a:gd name="adj1" fmla="val 10000"/>
+              <a:gd name="adj2" fmla="val 50000"/>
+            </a:avLst>
+          </a:prstGeom>
+          <a:solidFill>
+            <a:srgbClr val="2E5BFF"/>
+          </a:solidFill>
+          <a:ln>
+            <a:noFill/>
+          </a:ln>
+          <a:effectLst/>
+        </p:spPr>
+        <p:style>
+          <a:lnRef idx="1">
+            <a:schemeClr val="accent1"/>
+          </a:lnRef>
+          <a:fillRef idx="3">
+            <a:schemeClr val="accent1"/>
+          </a:fillRef>
+          <a:effectRef idx="2">
+            <a:schemeClr val="accent1"/>
+          </a:effectRef>
+          <a:fontRef idx="minor">
+            <a:schemeClr val="lt1"/>
+          </a:fontRef>
+        </p:style>
+        <p:txBody>
+          <a:bodyPr rtlCol="0" anchor="ctr"/>
+          <a:lstStyle/>
+          <a:p>
+            <a:pPr algn="ctr"/>
+          </a:p>
+        </p:txBody>
+      </p:sp>
+      <p:sp>
+        <p:nvSpPr>
+          <p:cNvPr id="6" name="Rounded Rectangle 5"/>
+          <p:cNvSpPr/>
+          <p:nvPr/>
+        </p:nvSpPr>
+        <p:spPr>
+          <a:xfrm>
+            <a:off x="3246120" y="1335024"/>
+            <a:ext cx="2377440" cy="731520"/>
+          </a:xfrm>
+          <a:prstGeom prst="roundRect">
+            <a:avLst>
+              <a:gd name="adj" fmla="val 10000"/>
+            </a:avLst>
+          </a:prstGeom>
+          <a:solidFill>
+            <a:srgbClr val="1B1F3B"/>
+          </a:solidFill>
+          <a:ln w="12700">
+            <a:solidFill>
+              <a:srgbClr val="F5B301"/>
+            </a:solidFill>
+          </a:ln>
+          <a:effectLst/>
+        </p:spPr>
+        <p:style>
+          <a:lnRef idx="1">
+            <a:schemeClr val="accent1"/>
+          </a:lnRef>
+          <a:fillRef idx="3">
+            <a:schemeClr val="accent1"/>
+          </a:fillRef>
+          <a:effectRef idx="2">
+            <a:schemeClr val="accent1"/>
+          </a:effectRef>
+          <a:fontRef idx="minor">
+            <a:schemeClr val="lt1"/>
+          </a:fontRef>
+        </p:style>
+        <p:txBody>
+          <a:bodyPr rtlCol="0" anchor="ctr" wrap="square" lIns="54864" rIns="54864" tIns="18288" bIns="18288"/>
+          <a:lstStyle/>
+          <a:p>
+            <a:pPr algn="ctr">
+              <a:lnSpc>
+                <a:spcPct val="102000"/>
+              </a:lnSpc>
+            </a:pPr>
+            <a:r>
+              <a:rPr sz="1150" b="1">
+                <a:solidFill>
+                  <a:srgbClr val="FFFFFF"/>
+                </a:solidFill>
+                <a:latin typeface="微软雅黑"/>
+                <a:ea typeface="微软雅黑"/>
+              </a:rPr>
+              <a:t>Manager 主控</a:t>
+            </a:r>
+          </a:p>
+          <a:p>
+            <a:pPr algn="ctr">
+              <a:lnSpc>
+                <a:spcPct val="118000"/>
+              </a:lnSpc>
+            </a:pPr>
+            <a:r>
+              <a:rPr sz="1050" b="0">
+                <a:solidFill>
+                  <a:srgbClr val="FFFFFF"/>
+                </a:solidFill>
+                <a:latin typeface="微软雅黑"/>
+                <a:ea typeface="微软雅黑"/>
+              </a:rPr>
+              <a:t>拆解·委派·追踪</a:t>
+            </a:r>
+          </a:p>
+          <a:p>
+            <a:pPr algn="ctr">
+              <a:lnSpc>
+                <a:spcPct val="118000"/>
+              </a:lnSpc>
+            </a:pPr>
+            <a:r>
+              <a:rPr sz="1050" b="0">
+                <a:solidFill>
+                  <a:srgbClr val="FFFFFF"/>
+                </a:solidFill>
+                <a:latin typeface="微软雅黑"/>
+                <a:ea typeface="微软雅黑"/>
+              </a:rPr>
+              <a:t>不自主批准高风险动作</a:t>
+            </a:r>
+          </a:p>
+        </p:txBody>
+      </p:sp>
+      <p:sp>
+        <p:nvSpPr>
+          <p:cNvPr id="7" name="Rounded Rectangle 6"/>
+          <p:cNvSpPr/>
+          <p:nvPr/>
+        </p:nvSpPr>
+        <p:spPr>
+          <a:xfrm>
+            <a:off x="6263640" y="1335024"/>
+            <a:ext cx="5394960" cy="731520"/>
+          </a:xfrm>
+          <a:prstGeom prst="roundRect">
+            <a:avLst>
+              <a:gd name="adj" fmla="val 10000"/>
+            </a:avLst>
+          </a:prstGeom>
+          <a:solidFill>
+            <a:srgbClr val="F1F5F9"/>
+          </a:solidFill>
+          <a:ln>
+            <a:noFill/>
+          </a:ln>
+          <a:effectLst/>
+        </p:spPr>
+        <p:style>
+          <a:lnRef idx="1">
+            <a:schemeClr val="accent1"/>
+          </a:lnRef>
+          <a:fillRef idx="3">
+            <a:schemeClr val="accent1"/>
+          </a:fillRef>
+          <a:effectRef idx="2">
+            <a:schemeClr val="accent1"/>
+          </a:effectRef>
+          <a:fontRef idx="minor">
+            <a:schemeClr val="lt1"/>
+          </a:fontRef>
+        </p:style>
+        <p:txBody>
+          <a:bodyPr rtlCol="0" anchor="ctr" wrap="square" lIns="54864" rIns="54864" tIns="18288" bIns="18288"/>
+          <a:lstStyle/>
+          <a:p>
+            <a:pPr algn="l">
+              <a:lnSpc>
+                <a:spcPct val="102000"/>
+              </a:lnSpc>
+            </a:pPr>
+            <a:r>
+              <a:rPr sz="1150" b="1">
+                <a:solidFill>
+                  <a:srgbClr val="0F172A"/>
+                </a:solidFill>
+                <a:latin typeface="微软雅黑"/>
+                <a:ea typeface="微软雅黑"/>
+              </a:rPr>
+              <a:t>上下文传递载体</a:t>
+            </a:r>
+          </a:p>
+          <a:p>
+            <a:pPr algn="l">
+              <a:lnSpc>
+                <a:spcPct val="118000"/>
+              </a:lnSpc>
+            </a:pPr>
+            <a:r>
+              <a:rPr sz="1050" b="0">
+                <a:solidFill>
+                  <a:srgbClr val="0F172A"/>
+                </a:solidFill>
+                <a:latin typeface="微软雅黑"/>
+                <a:ea typeface="微软雅黑"/>
+              </a:rPr>
+              <a:t>MinIO shared/tasks/&lt;id&gt;/ · KB 结构化中间结论 · Matrix 时间线</a:t>
+            </a:r>
+          </a:p>
+          <a:p>
+            <a:pPr algn="l">
+              <a:lnSpc>
+                <a:spcPct val="102000"/>
+              </a:lnSpc>
+            </a:pPr>
+            <a:r>
+              <a:rPr sz="900" b="0">
+                <a:solidFill>
+                  <a:srgbClr val="64748B"/>
+                </a:solidFill>
+                <a:latin typeface="微软雅黑"/>
+                <a:ea typeface="微软雅黑"/>
+              </a:rPr>
+              <a:t>Worker 无状态可替换</a:t>
+            </a:r>
+          </a:p>
+        </p:txBody>
+      </p:sp>
+      <p:sp>
+        <p:nvSpPr>
+          <p:cNvPr id="8" name="Rounded Rectangle 7"/>
+          <p:cNvSpPr/>
+          <p:nvPr/>
+        </p:nvSpPr>
+        <p:spPr>
+          <a:xfrm>
+            <a:off x="502920" y="2468880"/>
+            <a:ext cx="2606040" cy="1051560"/>
+          </a:xfrm>
+          <a:prstGeom prst="roundRect">
+            <a:avLst>
+              <a:gd name="adj" fmla="val 10000"/>
+            </a:avLst>
+          </a:prstGeom>
+          <a:solidFill>
+            <a:srgbClr val="2E5BFF"/>
+          </a:solidFill>
+          <a:ln>
+            <a:noFill/>
+          </a:ln>
+          <a:effectLst/>
+        </p:spPr>
+        <p:style>
+          <a:lnRef idx="1">
+            <a:schemeClr val="accent1"/>
+          </a:lnRef>
+          <a:fillRef idx="3">
+            <a:schemeClr val="accent1"/>
+          </a:fillRef>
+          <a:effectRef idx="2">
+            <a:schemeClr val="accent1"/>
+          </a:effectRef>
+          <a:fontRef idx="minor">
+            <a:schemeClr val="lt1"/>
+          </a:fontRef>
+        </p:style>
+        <p:txBody>
+          <a:bodyPr rtlCol="0" anchor="ctr" wrap="square" lIns="54864" rIns="54864" tIns="18288" bIns="18288"/>
+          <a:lstStyle/>
+          <a:p>
+            <a:pPr algn="ctr">
+              <a:lnSpc>
+                <a:spcPct val="102000"/>
+              </a:lnSpc>
+            </a:pPr>
+            <a:r>
+              <a:rPr sz="1150" b="1">
+                <a:solidFill>
+                  <a:srgbClr val="FFFFFF"/>
+                </a:solidFill>
+                <a:latin typeface="微软雅黑"/>
+                <a:ea typeface="微软雅黑"/>
+              </a:rPr>
+              <a:t>A1 采集者</a:t>
+            </a:r>
+          </a:p>
+          <a:p>
+            <a:pPr algn="ctr">
+              <a:lnSpc>
+                <a:spcPct val="118000"/>
+              </a:lnSpc>
+            </a:pPr>
+            <a:r>
+              <a:rPr sz="1050" b="0">
+                <a:solidFill>
+                  <a:srgbClr val="FFFFFF"/>
+                </a:solidFill>
+                <a:latin typeface="微软雅黑"/>
+                <a:ea typeface="微软雅黑"/>
+              </a:rPr>
+              <a:t>聚合/去重/分级</a:t>
+            </a:r>
+          </a:p>
+          <a:p>
+            <a:pPr algn="ctr">
+              <a:lnSpc>
+                <a:spcPct val="102000"/>
+              </a:lnSpc>
+            </a:pPr>
+            <a:r>
+              <a:rPr sz="900" b="0">
+                <a:solidFill>
+                  <a:srgbClr val="DCE6FF"/>
+                </a:solidFill>
+                <a:latin typeface="微软雅黑"/>
+                <a:ea typeface="微软雅黑"/>
+              </a:rPr>
+              <a:t>NT-WORLD</a:t>
+            </a:r>
+          </a:p>
+        </p:txBody>
+      </p:sp>
+      <p:sp>
+        <p:nvSpPr>
+          <p:cNvPr id="9" name="Right Arrow 8"/>
+          <p:cNvSpPr/>
+          <p:nvPr/>
+        </p:nvSpPr>
+        <p:spPr>
+          <a:xfrm>
+            <a:off x="3108960" y="2834640"/>
+            <a:ext cx="320040" cy="365760"/>
+          </a:xfrm>
+          <a:prstGeom prst="rightArrow">
+            <a:avLst>
+              <a:gd name="adj1" fmla="val 10000"/>
+              <a:gd name="adj2" fmla="val 50000"/>
+            </a:avLst>
+          </a:prstGeom>
+          <a:solidFill>
+            <a:srgbClr val="2E5BFF"/>
+          </a:solidFill>
+          <a:ln>
+            <a:noFill/>
+          </a:ln>
+          <a:effectLst/>
+        </p:spPr>
+        <p:style>
+          <a:lnRef idx="1">
+            <a:schemeClr val="accent1"/>
+          </a:lnRef>
+          <a:fillRef idx="3">
+            <a:schemeClr val="accent1"/>
+          </a:fillRef>
+          <a:effectRef idx="2">
+            <a:schemeClr val="accent1"/>
+          </a:effectRef>
+          <a:fontRef idx="minor">
+            <a:schemeClr val="lt1"/>
+          </a:fontRef>
+        </p:style>
+        <p:txBody>
+          <a:bodyPr rtlCol="0" anchor="ctr"/>
+          <a:lstStyle/>
+          <a:p>
+            <a:pPr algn="ctr"/>
+          </a:p>
+        </p:txBody>
+      </p:sp>
+      <p:sp>
+        <p:nvSpPr>
+          <p:cNvPr id="10" name="Rounded Rectangle 9"/>
+          <p:cNvSpPr/>
+          <p:nvPr/>
+        </p:nvSpPr>
+        <p:spPr>
+          <a:xfrm>
+            <a:off x="3429000" y="2468880"/>
+            <a:ext cx="2606040" cy="1051560"/>
+          </a:xfrm>
+          <a:prstGeom prst="roundRect">
+            <a:avLst>
+              <a:gd name="adj" fmla="val 10000"/>
+            </a:avLst>
+          </a:prstGeom>
+          <a:solidFill>
+            <a:srgbClr val="2E5BFF"/>
+          </a:solidFill>
+          <a:ln>
+            <a:noFill/>
+          </a:ln>
+          <a:effectLst/>
+        </p:spPr>
+        <p:style>
+          <a:lnRef idx="1">
+            <a:schemeClr val="accent1"/>
+          </a:lnRef>
+          <a:fillRef idx="3">
+            <a:schemeClr val="accent1"/>
+          </a:fillRef>
+          <a:effectRef idx="2">
+            <a:schemeClr val="accent1"/>
+          </a:effectRef>
+          <a:fontRef idx="minor">
+            <a:schemeClr val="lt1"/>
+          </a:fontRef>
+        </p:style>
+        <p:txBody>
+          <a:bodyPr rtlCol="0" anchor="ctr" wrap="square" lIns="54864" rIns="54864" tIns="18288" bIns="18288"/>
+          <a:lstStyle/>
+          <a:p>
+            <a:pPr algn="ctr">
+              <a:lnSpc>
+                <a:spcPct val="102000"/>
+              </a:lnSpc>
+            </a:pPr>
+            <a:r>
+              <a:rPr sz="1150" b="1">
+                <a:solidFill>
+                  <a:srgbClr val="FFFFFF"/>
+                </a:solidFill>
+                <a:latin typeface="微软雅黑"/>
+                <a:ea typeface="微软雅黑"/>
+              </a:rPr>
+              <a:t>A2 诊断者</a:t>
+            </a:r>
+          </a:p>
+          <a:p>
+            <a:pPr algn="ctr">
+              <a:lnSpc>
+                <a:spcPct val="118000"/>
+              </a:lnSpc>
+            </a:pPr>
+            <a:r>
+              <a:rPr sz="1050" b="0">
+                <a:solidFill>
+                  <a:srgbClr val="FFFFFF"/>
+                </a:solidFill>
+                <a:latin typeface="微软雅黑"/>
+                <a:ea typeface="微软雅黑"/>
+              </a:rPr>
+              <a:t>E8 根因定位</a:t>
+            </a:r>
+          </a:p>
+          <a:p>
+            <a:pPr algn="ctr">
+              <a:lnSpc>
+                <a:spcPct val="102000"/>
+              </a:lnSpc>
+            </a:pPr>
+            <a:r>
+              <a:rPr sz="900" b="0">
+                <a:solidFill>
+                  <a:srgbClr val="DCE6FF"/>
+                </a:solidFill>
+                <a:latin typeface="微软雅黑"/>
+                <a:ea typeface="微软雅黑"/>
+              </a:rPr>
+              <a:t>NT-MIND</a:t>
+            </a:r>
+          </a:p>
+        </p:txBody>
+      </p:sp>
+      <p:sp>
+        <p:nvSpPr>
+          <p:cNvPr id="11" name="Right Arrow 10"/>
+          <p:cNvSpPr/>
+          <p:nvPr/>
+        </p:nvSpPr>
+        <p:spPr>
+          <a:xfrm>
+            <a:off x="6035040" y="2834640"/>
+            <a:ext cx="320040" cy="365760"/>
+          </a:xfrm>
+          <a:prstGeom prst="rightArrow">
+            <a:avLst>
+              <a:gd name="adj1" fmla="val 10000"/>
+              <a:gd name="adj2" fmla="val 50000"/>
+            </a:avLst>
+          </a:prstGeom>
+          <a:solidFill>
+            <a:srgbClr val="2E5BFF"/>
+          </a:solidFill>
+          <a:ln>
+            <a:noFill/>
+          </a:ln>
+          <a:effectLst/>
+        </p:spPr>
+        <p:style>
+          <a:lnRef idx="1">
+            <a:schemeClr val="accent1"/>
+          </a:lnRef>
+          <a:fillRef idx="3">
+            <a:schemeClr val="accent1"/>
+          </a:fillRef>
+          <a:effectRef idx="2">
+            <a:schemeClr val="accent1"/>
+          </a:effectRef>
+          <a:fontRef idx="minor">
+            <a:schemeClr val="lt1"/>
+          </a:fontRef>
+        </p:style>
+        <p:txBody>
+          <a:bodyPr rtlCol="0" anchor="ctr"/>
+          <a:lstStyle/>
+          <a:p>
+            <a:pPr algn="ctr"/>
+          </a:p>
+        </p:txBody>
+      </p:sp>
+      <p:sp>
+        <p:nvSpPr>
+          <p:cNvPr id="12" name="Rounded Rectangle 11"/>
+          <p:cNvSpPr/>
+          <p:nvPr/>
+        </p:nvSpPr>
+        <p:spPr>
+          <a:xfrm>
+            <a:off x="6355080" y="2468880"/>
+            <a:ext cx="2606040" cy="1051560"/>
+          </a:xfrm>
+          <a:prstGeom prst="roundRect">
+            <a:avLst>
+              <a:gd name="adj" fmla="val 10000"/>
+            </a:avLst>
+          </a:prstGeom>
+          <a:solidFill>
+            <a:srgbClr val="2E5BFF"/>
+          </a:solidFill>
+          <a:ln>
+            <a:noFill/>
+          </a:ln>
+          <a:effectLst/>
+        </p:spPr>
+        <p:style>
+          <a:lnRef idx="1">
+            <a:schemeClr val="accent1"/>
+          </a:lnRef>
+          <a:fillRef idx="3">
+            <a:schemeClr val="accent1"/>
+          </a:fillRef>
+          <a:effectRef idx="2">
+            <a:schemeClr val="accent1"/>
+          </a:effectRef>
+          <a:fontRef idx="minor">
+            <a:schemeClr val="lt1"/>
+          </a:fontRef>
+        </p:style>
+        <p:txBody>
+          <a:bodyPr rtlCol="0" anchor="ctr" wrap="square" lIns="54864" rIns="54864" tIns="18288" bIns="18288"/>
+          <a:lstStyle/>
+          <a:p>
+            <a:pPr algn="ctr">
+              <a:lnSpc>
+                <a:spcPct val="102000"/>
+              </a:lnSpc>
+            </a:pPr>
+            <a:r>
+              <a:rPr sz="1150" b="1">
+                <a:solidFill>
+                  <a:srgbClr val="FFFFFF"/>
+                </a:solidFill>
+                <a:latin typeface="微软雅黑"/>
+                <a:ea typeface="微软雅黑"/>
+              </a:rPr>
+              <a:t>A3 实施者</a:t>
+            </a:r>
+          </a:p>
+          <a:p>
+            <a:pPr algn="ctr">
+              <a:lnSpc>
+                <a:spcPct val="118000"/>
+              </a:lnSpc>
+            </a:pPr>
+            <a:r>
+              <a:rPr sz="1050" b="0">
+                <a:solidFill>
+                  <a:srgbClr val="FFFFFF"/>
+                </a:solidFill>
+                <a:latin typeface="微软雅黑"/>
+                <a:ea typeface="微软雅黑"/>
+              </a:rPr>
+              <a:t>TDD 修复</a:t>
+            </a:r>
+          </a:p>
+          <a:p>
+            <a:pPr algn="ctr">
+              <a:lnSpc>
+                <a:spcPct val="102000"/>
+              </a:lnSpc>
+            </a:pPr>
+            <a:r>
+              <a:rPr sz="900" b="0">
+                <a:solidFill>
+                  <a:srgbClr val="DCE6FF"/>
+                </a:solidFill>
+                <a:latin typeface="微软雅黑"/>
+                <a:ea typeface="微软雅黑"/>
+              </a:rPr>
+              <a:t>NT-ACT</a:t>
+            </a:r>
+          </a:p>
+        </p:txBody>
+      </p:sp>
+      <p:sp>
+        <p:nvSpPr>
+          <p:cNvPr id="13" name="Right Arrow 12"/>
+          <p:cNvSpPr/>
+          <p:nvPr/>
+        </p:nvSpPr>
+        <p:spPr>
+          <a:xfrm>
+            <a:off x="8961120" y="2834640"/>
+            <a:ext cx="320040" cy="365760"/>
+          </a:xfrm>
+          <a:prstGeom prst="rightArrow">
+            <a:avLst>
+              <a:gd name="adj1" fmla="val 10000"/>
+              <a:gd name="adj2" fmla="val 50000"/>
+            </a:avLst>
+          </a:prstGeom>
+          <a:solidFill>
+            <a:srgbClr val="2E5BFF"/>
+          </a:solidFill>
+          <a:ln>
+            <a:noFill/>
+          </a:ln>
+          <a:effectLst/>
+        </p:spPr>
+        <p:style>
+          <a:lnRef idx="1">
+            <a:schemeClr val="accent1"/>
+          </a:lnRef>
+          <a:fillRef idx="3">
+            <a:schemeClr val="accent1"/>
+          </a:fillRef>
+          <a:effectRef idx="2">
+            <a:schemeClr val="accent1"/>
+          </a:effectRef>
+          <a:fontRef idx="minor">
+            <a:schemeClr val="lt1"/>
+          </a:fontRef>
+        </p:style>
+        <p:txBody>
+          <a:bodyPr rtlCol="0" anchor="ctr"/>
+          <a:lstStyle/>
+          <a:p>
+            <a:pPr algn="ctr"/>
+          </a:p>
+        </p:txBody>
+      </p:sp>
+      <p:sp>
+        <p:nvSpPr>
+          <p:cNvPr id="14" name="Rounded Rectangle 13"/>
+          <p:cNvSpPr/>
+          <p:nvPr/>
+        </p:nvSpPr>
+        <p:spPr>
+          <a:xfrm>
+            <a:off x="9281160" y="2468880"/>
+            <a:ext cx="2606040" cy="1051560"/>
+          </a:xfrm>
+          <a:prstGeom prst="roundRect">
+            <a:avLst>
+              <a:gd name="adj" fmla="val 10000"/>
+            </a:avLst>
+          </a:prstGeom>
+          <a:solidFill>
+            <a:srgbClr val="2E5BFF"/>
+          </a:solidFill>
+          <a:ln>
+            <a:noFill/>
+          </a:ln>
+          <a:effectLst/>
+        </p:spPr>
+        <p:style>
+          <a:lnRef idx="1">
+            <a:schemeClr val="accent1"/>
+          </a:lnRef>
+          <a:fillRef idx="3">
+            <a:schemeClr val="accent1"/>
+          </a:fillRef>
+          <a:effectRef idx="2">
+            <a:schemeClr val="accent1"/>
+          </a:effectRef>
+          <a:fontRef idx="minor">
+            <a:schemeClr val="lt1"/>
+          </a:fontRef>
+        </p:style>
+        <p:txBody>
+          <a:bodyPr rtlCol="0" anchor="ctr" wrap="square" lIns="54864" rIns="54864" tIns="18288" bIns="18288"/>
+          <a:lstStyle/>
+          <a:p>
+            <a:pPr algn="ctr">
+              <a:lnSpc>
+                <a:spcPct val="102000"/>
+              </a:lnSpc>
+            </a:pPr>
+            <a:r>
+              <a:rPr sz="1150" b="1">
+                <a:solidFill>
+                  <a:srgbClr val="FFFFFF"/>
+                </a:solidFill>
+                <a:latin typeface="微软雅黑"/>
+                <a:ea typeface="微软雅黑"/>
+              </a:rPr>
+              <a:t>A4 审查者</a:t>
+            </a:r>
+          </a:p>
+          <a:p>
+            <a:pPr algn="ctr">
+              <a:lnSpc>
+                <a:spcPct val="118000"/>
+              </a:lnSpc>
+            </a:pPr>
+            <a:r>
+              <a:rPr sz="1050" b="0">
+                <a:solidFill>
+                  <a:srgbClr val="FFFFFF"/>
+                </a:solidFill>
+                <a:latin typeface="微软雅黑"/>
+                <a:ea typeface="微软雅黑"/>
+              </a:rPr>
+              <a:t>独立验证·门禁</a:t>
+            </a:r>
+          </a:p>
+          <a:p>
+            <a:pPr algn="ctr">
+              <a:lnSpc>
+                <a:spcPct val="102000"/>
+              </a:lnSpc>
+            </a:pPr>
+            <a:r>
+              <a:rPr sz="900" b="0">
+                <a:solidFill>
+                  <a:srgbClr val="DCE6FF"/>
+                </a:solidFill>
+                <a:latin typeface="微软雅黑"/>
+                <a:ea typeface="微软雅黑"/>
+              </a:rPr>
+              <a:t>NT-SHIELD</a:t>
+            </a:r>
+          </a:p>
+        </p:txBody>
+      </p:sp>
+      <p:sp>
+        <p:nvSpPr>
+          <p:cNvPr id="15" name="Rounded Rectangle 14"/>
+          <p:cNvSpPr/>
+          <p:nvPr/>
+        </p:nvSpPr>
+        <p:spPr>
+          <a:xfrm>
+            <a:off x="6766560" y="3703320"/>
+            <a:ext cx="4937760" cy="457200"/>
+          </a:xfrm>
+          <a:prstGeom prst="roundRect">
+            <a:avLst>
+              <a:gd name="adj" fmla="val 10000"/>
+            </a:avLst>
+          </a:prstGeom>
+          <a:solidFill>
+            <a:srgbClr val="F1F5F9"/>
+          </a:solidFill>
+          <a:ln>
+            <a:noFill/>
+          </a:ln>
+          <a:effectLst/>
+        </p:spPr>
+        <p:style>
+          <a:lnRef idx="1">
+            <a:schemeClr val="accent1"/>
+          </a:lnRef>
+          <a:fillRef idx="3">
+            <a:schemeClr val="accent1"/>
+          </a:fillRef>
+          <a:effectRef idx="2">
+            <a:schemeClr val="accent1"/>
+          </a:effectRef>
+          <a:fontRef idx="minor">
+            <a:schemeClr val="lt1"/>
+          </a:fontRef>
+        </p:style>
+        <p:txBody>
+          <a:bodyPr rtlCol="0" anchor="ctr" wrap="square" lIns="54864" rIns="54864" tIns="18288" bIns="18288"/>
+          <a:lstStyle/>
+          <a:p>
+            <a:pPr algn="l">
+              <a:lnSpc>
+                <a:spcPct val="118000"/>
+              </a:lnSpc>
+            </a:pPr>
+            <a:r>
+              <a:rPr sz="1050" b="1">
+                <a:solidFill>
+                  <a:srgbClr val="EF4444"/>
+                </a:solidFill>
+                <a:latin typeface="微软雅黑"/>
+                <a:ea typeface="微软雅黑"/>
+              </a:rPr>
+              <a:t>A4 审查不通过 → 打回 A3 重试（最多 N 轮，封顶升级人工）</a:t>
+            </a:r>
+          </a:p>
+        </p:txBody>
+      </p:sp>
+      <p:sp>
+        <p:nvSpPr>
+          <p:cNvPr id="16" name="Rounded Rectangle 15"/>
+          <p:cNvSpPr/>
+          <p:nvPr/>
+        </p:nvSpPr>
+        <p:spPr>
+          <a:xfrm>
+            <a:off x="502920" y="4361688"/>
+            <a:ext cx="2606040" cy="1051560"/>
+          </a:xfrm>
+          <a:prstGeom prst="roundRect">
+            <a:avLst>
+              <a:gd name="adj" fmla="val 10000"/>
+            </a:avLst>
+          </a:prstGeom>
+          <a:solidFill>
+            <a:srgbClr val="F5B301"/>
+          </a:solidFill>
+          <a:ln>
+            <a:noFill/>
+          </a:ln>
+          <a:effectLst/>
+        </p:spPr>
+        <p:style>
+          <a:lnRef idx="1">
+            <a:schemeClr val="accent1"/>
+          </a:lnRef>
+          <a:fillRef idx="3">
+            <a:schemeClr val="accent1"/>
+          </a:fillRef>
+          <a:effectRef idx="2">
+            <a:schemeClr val="accent1"/>
+          </a:effectRef>
+          <a:fontRef idx="minor">
+            <a:schemeClr val="lt1"/>
+          </a:fontRef>
+        </p:style>
+        <p:txBody>
+          <a:bodyPr rtlCol="0" anchor="ctr" wrap="square" lIns="54864" rIns="54864" tIns="18288" bIns="18288"/>
+          <a:lstStyle/>
+          <a:p>
+            <a:pPr algn="ctr">
+              <a:lnSpc>
+                <a:spcPct val="102000"/>
+              </a:lnSpc>
+            </a:pPr>
+            <a:r>
+              <a:rPr sz="1150" b="1">
+                <a:solidFill>
+                  <a:srgbClr val="FFFFFF"/>
+                </a:solidFill>
+                <a:latin typeface="微软雅黑"/>
+                <a:ea typeface="微软雅黑"/>
+              </a:rPr>
+              <a:t>A5 沉淀者</a:t>
+            </a:r>
+          </a:p>
+          <a:p>
+            <a:pPr algn="ctr">
+              <a:lnSpc>
+                <a:spcPct val="118000"/>
+              </a:lnSpc>
+            </a:pPr>
+            <a:r>
+              <a:rPr sz="1050" b="0">
+                <a:solidFill>
+                  <a:srgbClr val="FFFFFF"/>
+                </a:solidFill>
+                <a:latin typeface="微软雅黑"/>
+                <a:ea typeface="微软雅黑"/>
+              </a:rPr>
+              <a:t>experience-tree 吸收</a:t>
+            </a:r>
+          </a:p>
+          <a:p>
+            <a:pPr algn="ctr">
+              <a:lnSpc>
+                <a:spcPct val="118000"/>
+              </a:lnSpc>
+            </a:pPr>
+            <a:r>
+              <a:rPr sz="1050" b="0">
+                <a:solidFill>
+                  <a:srgbClr val="FFFFFF"/>
+                </a:solidFill>
+                <a:latin typeface="微软雅黑"/>
+                <a:ea typeface="微软雅黑"/>
+              </a:rPr>
+              <a:t>KB 经验 + Skill 回灌</a:t>
+            </a:r>
+          </a:p>
+        </p:txBody>
+      </p:sp>
+      <p:sp>
+        <p:nvSpPr>
+          <p:cNvPr id="17" name="Right Arrow 16"/>
+          <p:cNvSpPr/>
+          <p:nvPr/>
+        </p:nvSpPr>
+        <p:spPr>
+          <a:xfrm>
+            <a:off x="3154680" y="4636008"/>
+            <a:ext cx="365760" cy="365760"/>
+          </a:xfrm>
+          <a:prstGeom prst="rightArrow">
+            <a:avLst>
+              <a:gd name="adj1" fmla="val 10000"/>
+              <a:gd name="adj2" fmla="val 50000"/>
+            </a:avLst>
+          </a:prstGeom>
+          <a:solidFill>
+            <a:srgbClr val="2E5BFF"/>
+          </a:solidFill>
+          <a:ln>
+            <a:noFill/>
+          </a:ln>
+          <a:effectLst/>
+        </p:spPr>
+        <p:style>
+          <a:lnRef idx="1">
+            <a:schemeClr val="accent1"/>
+          </a:lnRef>
+          <a:fillRef idx="3">
+            <a:schemeClr val="accent1"/>
+          </a:fillRef>
+          <a:effectRef idx="2">
+            <a:schemeClr val="accent1"/>
+          </a:effectRef>
+          <a:fontRef idx="minor">
+            <a:schemeClr val="lt1"/>
+          </a:fontRef>
+        </p:style>
+        <p:txBody>
+          <a:bodyPr rtlCol="0" anchor="ctr"/>
+          <a:lstStyle/>
+          <a:p>
+            <a:pPr algn="ctr"/>
+          </a:p>
+        </p:txBody>
+      </p:sp>
+      <p:sp>
+        <p:nvSpPr>
+          <p:cNvPr id="18" name="Rounded Rectangle 17"/>
+          <p:cNvSpPr/>
+          <p:nvPr/>
+        </p:nvSpPr>
+        <p:spPr>
+          <a:xfrm>
+            <a:off x="3566160" y="4361688"/>
+            <a:ext cx="8092440" cy="1051560"/>
+          </a:xfrm>
+          <a:prstGeom prst="roundRect">
+            <a:avLst>
+              <a:gd name="adj" fmla="val 10000"/>
+            </a:avLst>
+          </a:prstGeom>
+          <a:solidFill>
+            <a:srgbClr val="F1F5F9"/>
+          </a:solidFill>
+          <a:ln>
+            <a:noFill/>
+          </a:ln>
+          <a:effectLst/>
+        </p:spPr>
+        <p:style>
+          <a:lnRef idx="1">
+            <a:schemeClr val="accent1"/>
+          </a:lnRef>
+          <a:fillRef idx="3">
+            <a:schemeClr val="accent1"/>
+          </a:fillRef>
+          <a:effectRef idx="2">
+            <a:schemeClr val="accent1"/>
+          </a:effectRef>
+          <a:fontRef idx="minor">
+            <a:schemeClr val="lt1"/>
+          </a:fontRef>
+        </p:style>
+        <p:txBody>
+          <a:bodyPr rtlCol="0" anchor="ctr" wrap="square" lIns="54864" rIns="54864" tIns="18288" bIns="18288"/>
+          <a:lstStyle/>
+          <a:p>
+            <a:pPr algn="l">
+              <a:lnSpc>
+                <a:spcPct val="102000"/>
+              </a:lnSpc>
+            </a:pPr>
+            <a:r>
+              <a:rPr sz="1150" b="1">
+                <a:solidFill>
+                  <a:srgbClr val="0F172A"/>
+                </a:solidFill>
+                <a:latin typeface="微软雅黑"/>
+                <a:ea typeface="微软雅黑"/>
+              </a:rPr>
+              <a:t>知识库 KB</a:t>
+            </a:r>
+          </a:p>
+          <a:p>
+            <a:pPr algn="l">
+              <a:lnSpc>
+                <a:spcPct val="118000"/>
+              </a:lnSpc>
+            </a:pPr>
+            <a:r>
+              <a:rPr sz="1050" b="0">
+                <a:solidFill>
+                  <a:srgbClr val="0F172A"/>
+                </a:solidFill>
+                <a:latin typeface="微软雅黑"/>
+                <a:ea typeface="微软雅黑"/>
+              </a:rPr>
+              <a:t>experience 命名空间 · 向量+BM25 混合检索</a:t>
+            </a:r>
+          </a:p>
+          <a:p>
+            <a:pPr algn="l">
+              <a:lnSpc>
+                <a:spcPct val="118000"/>
+              </a:lnSpc>
+            </a:pPr>
+            <a:r>
+              <a:rPr sz="1050" b="1">
+                <a:solidFill>
+                  <a:srgbClr val="F5B301"/>
+                </a:solidFill>
+                <a:latin typeface="微软雅黑"/>
+                <a:ea typeface="微软雅黑"/>
+              </a:rPr>
+              <a:t>复盘自动结晶为 Skill → 回灌 Manager 拆解逻辑（自进化闭环）</a:t>
+            </a:r>
+          </a:p>
+        </p:txBody>
+      </p:sp>
+      <p:sp>
+        <p:nvSpPr>
+          <p:cNvPr id="19" name="Rounded Rectangle 18"/>
+          <p:cNvSpPr/>
+          <p:nvPr/>
+        </p:nvSpPr>
+        <p:spPr>
+          <a:xfrm>
+            <a:off x="502920" y="5623560"/>
+            <a:ext cx="11155680" cy="914400"/>
+          </a:xfrm>
+          <a:prstGeom prst="roundRect">
+            <a:avLst>
+              <a:gd name="adj" fmla="val 10000"/>
+            </a:avLst>
+          </a:prstGeom>
+          <a:solidFill>
+            <a:srgbClr val="E2E8F0"/>
+          </a:solidFill>
+          <a:ln>
+            <a:noFill/>
+          </a:ln>
+          <a:effectLst/>
+        </p:spPr>
+        <p:style>
+          <a:lnRef idx="1">
+            <a:schemeClr val="accent1"/>
+          </a:lnRef>
+          <a:fillRef idx="3">
+            <a:schemeClr val="accent1"/>
+          </a:fillRef>
+          <a:effectRef idx="2">
+            <a:schemeClr val="accent1"/>
+          </a:effectRef>
+          <a:fontRef idx="minor">
+            <a:schemeClr val="lt1"/>
+          </a:fontRef>
+        </p:style>
+        <p:txBody>
+          <a:bodyPr rtlCol="0" anchor="ctr" wrap="square" lIns="54864" rIns="54864" tIns="18288" bIns="18288"/>
+          <a:lstStyle/>
+          <a:p>
+            <a:pPr algn="l">
+              <a:lnSpc>
+                <a:spcPct val="118000"/>
+              </a:lnSpc>
+            </a:pPr>
+            <a:r>
+              <a:rPr sz="1000" b="0">
+                <a:solidFill>
+                  <a:srgbClr val="0F172A"/>
+                </a:solidFill>
+                <a:latin typeface="微软雅黑"/>
+                <a:ea typeface="微软雅黑"/>
+              </a:rPr>
+              <a:t>状态流转：Task 状态机（待办→拆解→执行→审查→沉淀）；审查不通过打回 A3，封顶升级人工</a:t>
+            </a:r>
+          </a:p>
+          <a:p>
+            <a:pPr algn="l">
+              <a:lnSpc>
+                <a:spcPct val="118000"/>
+              </a:lnSpc>
+            </a:pPr>
+            <a:r>
+              <a:rPr sz="1000" b="0">
+                <a:solidFill>
+                  <a:srgbClr val="0F172A"/>
+                </a:solidFill>
+                <a:latin typeface="微软雅黑"/>
+                <a:ea typeface="微软雅黑"/>
+              </a:rPr>
+              <a:t>安全边界：高风险动作（改生产/大重构/删数据）→ 人工审批 · Worker 仅持 Higress 消费者令牌 · SHA-256 审计链</a:t>
+            </a:r>
+          </a:p>
+        </p:txBody>
+      </p:sp>
     </p:spTree>
   </p:cSld>
   <p:clrMapOvr>

--- a/competition/goai-agent-infra/初赛方案_NeoTrix研发闭环.pptx
+++ b/competition/goai-agent-infra/初赛方案_NeoTrix研发闭环.pptx
@@ -4746,7 +4746,24 @@
                 <a:latin typeface="微软雅黑"/>
                 <a:ea typeface="微软雅黑"/>
               </a:rPr>
-              <a:t>4240 项测试 · SelfTest T1-T3 三层接线</a:t>
+              <a:t>8000+ 项测试 · SelfTest T1-T3 三层接线</a:t>
+            </a:r>
+          </a:p>
+          <a:p>
+            <a:pPr algn="l">
+              <a:lnSpc>
+                <a:spcPct val="118000"/>
+              </a:lnSpc>
+            </a:pPr>
+            <a:r>
+              <a:rPr sz="1050" b="0">
+                <a:solidFill>
+                  <a:srgbClr val="0F172A"/>
+                </a:solidFill>
+                <a:latin typeface="微软雅黑"/>
+                <a:ea typeface="微软雅黑"/>
+              </a:rPr>
+              <a:t>真实数据回归：26 家价格表 9082 行 / 3267 USD 零失败</a:t>
             </a:r>
           </a:p>
           <a:p>
@@ -6287,7 +6304,7 @@
                 <a:latin typeface="微软雅黑"/>
                 <a:ea typeface="微软雅黑"/>
               </a:rPr>
-              <a:t>4240 测试背书</a:t>
+              <a:t>8000+ 测试背书</a:t>
             </a:r>
           </a:p>
           <a:p>
@@ -7985,7 +8002,7 @@
           </a:p>
           <a:p>
             <a:r>
-              <a:t>团队成果：NeoTrix 开源项目（4240 项测试、RQGM 论文 arXiv:2606.26294）；软件研发全流程多 Agent 协同系统</a:t>
+              <a:t>团队成果：NeoTrix 开源项目（8000+ 项测试、RQGM 论文 arXiv:2606.26294）；软件研发全流程多 Agent 协同系统</a:t>
             </a:r>
           </a:p>
           <a:p>
@@ -8726,7 +8743,7 @@
                 <a:ea typeface="微软雅黑" pitchFamily="34" charset="-122"/>
                 <a:cs typeface="微软雅黑" pitchFamily="34" charset="-120"/>
               </a:rPr>
-              <a:t>① E8 确定性 64 态推理内核，根因定位可复现；② SelfTest T1-T3 生产门禁（4240 测试）+ 复盘自动结晶为 Skill。</a:t>
+              <a:t>① E8 确定性 64 态推理内核，根因定位可复现；② SelfTest T1-T3 生产门禁（8000+ 测试）+ 复盘自动结晶为 Skill。</a:t>
             </a:r>
             <a:endParaRPr lang="en-US" sz="1050" dirty="0"/>
           </a:p>
@@ -9040,7 +9057,7 @@
                 <a:ea typeface="微软雅黑" pitchFamily="34" charset="-122"/>
                 <a:cs typeface="微软雅黑" pitchFamily="34" charset="-120"/>
               </a:rPr>
-              <a:t>方案设计完成；7 域架构 23.6 万行 + 4240 测试 + MCP/Skill/KB 基础设施可支撑复赛 Demo。</a:t>
+              <a:t>方案设计完成；7 域架构 40 万行 + 8000+ 测试 + MCP/Skill/KB 基础设施可支撑复赛 Demo。</a:t>
             </a:r>
             <a:endParaRPr lang="en-US" sz="1050" dirty="0"/>
           </a:p>
